--- a/Aula 03/Aula03.pptx
+++ b/Aula 03/Aula03.pptx
@@ -15,7 +15,17 @@
     <p:sldId id="272" r:id="rId9"/>
     <p:sldId id="273" r:id="rId10"/>
     <p:sldId id="274" r:id="rId11"/>
-    <p:sldId id="275" r:id="rId12"/>
+    <p:sldId id="276" r:id="rId12"/>
+    <p:sldId id="277" r:id="rId13"/>
+    <p:sldId id="278" r:id="rId14"/>
+    <p:sldId id="279" r:id="rId15"/>
+    <p:sldId id="280" r:id="rId16"/>
+    <p:sldId id="281" r:id="rId17"/>
+    <p:sldId id="282" r:id="rId18"/>
+    <p:sldId id="283" r:id="rId19"/>
+    <p:sldId id="284" r:id="rId20"/>
+    <p:sldId id="285" r:id="rId21"/>
+    <p:sldId id="286" r:id="rId22"/>
   </p:sldIdLst>
   <p:sldSz cx="12192000" cy="6858000"/>
   <p:notesSz cx="6858000" cy="9144000"/>
@@ -290,7 +300,7 @@
           <a:p>
             <a:fld id="{9E016143-E03C-4CFD-AFDC-14E5BDEA754C}" type="datetimeFigureOut">
               <a:rPr lang="en-US" dirty="0"/>
-              <a:t>7/2/2025</a:t>
+              <a:t>7/5/2025</a:t>
             </a:fld>
             <a:endParaRPr lang="en-US" dirty="0"/>
           </a:p>
@@ -514,7 +524,7 @@
           <a:p>
             <a:fld id="{C033E54A-A8CA-48C1-9504-691B58049D29}" type="datetimeFigureOut">
               <a:rPr lang="en-US" dirty="0"/>
-              <a:t>7/2/2025</a:t>
+              <a:t>7/5/2025</a:t>
             </a:fld>
             <a:endParaRPr lang="en-US" dirty="0"/>
           </a:p>
@@ -689,7 +699,7 @@
           <a:p>
             <a:fld id="{B5F6C806-BBF7-471C-9527-881CE2266695}" type="datetimeFigureOut">
               <a:rPr lang="en-US" dirty="0"/>
-              <a:t>7/2/2025</a:t>
+              <a:t>7/5/2025</a:t>
             </a:fld>
             <a:endParaRPr lang="en-US" dirty="0"/>
           </a:p>
@@ -854,7 +864,7 @@
           <a:p>
             <a:fld id="{78C94063-DF36-4330-A365-08DA1FA5B7D6}" type="datetimeFigureOut">
               <a:rPr lang="en-US" dirty="0"/>
-              <a:t>7/2/2025</a:t>
+              <a:t>7/5/2025</a:t>
             </a:fld>
             <a:endParaRPr lang="en-US" dirty="0"/>
           </a:p>
@@ -1103,7 +1113,7 @@
           <a:p>
             <a:fld id="{908A7C6C-0F39-4D70-8E8D-FE5B9C95FA73}" type="datetimeFigureOut">
               <a:rPr lang="en-US" dirty="0"/>
-              <a:t>7/2/2025</a:t>
+              <a:t>7/5/2025</a:t>
             </a:fld>
             <a:endParaRPr lang="en-US" dirty="0"/>
           </a:p>
@@ -1424,7 +1434,7 @@
           <a:p>
             <a:fld id="{DFCFA4AC-08CC-42CE-BD01-C191750A04EC}" type="datetimeFigureOut">
               <a:rPr lang="en-US" dirty="0"/>
-              <a:t>7/2/2025</a:t>
+              <a:t>7/5/2025</a:t>
             </a:fld>
             <a:endParaRPr lang="en-US" dirty="0"/>
           </a:p>
@@ -1870,7 +1880,7 @@
           <a:p>
             <a:fld id="{1BA7A723-92A7-435B-B681-F25B092FEFEB}" type="datetimeFigureOut">
               <a:rPr lang="en-US" dirty="0"/>
-              <a:t>7/2/2025</a:t>
+              <a:t>7/5/2025</a:t>
             </a:fld>
             <a:endParaRPr lang="en-US" dirty="0"/>
           </a:p>
@@ -1983,7 +1993,7 @@
           <a:p>
             <a:fld id="{4F170639-886C-4FCF-9EAB-ABB5DA3F3F4A}" type="datetimeFigureOut">
               <a:rPr lang="en-US" dirty="0"/>
-              <a:t>7/2/2025</a:t>
+              <a:t>7/5/2025</a:t>
             </a:fld>
             <a:endParaRPr lang="en-US" dirty="0"/>
           </a:p>
@@ -2073,7 +2083,7 @@
           <a:p>
             <a:fld id="{22230651-31F4-45D2-98AE-A2108F41BC07}" type="datetimeFigureOut">
               <a:rPr lang="en-US" dirty="0"/>
-              <a:t>7/2/2025</a:t>
+              <a:t>7/5/2025</a:t>
             </a:fld>
             <a:endParaRPr lang="en-US" dirty="0"/>
           </a:p>
@@ -2355,7 +2365,7 @@
           <a:p>
             <a:fld id="{6F53789A-C914-4DB1-8815-80B5EC7335C5}" type="datetimeFigureOut">
               <a:rPr lang="en-US" dirty="0"/>
-              <a:t>7/2/2025</a:t>
+              <a:t>7/5/2025</a:t>
             </a:fld>
             <a:endParaRPr lang="en-US" dirty="0"/>
           </a:p>
@@ -2672,7 +2682,7 @@
           <a:p>
             <a:fld id="{5E6440AA-91A0-436F-8FDB-C0F939DCAE21}" type="datetimeFigureOut">
               <a:rPr lang="en-US" dirty="0"/>
-              <a:t>7/2/2025</a:t>
+              <a:t>7/5/2025</a:t>
             </a:fld>
             <a:endParaRPr lang="en-US" dirty="0"/>
           </a:p>
@@ -2921,7 +2931,7 @@
           <a:p>
             <a:fld id="{0E59FD0C-5451-4CA0-86AF-E70AE3279989}" type="datetimeFigureOut">
               <a:rPr lang="en-US" dirty="0"/>
-              <a:t>7/2/2025</a:t>
+              <a:t>7/5/2025</a:t>
             </a:fld>
             <a:endParaRPr lang="en-US" dirty="0"/>
           </a:p>
@@ -4310,8 +4320,8 @@
         </p:nvSpPr>
         <p:spPr>
           <a:xfrm>
-            <a:off x="338844" y="1813173"/>
-            <a:ext cx="10088523" cy="2523768"/>
+            <a:off x="338844" y="1799726"/>
+            <a:ext cx="10088523" cy="3662541"/>
           </a:xfrm>
           <a:prstGeom prst="rect">
             <a:avLst/>
@@ -4609,6 +4619,155 @@
               <a:rPr lang="pt-BR" sz="2000" b="1" dirty="0"/>
               <a:t>;</a:t>
             </a:r>
+          </a:p>
+          <a:p>
+            <a:endParaRPr lang="pt-BR" sz="2000" b="1" dirty="0"/>
+          </a:p>
+          <a:p>
+            <a:r>
+              <a:rPr lang="pt-BR" b="1" dirty="0"/>
+              <a:t>6 - Mostrar nome do produto com “Monitor” substituído por “Tela”:</a:t>
+            </a:r>
+            <a:endParaRPr lang="pt-BR" sz="2000" b="1" dirty="0"/>
+          </a:p>
+          <a:p>
+            <a:r>
+              <a:rPr lang="pt-BR" b="1" dirty="0">
+                <a:solidFill>
+                  <a:srgbClr val="0000FF"/>
+                </a:solidFill>
+              </a:rPr>
+              <a:t>SELECT</a:t>
+            </a:r>
+            <a:r>
+              <a:rPr lang="pt-BR" dirty="0"/>
+              <a:t> </a:t>
+            </a:r>
+            <a:r>
+              <a:rPr lang="pt-BR" b="1" dirty="0">
+                <a:solidFill>
+                  <a:srgbClr val="0000FF"/>
+                </a:solidFill>
+              </a:rPr>
+              <a:t>REPLACE</a:t>
+            </a:r>
+            <a:r>
+              <a:rPr lang="pt-BR" b="1" dirty="0"/>
+              <a:t>(</a:t>
+            </a:r>
+            <a:r>
+              <a:rPr lang="pt-BR" dirty="0" err="1">
+                <a:solidFill>
+                  <a:schemeClr val="bg1">
+                    <a:lumMod val="50000"/>
+                  </a:schemeClr>
+                </a:solidFill>
+              </a:rPr>
+              <a:t>nome_produto</a:t>
+            </a:r>
+            <a:r>
+              <a:rPr lang="pt-BR" b="1" dirty="0"/>
+              <a:t>,</a:t>
+            </a:r>
+            <a:r>
+              <a:rPr lang="pt-BR" dirty="0"/>
+              <a:t> '</a:t>
+            </a:r>
+            <a:r>
+              <a:rPr lang="pt-BR" dirty="0">
+                <a:solidFill>
+                  <a:schemeClr val="bg1">
+                    <a:lumMod val="50000"/>
+                  </a:schemeClr>
+                </a:solidFill>
+              </a:rPr>
+              <a:t>Monitor</a:t>
+            </a:r>
+            <a:r>
+              <a:rPr lang="pt-BR" dirty="0"/>
+              <a:t>'</a:t>
+            </a:r>
+            <a:r>
+              <a:rPr lang="pt-BR" b="1" dirty="0"/>
+              <a:t>,</a:t>
+            </a:r>
+            <a:r>
+              <a:rPr lang="pt-BR" dirty="0"/>
+              <a:t> </a:t>
+            </a:r>
+            <a:r>
+              <a:rPr lang="pt-BR" dirty="0">
+                <a:solidFill>
+                  <a:schemeClr val="bg1">
+                    <a:lumMod val="50000"/>
+                  </a:schemeClr>
+                </a:solidFill>
+              </a:rPr>
+              <a:t>'Tela</a:t>
+            </a:r>
+            <a:r>
+              <a:rPr lang="pt-BR" dirty="0"/>
+              <a:t>'</a:t>
+            </a:r>
+            <a:r>
+              <a:rPr lang="pt-BR" b="1" dirty="0"/>
+              <a:t>)</a:t>
+            </a:r>
+            <a:r>
+              <a:rPr lang="pt-BR" dirty="0"/>
+              <a:t> </a:t>
+            </a:r>
+            <a:r>
+              <a:rPr lang="pt-BR" b="1" dirty="0">
+                <a:solidFill>
+                  <a:srgbClr val="0000FF"/>
+                </a:solidFill>
+              </a:rPr>
+              <a:t>AS</a:t>
+            </a:r>
+            <a:r>
+              <a:rPr lang="pt-BR" dirty="0"/>
+              <a:t> </a:t>
+            </a:r>
+            <a:r>
+              <a:rPr lang="pt-BR" dirty="0" err="1">
+                <a:solidFill>
+                  <a:schemeClr val="bg1">
+                    <a:lumMod val="50000"/>
+                  </a:schemeClr>
+                </a:solidFill>
+              </a:rPr>
+              <a:t>nome_editado</a:t>
+            </a:r>
+            <a:br>
+              <a:rPr lang="pt-BR" dirty="0"/>
+            </a:br>
+            <a:r>
+              <a:rPr lang="pt-BR" b="1" dirty="0">
+                <a:solidFill>
+                  <a:srgbClr val="0000FF"/>
+                </a:solidFill>
+              </a:rPr>
+              <a:t>FROM</a:t>
+            </a:r>
+            <a:r>
+              <a:rPr lang="pt-BR" dirty="0"/>
+              <a:t> </a:t>
+            </a:r>
+            <a:r>
+              <a:rPr lang="pt-BR" dirty="0">
+                <a:solidFill>
+                  <a:schemeClr val="bg1">
+                    <a:lumMod val="50000"/>
+                  </a:schemeClr>
+                </a:solidFill>
+              </a:rPr>
+              <a:t>produtos</a:t>
+            </a:r>
+            <a:r>
+              <a:rPr lang="pt-BR" b="1" dirty="0"/>
+              <a:t>;</a:t>
+            </a:r>
             <a:endParaRPr lang="pt-BR" sz="2000" dirty="0"/>
           </a:p>
           <a:p>
@@ -4619,7 +4778,5583 @@
     </p:spTree>
     <p:extLst>
       <p:ext uri="{BB962C8B-B14F-4D97-AF65-F5344CB8AC3E}">
-        <p14:creationId xmlns:p14="http://schemas.microsoft.com/office/powerpoint/2010/main" val="1608341671"/>
+        <p14:creationId xmlns:p14="http://schemas.microsoft.com/office/powerpoint/2010/main" val="2904900804"/>
+      </p:ext>
+    </p:extLst>
+  </p:cSld>
+  <p:clrMapOvr>
+    <a:masterClrMapping/>
+  </p:clrMapOvr>
+</p:sld>
+</file>
+
+<file path=ppt/slides/slide12.xml><?xml version="1.0" encoding="utf-8"?>
+<p:sld xmlns:a="http://schemas.openxmlformats.org/drawingml/2006/main" xmlns:r="http://schemas.openxmlformats.org/officeDocument/2006/relationships" xmlns:p="http://schemas.openxmlformats.org/presentationml/2006/main">
+  <p:cSld>
+    <p:spTree>
+      <p:nvGrpSpPr>
+        <p:cNvPr id="1" name=""/>
+        <p:cNvGrpSpPr/>
+        <p:nvPr/>
+      </p:nvGrpSpPr>
+      <p:grpSpPr>
+        <a:xfrm>
+          <a:off x="0" y="0"/>
+          <a:ext cx="0" cy="0"/>
+          <a:chOff x="0" y="0"/>
+          <a:chExt cx="0" cy="0"/>
+        </a:xfrm>
+      </p:grpSpPr>
+      <p:sp>
+        <p:nvSpPr>
+          <p:cNvPr id="2" name="Título 1">
+            <a:extLst>
+              <a:ext uri="{FF2B5EF4-FFF2-40B4-BE49-F238E27FC236}">
+                <a16:creationId xmlns:a16="http://schemas.microsoft.com/office/drawing/2014/main" id="{E1BF4364-A6CD-4460-A48D-6779B48ADDBE}"/>
+              </a:ext>
+            </a:extLst>
+          </p:cNvPr>
+          <p:cNvSpPr>
+            <a:spLocks noGrp="1"/>
+          </p:cNvSpPr>
+          <p:nvPr>
+            <p:ph type="title"/>
+          </p:nvPr>
+        </p:nvSpPr>
+        <p:spPr>
+          <a:xfrm>
+            <a:off x="338845" y="167353"/>
+            <a:ext cx="9692640" cy="1533440"/>
+          </a:xfrm>
+        </p:spPr>
+        <p:txBody>
+          <a:bodyPr>
+            <a:noAutofit/>
+          </a:bodyPr>
+          <a:lstStyle/>
+          <a:p>
+            <a:r>
+              <a:rPr lang="pt-BR" sz="4200" b="1" dirty="0">
+                <a:solidFill>
+                  <a:srgbClr val="00758F"/>
+                </a:solidFill>
+              </a:rPr>
+              <a:t>Consultas com Funções: </a:t>
+            </a:r>
+            <a:br>
+              <a:rPr lang="pt-BR" sz="4200" b="1" dirty="0">
+                <a:solidFill>
+                  <a:srgbClr val="00758F"/>
+                </a:solidFill>
+              </a:rPr>
+            </a:br>
+            <a:r>
+              <a:rPr lang="pt-BR" sz="4200" b="1" dirty="0">
+                <a:solidFill>
+                  <a:srgbClr val="F39211"/>
+                </a:solidFill>
+              </a:rPr>
+              <a:t>1.3</a:t>
+            </a:r>
+            <a:r>
+              <a:rPr lang="pt-BR" sz="4200" b="1" dirty="0">
+                <a:solidFill>
+                  <a:srgbClr val="00758F"/>
+                </a:solidFill>
+              </a:rPr>
+              <a:t> </a:t>
+            </a:r>
+            <a:r>
+              <a:rPr lang="pt-BR" sz="4200" b="1" dirty="0">
+                <a:solidFill>
+                  <a:srgbClr val="F39211"/>
+                </a:solidFill>
+              </a:rPr>
+              <a:t>Funções de </a:t>
+            </a:r>
+            <a:r>
+              <a:rPr lang="pt-BR" sz="4200" b="1" dirty="0" err="1">
+                <a:solidFill>
+                  <a:srgbClr val="F39211"/>
+                </a:solidFill>
+              </a:rPr>
+              <a:t>String</a:t>
+            </a:r>
+            <a:r>
+              <a:rPr lang="pt-BR" sz="4200" b="1" dirty="0">
+                <a:solidFill>
+                  <a:srgbClr val="F39211"/>
+                </a:solidFill>
+              </a:rPr>
+              <a:t> (Exercícios)</a:t>
+            </a:r>
+            <a:endParaRPr lang="pt-BR" sz="4200" dirty="0">
+              <a:solidFill>
+                <a:srgbClr val="F39211"/>
+              </a:solidFill>
+            </a:endParaRPr>
+          </a:p>
+        </p:txBody>
+      </p:sp>
+      <p:pic>
+        <p:nvPicPr>
+          <p:cNvPr id="4" name="Picture 6" descr="https://www.mysql.com/common/logos/logo-mysql-170x115.png">
+            <a:extLst>
+              <a:ext uri="{FF2B5EF4-FFF2-40B4-BE49-F238E27FC236}">
+                <a16:creationId xmlns:a16="http://schemas.microsoft.com/office/drawing/2014/main" id="{441DFD02-E8A2-4690-9CD7-1CC407F2024E}"/>
+              </a:ext>
+            </a:extLst>
+          </p:cNvPr>
+          <p:cNvPicPr>
+            <a:picLocks noChangeAspect="1" noChangeArrowheads="1"/>
+          </p:cNvPicPr>
+          <p:nvPr/>
+        </p:nvPicPr>
+        <p:blipFill>
+          <a:blip r:embed="rId2">
+            <a:extLst>
+              <a:ext uri="{28A0092B-C50C-407E-A947-70E740481C1C}">
+                <a14:useLocalDpi xmlns:a14="http://schemas.microsoft.com/office/drawing/2010/main" val="0"/>
+              </a:ext>
+            </a:extLst>
+          </a:blip>
+          <a:srcRect/>
+          <a:stretch>
+            <a:fillRect/>
+          </a:stretch>
+        </p:blipFill>
+        <p:spPr bwMode="auto">
+          <a:xfrm>
+            <a:off x="9774793" y="5753675"/>
+            <a:ext cx="1385775" cy="936973"/>
+          </a:xfrm>
+          <a:prstGeom prst="rect">
+            <a:avLst/>
+          </a:prstGeom>
+          <a:noFill/>
+          <a:extLst>
+            <a:ext uri="{909E8E84-426E-40DD-AFC4-6F175D3DCCD1}">
+              <a14:hiddenFill xmlns:a14="http://schemas.microsoft.com/office/drawing/2010/main">
+                <a:solidFill>
+                  <a:srgbClr val="FFFFFF"/>
+                </a:solidFill>
+              </a14:hiddenFill>
+            </a:ext>
+          </a:extLst>
+        </p:spPr>
+      </p:pic>
+      <p:sp>
+        <p:nvSpPr>
+          <p:cNvPr id="6" name="CaixaDeTexto 5">
+            <a:extLst>
+              <a:ext uri="{FF2B5EF4-FFF2-40B4-BE49-F238E27FC236}">
+                <a16:creationId xmlns:a16="http://schemas.microsoft.com/office/drawing/2014/main" id="{AF06CEA4-1D6A-4FB2-B738-A9362ADA1CCA}"/>
+              </a:ext>
+            </a:extLst>
+          </p:cNvPr>
+          <p:cNvSpPr txBox="1"/>
+          <p:nvPr/>
+        </p:nvSpPr>
+        <p:spPr>
+          <a:xfrm>
+            <a:off x="338844" y="1799726"/>
+            <a:ext cx="10088523" cy="3323987"/>
+          </a:xfrm>
+          <a:prstGeom prst="rect">
+            <a:avLst/>
+          </a:prstGeom>
+          <a:noFill/>
+        </p:spPr>
+        <p:txBody>
+          <a:bodyPr wrap="square" rtlCol="0">
+            <a:spAutoFit/>
+          </a:bodyPr>
+          <a:lstStyle/>
+          <a:p>
+            <a:r>
+              <a:rPr lang="pt-BR" sz="2400" b="1" dirty="0"/>
+              <a:t>Exercício 1:</a:t>
+            </a:r>
+            <a:r>
+              <a:rPr lang="pt-BR" sz="2400" dirty="0"/>
+              <a:t> Mostre os nomes dos produtos em letras minúsculas.</a:t>
+            </a:r>
+            <a:br>
+              <a:rPr lang="pt-BR" sz="2400" dirty="0"/>
+            </a:br>
+            <a:endParaRPr lang="pt-BR" sz="2400" dirty="0"/>
+          </a:p>
+          <a:p>
+            <a:r>
+              <a:rPr lang="pt-BR" sz="2400" b="1" dirty="0"/>
+              <a:t>Exercício 2:</a:t>
+            </a:r>
+            <a:r>
+              <a:rPr lang="pt-BR" sz="2400" dirty="0"/>
+              <a:t> Mostre os 4 últimos caracteres do telefone de cada cliente.</a:t>
+            </a:r>
+            <a:br>
+              <a:rPr lang="pt-BR" sz="2400" dirty="0"/>
+            </a:br>
+            <a:endParaRPr lang="pt-BR" sz="2400" dirty="0"/>
+          </a:p>
+          <a:p>
+            <a:r>
+              <a:rPr lang="pt-BR" sz="2400" b="1" dirty="0"/>
+              <a:t>Exercício 3 (desafio):</a:t>
+            </a:r>
+            <a:r>
+              <a:rPr lang="pt-BR" sz="2400" dirty="0"/>
+              <a:t> Mostre uma coluna chamada </a:t>
+            </a:r>
+            <a:r>
+              <a:rPr lang="pt-BR" sz="2400" dirty="0" err="1"/>
+              <a:t>cliente_detalhe</a:t>
+            </a:r>
+            <a:r>
+              <a:rPr lang="pt-BR" sz="2400" dirty="0"/>
+              <a:t> contendo:</a:t>
+            </a:r>
+            <a:br>
+              <a:rPr lang="pt-BR" sz="2400" dirty="0"/>
+            </a:br>
+            <a:r>
+              <a:rPr lang="pt-BR" sz="2400" dirty="0"/>
+              <a:t>“NOME (CIDADE - ESTADO)” → </a:t>
+            </a:r>
+            <a:r>
+              <a:rPr lang="pt-BR" sz="2400" dirty="0" err="1"/>
+              <a:t>Ex</a:t>
+            </a:r>
+            <a:r>
+              <a:rPr lang="pt-BR" sz="2400" dirty="0"/>
+              <a:t>: </a:t>
+            </a:r>
+            <a:r>
+              <a:rPr lang="pt-BR" sz="2400" b="1" dirty="0"/>
+              <a:t>Ana Souza (São Paulo - SP)</a:t>
+            </a:r>
+            <a:br>
+              <a:rPr lang="pt-BR" b="1" dirty="0"/>
+            </a:br>
+            <a:endParaRPr lang="pt-BR" dirty="0"/>
+          </a:p>
+        </p:txBody>
+      </p:sp>
+    </p:spTree>
+    <p:extLst>
+      <p:ext uri="{BB962C8B-B14F-4D97-AF65-F5344CB8AC3E}">
+        <p14:creationId xmlns:p14="http://schemas.microsoft.com/office/powerpoint/2010/main" val="2965319249"/>
+      </p:ext>
+    </p:extLst>
+  </p:cSld>
+  <p:clrMapOvr>
+    <a:masterClrMapping/>
+  </p:clrMapOvr>
+</p:sld>
+</file>
+
+<file path=ppt/slides/slide13.xml><?xml version="1.0" encoding="utf-8"?>
+<p:sld xmlns:a="http://schemas.openxmlformats.org/drawingml/2006/main" xmlns:r="http://schemas.openxmlformats.org/officeDocument/2006/relationships" xmlns:p="http://schemas.openxmlformats.org/presentationml/2006/main">
+  <p:cSld>
+    <p:spTree>
+      <p:nvGrpSpPr>
+        <p:cNvPr id="1" name=""/>
+        <p:cNvGrpSpPr/>
+        <p:nvPr/>
+      </p:nvGrpSpPr>
+      <p:grpSpPr>
+        <a:xfrm>
+          <a:off x="0" y="0"/>
+          <a:ext cx="0" cy="0"/>
+          <a:chOff x="0" y="0"/>
+          <a:chExt cx="0" cy="0"/>
+        </a:xfrm>
+      </p:grpSpPr>
+      <p:sp>
+        <p:nvSpPr>
+          <p:cNvPr id="2" name="Título 1">
+            <a:extLst>
+              <a:ext uri="{FF2B5EF4-FFF2-40B4-BE49-F238E27FC236}">
+                <a16:creationId xmlns:a16="http://schemas.microsoft.com/office/drawing/2014/main" id="{E1BF4364-A6CD-4460-A48D-6779B48ADDBE}"/>
+              </a:ext>
+            </a:extLst>
+          </p:cNvPr>
+          <p:cNvSpPr>
+            <a:spLocks noGrp="1"/>
+          </p:cNvSpPr>
+          <p:nvPr>
+            <p:ph type="title"/>
+          </p:nvPr>
+        </p:nvSpPr>
+        <p:spPr>
+          <a:xfrm>
+            <a:off x="338845" y="135597"/>
+            <a:ext cx="9692640" cy="1533440"/>
+          </a:xfrm>
+        </p:spPr>
+        <p:txBody>
+          <a:bodyPr>
+            <a:noAutofit/>
+          </a:bodyPr>
+          <a:lstStyle/>
+          <a:p>
+            <a:r>
+              <a:rPr lang="pt-BR" sz="3400" b="1" dirty="0">
+                <a:solidFill>
+                  <a:srgbClr val="00758F"/>
+                </a:solidFill>
+              </a:rPr>
+              <a:t>Consultas com Funções: </a:t>
+            </a:r>
+            <a:br>
+              <a:rPr lang="pt-BR" sz="3400" b="1" dirty="0">
+                <a:solidFill>
+                  <a:srgbClr val="00758F"/>
+                </a:solidFill>
+              </a:rPr>
+            </a:br>
+            <a:r>
+              <a:rPr lang="pt-BR" sz="3400" b="1" dirty="0">
+                <a:solidFill>
+                  <a:srgbClr val="F39211"/>
+                </a:solidFill>
+              </a:rPr>
+              <a:t>1.4</a:t>
+            </a:r>
+            <a:r>
+              <a:rPr lang="pt-BR" sz="3400" b="1" dirty="0">
+                <a:solidFill>
+                  <a:srgbClr val="00758F"/>
+                </a:solidFill>
+              </a:rPr>
+              <a:t> </a:t>
+            </a:r>
+            <a:r>
+              <a:rPr lang="pt-BR" sz="3400" b="1" dirty="0">
+                <a:solidFill>
+                  <a:srgbClr val="F39211"/>
+                </a:solidFill>
+              </a:rPr>
+              <a:t>Funções de </a:t>
+            </a:r>
+            <a:r>
+              <a:rPr lang="pt-BR" sz="3400" b="1" dirty="0" err="1">
+                <a:solidFill>
+                  <a:srgbClr val="F39211"/>
+                </a:solidFill>
+              </a:rPr>
+              <a:t>String</a:t>
+            </a:r>
+            <a:r>
+              <a:rPr lang="pt-BR" sz="3400" b="1" dirty="0">
+                <a:solidFill>
+                  <a:srgbClr val="F39211"/>
+                </a:solidFill>
+              </a:rPr>
+              <a:t> (Exercícios - Respostas)</a:t>
+            </a:r>
+            <a:endParaRPr lang="pt-BR" sz="3400" dirty="0">
+              <a:solidFill>
+                <a:srgbClr val="F39211"/>
+              </a:solidFill>
+            </a:endParaRPr>
+          </a:p>
+        </p:txBody>
+      </p:sp>
+      <p:pic>
+        <p:nvPicPr>
+          <p:cNvPr id="4" name="Picture 6" descr="https://www.mysql.com/common/logos/logo-mysql-170x115.png">
+            <a:extLst>
+              <a:ext uri="{FF2B5EF4-FFF2-40B4-BE49-F238E27FC236}">
+                <a16:creationId xmlns:a16="http://schemas.microsoft.com/office/drawing/2014/main" id="{441DFD02-E8A2-4690-9CD7-1CC407F2024E}"/>
+              </a:ext>
+            </a:extLst>
+          </p:cNvPr>
+          <p:cNvPicPr>
+            <a:picLocks noChangeAspect="1" noChangeArrowheads="1"/>
+          </p:cNvPicPr>
+          <p:nvPr/>
+        </p:nvPicPr>
+        <p:blipFill>
+          <a:blip r:embed="rId2">
+            <a:extLst>
+              <a:ext uri="{28A0092B-C50C-407E-A947-70E740481C1C}">
+                <a14:useLocalDpi xmlns:a14="http://schemas.microsoft.com/office/drawing/2010/main" val="0"/>
+              </a:ext>
+            </a:extLst>
+          </a:blip>
+          <a:srcRect/>
+          <a:stretch>
+            <a:fillRect/>
+          </a:stretch>
+        </p:blipFill>
+        <p:spPr bwMode="auto">
+          <a:xfrm>
+            <a:off x="9774793" y="5753675"/>
+            <a:ext cx="1385775" cy="936973"/>
+          </a:xfrm>
+          <a:prstGeom prst="rect">
+            <a:avLst/>
+          </a:prstGeom>
+          <a:noFill/>
+          <a:extLst>
+            <a:ext uri="{909E8E84-426E-40DD-AFC4-6F175D3DCCD1}">
+              <a14:hiddenFill xmlns:a14="http://schemas.microsoft.com/office/drawing/2010/main">
+                <a:solidFill>
+                  <a:srgbClr val="FFFFFF"/>
+                </a:solidFill>
+              </a14:hiddenFill>
+            </a:ext>
+          </a:extLst>
+        </p:spPr>
+      </p:pic>
+      <p:sp>
+        <p:nvSpPr>
+          <p:cNvPr id="6" name="CaixaDeTexto 5">
+            <a:extLst>
+              <a:ext uri="{FF2B5EF4-FFF2-40B4-BE49-F238E27FC236}">
+                <a16:creationId xmlns:a16="http://schemas.microsoft.com/office/drawing/2014/main" id="{AF06CEA4-1D6A-4FB2-B738-A9362ADA1CCA}"/>
+              </a:ext>
+            </a:extLst>
+          </p:cNvPr>
+          <p:cNvSpPr txBox="1"/>
+          <p:nvPr/>
+        </p:nvSpPr>
+        <p:spPr>
+          <a:xfrm>
+            <a:off x="338845" y="1669037"/>
+            <a:ext cx="10088523" cy="5216813"/>
+          </a:xfrm>
+          <a:prstGeom prst="rect">
+            <a:avLst/>
+          </a:prstGeom>
+          <a:noFill/>
+        </p:spPr>
+        <p:txBody>
+          <a:bodyPr wrap="square" rtlCol="0">
+            <a:spAutoFit/>
+          </a:bodyPr>
+          <a:lstStyle/>
+          <a:p>
+            <a:r>
+              <a:rPr lang="pt-BR" sz="2100" b="1" dirty="0"/>
+              <a:t>Exercício 1:</a:t>
+            </a:r>
+            <a:r>
+              <a:rPr lang="pt-BR" sz="2100" dirty="0"/>
+              <a:t> Mostre os nomes dos produtos em letras minúsculas.</a:t>
+            </a:r>
+            <a:br>
+              <a:rPr lang="pt-BR" sz="2100" dirty="0"/>
+            </a:br>
+            <a:r>
+              <a:rPr lang="pt-BR" sz="2100" dirty="0"/>
+              <a:t>Resposta:</a:t>
+            </a:r>
+            <a:br>
+              <a:rPr lang="pt-BR" sz="2100" dirty="0"/>
+            </a:br>
+            <a:r>
+              <a:rPr lang="pt-BR" sz="2100" b="1" dirty="0">
+                <a:solidFill>
+                  <a:srgbClr val="0000FF"/>
+                </a:solidFill>
+              </a:rPr>
+              <a:t>SELECT</a:t>
+            </a:r>
+            <a:r>
+              <a:rPr lang="pt-BR" sz="2100" dirty="0"/>
+              <a:t> </a:t>
+            </a:r>
+            <a:r>
+              <a:rPr lang="pt-BR" sz="2100" b="1" dirty="0">
+                <a:solidFill>
+                  <a:srgbClr val="0000FF"/>
+                </a:solidFill>
+              </a:rPr>
+              <a:t>LOWER</a:t>
+            </a:r>
+            <a:r>
+              <a:rPr lang="pt-BR" sz="2100" b="1" dirty="0"/>
+              <a:t>(</a:t>
+            </a:r>
+            <a:r>
+              <a:rPr lang="pt-BR" sz="2100" dirty="0" err="1">
+                <a:solidFill>
+                  <a:schemeClr val="bg1">
+                    <a:lumMod val="50000"/>
+                  </a:schemeClr>
+                </a:solidFill>
+              </a:rPr>
+              <a:t>nome_produto</a:t>
+            </a:r>
+            <a:r>
+              <a:rPr lang="pt-BR" sz="2100" b="1" dirty="0"/>
+              <a:t>)</a:t>
+            </a:r>
+            <a:r>
+              <a:rPr lang="pt-BR" sz="2100" dirty="0"/>
+              <a:t> </a:t>
+            </a:r>
+            <a:r>
+              <a:rPr lang="pt-BR" sz="2100" b="1" dirty="0">
+                <a:solidFill>
+                  <a:srgbClr val="0000FF"/>
+                </a:solidFill>
+              </a:rPr>
+              <a:t>FROM</a:t>
+            </a:r>
+            <a:r>
+              <a:rPr lang="pt-BR" sz="2100" dirty="0"/>
+              <a:t> </a:t>
+            </a:r>
+            <a:r>
+              <a:rPr lang="pt-BR" sz="2100" dirty="0">
+                <a:solidFill>
+                  <a:schemeClr val="bg1">
+                    <a:lumMod val="50000"/>
+                  </a:schemeClr>
+                </a:solidFill>
+              </a:rPr>
+              <a:t>produtos</a:t>
+            </a:r>
+            <a:r>
+              <a:rPr lang="pt-BR" sz="2100" b="1" dirty="0"/>
+              <a:t>;</a:t>
+            </a:r>
+          </a:p>
+          <a:p>
+            <a:endParaRPr lang="pt-BR" sz="2100" dirty="0"/>
+          </a:p>
+          <a:p>
+            <a:r>
+              <a:rPr lang="pt-BR" sz="2100" b="1" dirty="0"/>
+              <a:t>Exercício 2:</a:t>
+            </a:r>
+            <a:r>
+              <a:rPr lang="pt-BR" sz="2100" dirty="0"/>
+              <a:t> Mostre os 4 últimos caracteres do telefone de cada cliente.</a:t>
+            </a:r>
+            <a:br>
+              <a:rPr lang="pt-BR" sz="2100" dirty="0"/>
+            </a:br>
+            <a:r>
+              <a:rPr lang="pt-BR" sz="2100" dirty="0"/>
+              <a:t>Resposta:</a:t>
+            </a:r>
+            <a:br>
+              <a:rPr lang="pt-BR" sz="2100" dirty="0"/>
+            </a:br>
+            <a:r>
+              <a:rPr lang="pt-BR" sz="2100" b="1" dirty="0">
+                <a:solidFill>
+                  <a:srgbClr val="0000FF"/>
+                </a:solidFill>
+              </a:rPr>
+              <a:t>SELECT</a:t>
+            </a:r>
+            <a:r>
+              <a:rPr lang="pt-BR" sz="2100" dirty="0"/>
+              <a:t> </a:t>
+            </a:r>
+            <a:r>
+              <a:rPr lang="pt-BR" sz="2100" dirty="0" err="1">
+                <a:solidFill>
+                  <a:schemeClr val="bg1">
+                    <a:lumMod val="50000"/>
+                  </a:schemeClr>
+                </a:solidFill>
+              </a:rPr>
+              <a:t>nome_cliente</a:t>
+            </a:r>
+            <a:r>
+              <a:rPr lang="pt-BR" sz="2100" b="1" dirty="0"/>
+              <a:t>,</a:t>
+            </a:r>
+            <a:r>
+              <a:rPr lang="pt-BR" sz="2100" dirty="0"/>
+              <a:t> </a:t>
+            </a:r>
+            <a:r>
+              <a:rPr lang="pt-BR" sz="2100" b="1" dirty="0">
+                <a:solidFill>
+                  <a:srgbClr val="0000FF"/>
+                </a:solidFill>
+              </a:rPr>
+              <a:t>RIGHT</a:t>
+            </a:r>
+            <a:r>
+              <a:rPr lang="pt-BR" sz="2100" b="1" dirty="0"/>
+              <a:t>(</a:t>
+            </a:r>
+            <a:r>
+              <a:rPr lang="pt-BR" sz="2100" dirty="0">
+                <a:solidFill>
+                  <a:schemeClr val="bg1">
+                    <a:lumMod val="50000"/>
+                  </a:schemeClr>
+                </a:solidFill>
+              </a:rPr>
+              <a:t>telefone</a:t>
+            </a:r>
+            <a:r>
+              <a:rPr lang="pt-BR" sz="2100" b="1" dirty="0"/>
+              <a:t>,</a:t>
+            </a:r>
+            <a:r>
+              <a:rPr lang="pt-BR" sz="2100" dirty="0"/>
+              <a:t> 4</a:t>
+            </a:r>
+            <a:r>
+              <a:rPr lang="pt-BR" sz="2100" b="1" dirty="0"/>
+              <a:t>)</a:t>
+            </a:r>
+            <a:r>
+              <a:rPr lang="pt-BR" sz="2100" dirty="0"/>
+              <a:t> </a:t>
+            </a:r>
+            <a:r>
+              <a:rPr lang="pt-BR" sz="2100" b="1" dirty="0">
+                <a:solidFill>
+                  <a:srgbClr val="0000FF"/>
+                </a:solidFill>
+              </a:rPr>
+              <a:t>AS</a:t>
+            </a:r>
+            <a:r>
+              <a:rPr lang="pt-BR" sz="2100" dirty="0"/>
+              <a:t> </a:t>
+            </a:r>
+            <a:r>
+              <a:rPr lang="pt-BR" sz="2100" dirty="0" err="1">
+                <a:solidFill>
+                  <a:schemeClr val="bg1">
+                    <a:lumMod val="50000"/>
+                  </a:schemeClr>
+                </a:solidFill>
+              </a:rPr>
+              <a:t>final_telefone</a:t>
+            </a:r>
+            <a:br>
+              <a:rPr lang="pt-BR" sz="2100" dirty="0"/>
+            </a:br>
+            <a:r>
+              <a:rPr lang="pt-BR" sz="2100" b="1" dirty="0">
+                <a:solidFill>
+                  <a:srgbClr val="0000FF"/>
+                </a:solidFill>
+              </a:rPr>
+              <a:t>FROM</a:t>
+            </a:r>
+            <a:r>
+              <a:rPr lang="pt-BR" sz="2100" dirty="0"/>
+              <a:t> </a:t>
+            </a:r>
+            <a:r>
+              <a:rPr lang="pt-BR" sz="2100" dirty="0">
+                <a:solidFill>
+                  <a:schemeClr val="bg1">
+                    <a:lumMod val="50000"/>
+                  </a:schemeClr>
+                </a:solidFill>
+              </a:rPr>
+              <a:t>clientes</a:t>
+            </a:r>
+            <a:r>
+              <a:rPr lang="pt-BR" sz="2100" b="1" dirty="0"/>
+              <a:t>;</a:t>
+            </a:r>
+          </a:p>
+          <a:p>
+            <a:endParaRPr lang="pt-BR" sz="2100" dirty="0"/>
+          </a:p>
+          <a:p>
+            <a:r>
+              <a:rPr lang="pt-BR" sz="2100" b="1" dirty="0"/>
+              <a:t>Exercício 3 (desafio):</a:t>
+            </a:r>
+            <a:r>
+              <a:rPr lang="pt-BR" sz="2100" dirty="0"/>
+              <a:t> Mostre uma coluna chamada </a:t>
+            </a:r>
+            <a:r>
+              <a:rPr lang="pt-BR" sz="2100" dirty="0" err="1"/>
+              <a:t>cliente_detalhe</a:t>
+            </a:r>
+            <a:r>
+              <a:rPr lang="pt-BR" sz="2100" dirty="0"/>
+              <a:t> contendo:</a:t>
+            </a:r>
+            <a:br>
+              <a:rPr lang="pt-BR" sz="2100" dirty="0"/>
+            </a:br>
+            <a:r>
+              <a:rPr lang="pt-BR" sz="2100" dirty="0"/>
+              <a:t>“NOME (CIDADE - ESTADO)” → </a:t>
+            </a:r>
+            <a:r>
+              <a:rPr lang="pt-BR" sz="2100" dirty="0" err="1"/>
+              <a:t>Ex</a:t>
+            </a:r>
+            <a:r>
+              <a:rPr lang="pt-BR" sz="2100" dirty="0"/>
+              <a:t>: </a:t>
+            </a:r>
+            <a:r>
+              <a:rPr lang="pt-BR" sz="2100" b="1" dirty="0"/>
+              <a:t>Ana Souza (São Paulo - SP)</a:t>
+            </a:r>
+          </a:p>
+          <a:p>
+            <a:br>
+              <a:rPr lang="pt-BR" sz="2100" b="1" dirty="0"/>
+            </a:br>
+            <a:r>
+              <a:rPr lang="pt-BR" sz="2100" b="1" dirty="0">
+                <a:solidFill>
+                  <a:srgbClr val="0000FF"/>
+                </a:solidFill>
+              </a:rPr>
+              <a:t>SELECT</a:t>
+            </a:r>
+            <a:r>
+              <a:rPr lang="pt-BR" sz="2100" dirty="0"/>
+              <a:t> </a:t>
+            </a:r>
+            <a:br>
+              <a:rPr lang="pt-BR" sz="2100" dirty="0"/>
+            </a:br>
+            <a:r>
+              <a:rPr lang="pt-BR" sz="2100" dirty="0"/>
+              <a:t>  </a:t>
+            </a:r>
+            <a:r>
+              <a:rPr lang="pt-BR" sz="2100" b="1" dirty="0">
+                <a:solidFill>
+                  <a:srgbClr val="0000FF"/>
+                </a:solidFill>
+              </a:rPr>
+              <a:t>CONCAT</a:t>
+            </a:r>
+            <a:r>
+              <a:rPr lang="pt-BR" sz="2100" b="1" dirty="0"/>
+              <a:t>(</a:t>
+            </a:r>
+            <a:r>
+              <a:rPr lang="pt-BR" sz="2100" dirty="0" err="1">
+                <a:solidFill>
+                  <a:schemeClr val="bg1">
+                    <a:lumMod val="50000"/>
+                  </a:schemeClr>
+                </a:solidFill>
+              </a:rPr>
+              <a:t>nome_cliente</a:t>
+            </a:r>
+            <a:r>
+              <a:rPr lang="pt-BR" sz="2100" b="1" dirty="0"/>
+              <a:t>,</a:t>
+            </a:r>
+            <a:r>
+              <a:rPr lang="pt-BR" sz="2100" dirty="0"/>
+              <a:t> ' ('</a:t>
+            </a:r>
+            <a:r>
+              <a:rPr lang="pt-BR" sz="2100" b="1" dirty="0"/>
+              <a:t>,</a:t>
+            </a:r>
+            <a:r>
+              <a:rPr lang="pt-BR" sz="2100" dirty="0"/>
+              <a:t> </a:t>
+            </a:r>
+            <a:r>
+              <a:rPr lang="pt-BR" sz="2100" dirty="0">
+                <a:solidFill>
+                  <a:schemeClr val="bg1">
+                    <a:lumMod val="50000"/>
+                  </a:schemeClr>
+                </a:solidFill>
+              </a:rPr>
+              <a:t>cidade</a:t>
+            </a:r>
+            <a:r>
+              <a:rPr lang="pt-BR" sz="2100" b="1" dirty="0"/>
+              <a:t>,</a:t>
+            </a:r>
+            <a:r>
+              <a:rPr lang="pt-BR" sz="2100" dirty="0"/>
+              <a:t> ' - '</a:t>
+            </a:r>
+            <a:r>
+              <a:rPr lang="pt-BR" sz="2100" b="1" dirty="0"/>
+              <a:t>,</a:t>
+            </a:r>
+            <a:r>
+              <a:rPr lang="pt-BR" sz="2100" dirty="0"/>
+              <a:t> </a:t>
+            </a:r>
+            <a:r>
+              <a:rPr lang="pt-BR" sz="2100" dirty="0">
+                <a:solidFill>
+                  <a:schemeClr val="bg1">
+                    <a:lumMod val="50000"/>
+                  </a:schemeClr>
+                </a:solidFill>
+              </a:rPr>
+              <a:t>estado</a:t>
+            </a:r>
+            <a:r>
+              <a:rPr lang="pt-BR" sz="2100" b="1" dirty="0"/>
+              <a:t>,</a:t>
+            </a:r>
+            <a:r>
+              <a:rPr lang="pt-BR" sz="2100" dirty="0"/>
+              <a:t> ')'</a:t>
+            </a:r>
+            <a:r>
+              <a:rPr lang="pt-BR" sz="2100" b="1" dirty="0"/>
+              <a:t>)</a:t>
+            </a:r>
+            <a:r>
+              <a:rPr lang="pt-BR" sz="2100" dirty="0"/>
+              <a:t> </a:t>
+            </a:r>
+            <a:r>
+              <a:rPr lang="pt-BR" sz="2100" b="1" dirty="0">
+                <a:solidFill>
+                  <a:srgbClr val="0000FF"/>
+                </a:solidFill>
+              </a:rPr>
+              <a:t>AS</a:t>
+            </a:r>
+            <a:r>
+              <a:rPr lang="pt-BR" sz="2100" dirty="0"/>
+              <a:t> </a:t>
+            </a:r>
+            <a:r>
+              <a:rPr lang="pt-BR" sz="2100" dirty="0" err="1">
+                <a:solidFill>
+                  <a:schemeClr val="bg1">
+                    <a:lumMod val="50000"/>
+                  </a:schemeClr>
+                </a:solidFill>
+              </a:rPr>
+              <a:t>cliente_detalhe</a:t>
+            </a:r>
+            <a:br>
+              <a:rPr lang="pt-BR" sz="2100" dirty="0"/>
+            </a:br>
+            <a:r>
+              <a:rPr lang="pt-BR" sz="2100" b="1" dirty="0">
+                <a:solidFill>
+                  <a:srgbClr val="0000FF"/>
+                </a:solidFill>
+              </a:rPr>
+              <a:t>FROM</a:t>
+            </a:r>
+            <a:r>
+              <a:rPr lang="pt-BR" sz="2100" dirty="0"/>
+              <a:t> </a:t>
+            </a:r>
+            <a:r>
+              <a:rPr lang="pt-BR" sz="2100" dirty="0">
+                <a:solidFill>
+                  <a:schemeClr val="bg1">
+                    <a:lumMod val="50000"/>
+                  </a:schemeClr>
+                </a:solidFill>
+              </a:rPr>
+              <a:t>clientes</a:t>
+            </a:r>
+            <a:r>
+              <a:rPr lang="pt-BR" sz="2100" b="1" dirty="0"/>
+              <a:t>;</a:t>
+            </a:r>
+            <a:br>
+              <a:rPr lang="pt-BR" b="1" dirty="0"/>
+            </a:br>
+            <a:endParaRPr lang="pt-BR" dirty="0"/>
+          </a:p>
+        </p:txBody>
+      </p:sp>
+    </p:spTree>
+    <p:extLst>
+      <p:ext uri="{BB962C8B-B14F-4D97-AF65-F5344CB8AC3E}">
+        <p14:creationId xmlns:p14="http://schemas.microsoft.com/office/powerpoint/2010/main" val="3721681210"/>
+      </p:ext>
+    </p:extLst>
+  </p:cSld>
+  <p:clrMapOvr>
+    <a:masterClrMapping/>
+  </p:clrMapOvr>
+</p:sld>
+</file>
+
+<file path=ppt/slides/slide14.xml><?xml version="1.0" encoding="utf-8"?>
+<p:sld xmlns:a="http://schemas.openxmlformats.org/drawingml/2006/main" xmlns:r="http://schemas.openxmlformats.org/officeDocument/2006/relationships" xmlns:p="http://schemas.openxmlformats.org/presentationml/2006/main">
+  <p:cSld>
+    <p:spTree>
+      <p:nvGrpSpPr>
+        <p:cNvPr id="1" name=""/>
+        <p:cNvGrpSpPr/>
+        <p:nvPr/>
+      </p:nvGrpSpPr>
+      <p:grpSpPr>
+        <a:xfrm>
+          <a:off x="0" y="0"/>
+          <a:ext cx="0" cy="0"/>
+          <a:chOff x="0" y="0"/>
+          <a:chExt cx="0" cy="0"/>
+        </a:xfrm>
+      </p:grpSpPr>
+      <p:sp>
+        <p:nvSpPr>
+          <p:cNvPr id="2" name="Título 1">
+            <a:extLst>
+              <a:ext uri="{FF2B5EF4-FFF2-40B4-BE49-F238E27FC236}">
+                <a16:creationId xmlns:a16="http://schemas.microsoft.com/office/drawing/2014/main" id="{E1BF4364-A6CD-4460-A48D-6779B48ADDBE}"/>
+              </a:ext>
+            </a:extLst>
+          </p:cNvPr>
+          <p:cNvSpPr>
+            <a:spLocks noGrp="1"/>
+          </p:cNvSpPr>
+          <p:nvPr>
+            <p:ph type="title"/>
+          </p:nvPr>
+        </p:nvSpPr>
+        <p:spPr>
+          <a:xfrm>
+            <a:off x="338845" y="167352"/>
+            <a:ext cx="9692640" cy="1533440"/>
+          </a:xfrm>
+        </p:spPr>
+        <p:txBody>
+          <a:bodyPr>
+            <a:noAutofit/>
+          </a:bodyPr>
+          <a:lstStyle/>
+          <a:p>
+            <a:r>
+              <a:rPr lang="pt-BR" sz="3400" b="1" dirty="0">
+                <a:solidFill>
+                  <a:srgbClr val="00758F"/>
+                </a:solidFill>
+              </a:rPr>
+              <a:t>Consultas com Funções: </a:t>
+            </a:r>
+            <a:br>
+              <a:rPr lang="pt-BR" sz="3400" b="1" dirty="0">
+                <a:solidFill>
+                  <a:srgbClr val="00758F"/>
+                </a:solidFill>
+              </a:rPr>
+            </a:br>
+            <a:r>
+              <a:rPr lang="pt-BR" sz="3400" b="1" dirty="0">
+                <a:solidFill>
+                  <a:srgbClr val="F39211"/>
+                </a:solidFill>
+              </a:rPr>
+              <a:t>1.0 Funções de Cálculo e Operadores Aritméticos no MySQL</a:t>
+            </a:r>
+            <a:endParaRPr lang="pt-BR" sz="3400" dirty="0">
+              <a:solidFill>
+                <a:srgbClr val="F39211"/>
+              </a:solidFill>
+            </a:endParaRPr>
+          </a:p>
+        </p:txBody>
+      </p:sp>
+      <p:pic>
+        <p:nvPicPr>
+          <p:cNvPr id="4" name="Picture 6" descr="https://www.mysql.com/common/logos/logo-mysql-170x115.png">
+            <a:extLst>
+              <a:ext uri="{FF2B5EF4-FFF2-40B4-BE49-F238E27FC236}">
+                <a16:creationId xmlns:a16="http://schemas.microsoft.com/office/drawing/2014/main" id="{441DFD02-E8A2-4690-9CD7-1CC407F2024E}"/>
+              </a:ext>
+            </a:extLst>
+          </p:cNvPr>
+          <p:cNvPicPr>
+            <a:picLocks noChangeAspect="1" noChangeArrowheads="1"/>
+          </p:cNvPicPr>
+          <p:nvPr/>
+        </p:nvPicPr>
+        <p:blipFill>
+          <a:blip r:embed="rId2">
+            <a:extLst>
+              <a:ext uri="{28A0092B-C50C-407E-A947-70E740481C1C}">
+                <a14:useLocalDpi xmlns:a14="http://schemas.microsoft.com/office/drawing/2010/main" val="0"/>
+              </a:ext>
+            </a:extLst>
+          </a:blip>
+          <a:srcRect/>
+          <a:stretch>
+            <a:fillRect/>
+          </a:stretch>
+        </p:blipFill>
+        <p:spPr bwMode="auto">
+          <a:xfrm>
+            <a:off x="9774793" y="5753675"/>
+            <a:ext cx="1385775" cy="936973"/>
+          </a:xfrm>
+          <a:prstGeom prst="rect">
+            <a:avLst/>
+          </a:prstGeom>
+          <a:noFill/>
+          <a:extLst>
+            <a:ext uri="{909E8E84-426E-40DD-AFC4-6F175D3DCCD1}">
+              <a14:hiddenFill xmlns:a14="http://schemas.microsoft.com/office/drawing/2010/main">
+                <a:solidFill>
+                  <a:srgbClr val="FFFFFF"/>
+                </a:solidFill>
+              </a14:hiddenFill>
+            </a:ext>
+          </a:extLst>
+        </p:spPr>
+      </p:pic>
+      <p:sp>
+        <p:nvSpPr>
+          <p:cNvPr id="6" name="CaixaDeTexto 5">
+            <a:extLst>
+              <a:ext uri="{FF2B5EF4-FFF2-40B4-BE49-F238E27FC236}">
+                <a16:creationId xmlns:a16="http://schemas.microsoft.com/office/drawing/2014/main" id="{AF06CEA4-1D6A-4FB2-B738-A9362ADA1CCA}"/>
+              </a:ext>
+            </a:extLst>
+          </p:cNvPr>
+          <p:cNvSpPr txBox="1"/>
+          <p:nvPr/>
+        </p:nvSpPr>
+        <p:spPr>
+          <a:xfrm>
+            <a:off x="338845" y="1861542"/>
+            <a:ext cx="10088523" cy="1323439"/>
+          </a:xfrm>
+          <a:prstGeom prst="rect">
+            <a:avLst/>
+          </a:prstGeom>
+          <a:noFill/>
+        </p:spPr>
+        <p:txBody>
+          <a:bodyPr wrap="square" rtlCol="0">
+            <a:spAutoFit/>
+          </a:bodyPr>
+          <a:lstStyle/>
+          <a:p>
+            <a:r>
+              <a:rPr lang="pt-BR" sz="2000" dirty="0"/>
+              <a:t>Operadores aritméticos no MySQL podem ser usados ​​com operandos numéricos para realizar operações matemáticas em consultas SQL. </a:t>
+            </a:r>
+          </a:p>
+          <a:p>
+            <a:endParaRPr lang="pt-BR" sz="2000" dirty="0"/>
+          </a:p>
+          <a:p>
+            <a:endParaRPr lang="pt-BR" sz="2000" dirty="0"/>
+          </a:p>
+        </p:txBody>
+      </p:sp>
+      <p:graphicFrame>
+        <p:nvGraphicFramePr>
+          <p:cNvPr id="3" name="Tabela 2">
+            <a:extLst>
+              <a:ext uri="{FF2B5EF4-FFF2-40B4-BE49-F238E27FC236}">
+                <a16:creationId xmlns:a16="http://schemas.microsoft.com/office/drawing/2014/main" id="{F22F2640-9EE5-4170-B323-0CAD85580F64}"/>
+              </a:ext>
+            </a:extLst>
+          </p:cNvPr>
+          <p:cNvGraphicFramePr>
+            <a:graphicFrameLocks noGrp="1"/>
+          </p:cNvGraphicFramePr>
+          <p:nvPr>
+            <p:extLst>
+              <p:ext uri="{D42A27DB-BD31-4B8C-83A1-F6EECF244321}">
+                <p14:modId xmlns:p14="http://schemas.microsoft.com/office/powerpoint/2010/main" val="3844652218"/>
+              </p:ext>
+            </p:extLst>
+          </p:nvPr>
+        </p:nvGraphicFramePr>
+        <p:xfrm>
+          <a:off x="338845" y="2845049"/>
+          <a:ext cx="8594724" cy="2137206"/>
+        </p:xfrm>
+        <a:graphic>
+          <a:graphicData uri="http://schemas.openxmlformats.org/drawingml/2006/table">
+            <a:tbl>
+              <a:tblPr firstRow="1" firstCol="1" bandRow="1">
+                <a:tableStyleId>{5C22544A-7EE6-4342-B048-85BDC9FD1C3A}</a:tableStyleId>
+              </a:tblPr>
+              <a:tblGrid>
+                <a:gridCol w="2148681">
+                  <a:extLst>
+                    <a:ext uri="{9D8B030D-6E8A-4147-A177-3AD203B41FA5}">
+                      <a16:colId xmlns:a16="http://schemas.microsoft.com/office/drawing/2014/main" val="627124364"/>
+                    </a:ext>
+                  </a:extLst>
+                </a:gridCol>
+                <a:gridCol w="2148681">
+                  <a:extLst>
+                    <a:ext uri="{9D8B030D-6E8A-4147-A177-3AD203B41FA5}">
+                      <a16:colId xmlns:a16="http://schemas.microsoft.com/office/drawing/2014/main" val="4268565421"/>
+                    </a:ext>
+                  </a:extLst>
+                </a:gridCol>
+                <a:gridCol w="2148681">
+                  <a:extLst>
+                    <a:ext uri="{9D8B030D-6E8A-4147-A177-3AD203B41FA5}">
+                      <a16:colId xmlns:a16="http://schemas.microsoft.com/office/drawing/2014/main" val="1632331228"/>
+                    </a:ext>
+                  </a:extLst>
+                </a:gridCol>
+                <a:gridCol w="2148681">
+                  <a:extLst>
+                    <a:ext uri="{9D8B030D-6E8A-4147-A177-3AD203B41FA5}">
+                      <a16:colId xmlns:a16="http://schemas.microsoft.com/office/drawing/2014/main" val="2326480020"/>
+                    </a:ext>
+                  </a:extLst>
+                </a:gridCol>
+              </a:tblGrid>
+              <a:tr h="356201">
+                <a:tc>
+                  <a:txBody>
+                    <a:bodyPr/>
+                    <a:lstStyle/>
+                    <a:p>
+                      <a:pPr>
+                        <a:lnSpc>
+                          <a:spcPct val="107000"/>
+                        </a:lnSpc>
+                        <a:spcAft>
+                          <a:spcPts val="0"/>
+                        </a:spcAft>
+                      </a:pPr>
+                      <a:r>
+                        <a:rPr lang="pt-BR" sz="1600">
+                          <a:solidFill>
+                            <a:schemeClr val="bg1"/>
+                          </a:solidFill>
+                          <a:effectLst/>
+                        </a:rPr>
+                        <a:t>Operador</a:t>
+                      </a:r>
+                      <a:endParaRPr lang="pt-BR" sz="1600">
+                        <a:solidFill>
+                          <a:schemeClr val="bg1"/>
+                        </a:solidFill>
+                        <a:effectLst/>
+                        <a:latin typeface="Times New Roman" panose="02020603050405020304" pitchFamily="18" charset="0"/>
+                        <a:ea typeface="Times New Roman" panose="02020603050405020304" pitchFamily="18" charset="0"/>
+                        <a:cs typeface="Times New Roman" panose="02020603050405020304" pitchFamily="18" charset="0"/>
+                      </a:endParaRPr>
+                    </a:p>
+                  </a:txBody>
+                  <a:tcPr marL="9525" marR="9525" marT="9525" marB="9525" anchor="ctr">
+                    <a:solidFill>
+                      <a:srgbClr val="00758F"/>
+                    </a:solidFill>
+                  </a:tcPr>
+                </a:tc>
+                <a:tc>
+                  <a:txBody>
+                    <a:bodyPr/>
+                    <a:lstStyle/>
+                    <a:p>
+                      <a:pPr>
+                        <a:lnSpc>
+                          <a:spcPct val="107000"/>
+                        </a:lnSpc>
+                        <a:spcAft>
+                          <a:spcPts val="0"/>
+                        </a:spcAft>
+                      </a:pPr>
+                      <a:r>
+                        <a:rPr lang="pt-BR" sz="1600">
+                          <a:solidFill>
+                            <a:schemeClr val="bg1"/>
+                          </a:solidFill>
+                          <a:effectLst/>
+                        </a:rPr>
+                        <a:t>Significado</a:t>
+                      </a:r>
+                      <a:endParaRPr lang="pt-BR" sz="1600">
+                        <a:solidFill>
+                          <a:schemeClr val="bg1"/>
+                        </a:solidFill>
+                        <a:effectLst/>
+                        <a:latin typeface="Times New Roman" panose="02020603050405020304" pitchFamily="18" charset="0"/>
+                        <a:ea typeface="Times New Roman" panose="02020603050405020304" pitchFamily="18" charset="0"/>
+                        <a:cs typeface="Times New Roman" panose="02020603050405020304" pitchFamily="18" charset="0"/>
+                      </a:endParaRPr>
+                    </a:p>
+                  </a:txBody>
+                  <a:tcPr marL="9525" marR="9525" marT="9525" marB="9525" anchor="ctr">
+                    <a:solidFill>
+                      <a:srgbClr val="00758F"/>
+                    </a:solidFill>
+                  </a:tcPr>
+                </a:tc>
+                <a:tc>
+                  <a:txBody>
+                    <a:bodyPr/>
+                    <a:lstStyle/>
+                    <a:p>
+                      <a:pPr>
+                        <a:lnSpc>
+                          <a:spcPct val="107000"/>
+                        </a:lnSpc>
+                        <a:spcAft>
+                          <a:spcPts val="0"/>
+                        </a:spcAft>
+                      </a:pPr>
+                      <a:r>
+                        <a:rPr lang="pt-BR" sz="1600">
+                          <a:solidFill>
+                            <a:schemeClr val="bg1"/>
+                          </a:solidFill>
+                          <a:effectLst/>
+                        </a:rPr>
+                        <a:t>Exemplo (SQL)</a:t>
+                      </a:r>
+                      <a:endParaRPr lang="pt-BR" sz="1600">
+                        <a:solidFill>
+                          <a:schemeClr val="bg1"/>
+                        </a:solidFill>
+                        <a:effectLst/>
+                        <a:latin typeface="Times New Roman" panose="02020603050405020304" pitchFamily="18" charset="0"/>
+                        <a:ea typeface="Times New Roman" panose="02020603050405020304" pitchFamily="18" charset="0"/>
+                        <a:cs typeface="Times New Roman" panose="02020603050405020304" pitchFamily="18" charset="0"/>
+                      </a:endParaRPr>
+                    </a:p>
+                  </a:txBody>
+                  <a:tcPr marL="9525" marR="9525" marT="9525" marB="9525" anchor="ctr">
+                    <a:solidFill>
+                      <a:srgbClr val="00758F"/>
+                    </a:solidFill>
+                  </a:tcPr>
+                </a:tc>
+                <a:tc>
+                  <a:txBody>
+                    <a:bodyPr/>
+                    <a:lstStyle/>
+                    <a:p>
+                      <a:pPr>
+                        <a:lnSpc>
+                          <a:spcPct val="107000"/>
+                        </a:lnSpc>
+                        <a:spcAft>
+                          <a:spcPts val="0"/>
+                        </a:spcAft>
+                      </a:pPr>
+                      <a:r>
+                        <a:rPr lang="pt-BR" sz="1600" dirty="0">
+                          <a:solidFill>
+                            <a:schemeClr val="bg1"/>
+                          </a:solidFill>
+                          <a:effectLst/>
+                        </a:rPr>
+                        <a:t>Resultado</a:t>
+                      </a:r>
+                      <a:endParaRPr lang="pt-BR" sz="1600" dirty="0">
+                        <a:solidFill>
+                          <a:schemeClr val="bg1"/>
+                        </a:solidFill>
+                        <a:effectLst/>
+                        <a:latin typeface="Times New Roman" panose="02020603050405020304" pitchFamily="18" charset="0"/>
+                        <a:ea typeface="Times New Roman" panose="02020603050405020304" pitchFamily="18" charset="0"/>
+                        <a:cs typeface="Times New Roman" panose="02020603050405020304" pitchFamily="18" charset="0"/>
+                      </a:endParaRPr>
+                    </a:p>
+                  </a:txBody>
+                  <a:tcPr marL="9525" marR="9525" marT="9525" marB="9525" anchor="ctr">
+                    <a:solidFill>
+                      <a:srgbClr val="00758F"/>
+                    </a:solidFill>
+                  </a:tcPr>
+                </a:tc>
+                <a:extLst>
+                  <a:ext uri="{0D108BD9-81ED-4DB2-BD59-A6C34878D82A}">
+                    <a16:rowId xmlns:a16="http://schemas.microsoft.com/office/drawing/2014/main" val="74260671"/>
+                  </a:ext>
+                </a:extLst>
+              </a:tr>
+              <a:tr h="356201">
+                <a:tc>
+                  <a:txBody>
+                    <a:bodyPr/>
+                    <a:lstStyle/>
+                    <a:p>
+                      <a:pPr>
+                        <a:lnSpc>
+                          <a:spcPct val="107000"/>
+                        </a:lnSpc>
+                        <a:spcAft>
+                          <a:spcPts val="0"/>
+                        </a:spcAft>
+                      </a:pPr>
+                      <a:r>
+                        <a:rPr lang="pt-BR" sz="1600">
+                          <a:solidFill>
+                            <a:schemeClr val="bg1"/>
+                          </a:solidFill>
+                          <a:effectLst/>
+                        </a:rPr>
+                        <a:t>+</a:t>
+                      </a:r>
+                      <a:endParaRPr lang="pt-BR" sz="1600">
+                        <a:solidFill>
+                          <a:schemeClr val="bg1"/>
+                        </a:solidFill>
+                        <a:effectLst/>
+                        <a:latin typeface="Times New Roman" panose="02020603050405020304" pitchFamily="18" charset="0"/>
+                        <a:ea typeface="Times New Roman" panose="02020603050405020304" pitchFamily="18" charset="0"/>
+                        <a:cs typeface="Times New Roman" panose="02020603050405020304" pitchFamily="18" charset="0"/>
+                      </a:endParaRPr>
+                    </a:p>
+                  </a:txBody>
+                  <a:tcPr marL="9525" marR="9525" marT="9525" marB="9525" anchor="ctr">
+                    <a:solidFill>
+                      <a:srgbClr val="F39211"/>
+                    </a:solidFill>
+                  </a:tcPr>
+                </a:tc>
+                <a:tc>
+                  <a:txBody>
+                    <a:bodyPr/>
+                    <a:lstStyle/>
+                    <a:p>
+                      <a:pPr>
+                        <a:lnSpc>
+                          <a:spcPct val="107000"/>
+                        </a:lnSpc>
+                        <a:spcAft>
+                          <a:spcPts val="0"/>
+                        </a:spcAft>
+                      </a:pPr>
+                      <a:r>
+                        <a:rPr lang="pt-BR" sz="1600">
+                          <a:solidFill>
+                            <a:schemeClr val="bg1"/>
+                          </a:solidFill>
+                          <a:effectLst/>
+                        </a:rPr>
+                        <a:t>Soma</a:t>
+                      </a:r>
+                      <a:endParaRPr lang="pt-BR" sz="1600">
+                        <a:solidFill>
+                          <a:schemeClr val="bg1"/>
+                        </a:solidFill>
+                        <a:effectLst/>
+                        <a:latin typeface="Times New Roman" panose="02020603050405020304" pitchFamily="18" charset="0"/>
+                        <a:ea typeface="Times New Roman" panose="02020603050405020304" pitchFamily="18" charset="0"/>
+                        <a:cs typeface="Times New Roman" panose="02020603050405020304" pitchFamily="18" charset="0"/>
+                      </a:endParaRPr>
+                    </a:p>
+                  </a:txBody>
+                  <a:tcPr marL="9525" marR="9525" marT="9525" marB="9525" anchor="ctr">
+                    <a:solidFill>
+                      <a:srgbClr val="F39211"/>
+                    </a:solidFill>
+                  </a:tcPr>
+                </a:tc>
+                <a:tc>
+                  <a:txBody>
+                    <a:bodyPr/>
+                    <a:lstStyle/>
+                    <a:p>
+                      <a:pPr>
+                        <a:lnSpc>
+                          <a:spcPct val="107000"/>
+                        </a:lnSpc>
+                        <a:spcAft>
+                          <a:spcPts val="0"/>
+                        </a:spcAft>
+                      </a:pPr>
+                      <a:r>
+                        <a:rPr lang="pt-BR" sz="1600">
+                          <a:solidFill>
+                            <a:schemeClr val="bg1"/>
+                          </a:solidFill>
+                          <a:effectLst/>
+                        </a:rPr>
+                        <a:t>10 + 5</a:t>
+                      </a:r>
+                      <a:endParaRPr lang="pt-BR" sz="1600">
+                        <a:solidFill>
+                          <a:schemeClr val="bg1"/>
+                        </a:solidFill>
+                        <a:effectLst/>
+                        <a:latin typeface="Times New Roman" panose="02020603050405020304" pitchFamily="18" charset="0"/>
+                        <a:ea typeface="Times New Roman" panose="02020603050405020304" pitchFamily="18" charset="0"/>
+                        <a:cs typeface="Times New Roman" panose="02020603050405020304" pitchFamily="18" charset="0"/>
+                      </a:endParaRPr>
+                    </a:p>
+                  </a:txBody>
+                  <a:tcPr marL="9525" marR="9525" marT="9525" marB="9525" anchor="ctr">
+                    <a:solidFill>
+                      <a:srgbClr val="F39211"/>
+                    </a:solidFill>
+                  </a:tcPr>
+                </a:tc>
+                <a:tc>
+                  <a:txBody>
+                    <a:bodyPr/>
+                    <a:lstStyle/>
+                    <a:p>
+                      <a:pPr>
+                        <a:lnSpc>
+                          <a:spcPct val="107000"/>
+                        </a:lnSpc>
+                        <a:spcAft>
+                          <a:spcPts val="0"/>
+                        </a:spcAft>
+                      </a:pPr>
+                      <a:r>
+                        <a:rPr lang="pt-BR" sz="1600">
+                          <a:solidFill>
+                            <a:schemeClr val="bg1"/>
+                          </a:solidFill>
+                          <a:effectLst/>
+                        </a:rPr>
+                        <a:t>15</a:t>
+                      </a:r>
+                      <a:endParaRPr lang="pt-BR" sz="1600">
+                        <a:solidFill>
+                          <a:schemeClr val="bg1"/>
+                        </a:solidFill>
+                        <a:effectLst/>
+                        <a:latin typeface="Times New Roman" panose="02020603050405020304" pitchFamily="18" charset="0"/>
+                        <a:ea typeface="Times New Roman" panose="02020603050405020304" pitchFamily="18" charset="0"/>
+                        <a:cs typeface="Times New Roman" panose="02020603050405020304" pitchFamily="18" charset="0"/>
+                      </a:endParaRPr>
+                    </a:p>
+                  </a:txBody>
+                  <a:tcPr marL="9525" marR="9525" marT="9525" marB="9525" anchor="ctr">
+                    <a:solidFill>
+                      <a:srgbClr val="F39211"/>
+                    </a:solidFill>
+                  </a:tcPr>
+                </a:tc>
+                <a:extLst>
+                  <a:ext uri="{0D108BD9-81ED-4DB2-BD59-A6C34878D82A}">
+                    <a16:rowId xmlns:a16="http://schemas.microsoft.com/office/drawing/2014/main" val="742381160"/>
+                  </a:ext>
+                </a:extLst>
+              </a:tr>
+              <a:tr h="356201">
+                <a:tc>
+                  <a:txBody>
+                    <a:bodyPr/>
+                    <a:lstStyle/>
+                    <a:p>
+                      <a:pPr>
+                        <a:lnSpc>
+                          <a:spcPct val="107000"/>
+                        </a:lnSpc>
+                        <a:spcAft>
+                          <a:spcPts val="0"/>
+                        </a:spcAft>
+                      </a:pPr>
+                      <a:r>
+                        <a:rPr lang="pt-BR" sz="1600">
+                          <a:solidFill>
+                            <a:schemeClr val="bg1"/>
+                          </a:solidFill>
+                          <a:effectLst/>
+                        </a:rPr>
+                        <a:t>-</a:t>
+                      </a:r>
+                      <a:endParaRPr lang="pt-BR" sz="1600">
+                        <a:solidFill>
+                          <a:schemeClr val="bg1"/>
+                        </a:solidFill>
+                        <a:effectLst/>
+                        <a:latin typeface="Times New Roman" panose="02020603050405020304" pitchFamily="18" charset="0"/>
+                        <a:ea typeface="Times New Roman" panose="02020603050405020304" pitchFamily="18" charset="0"/>
+                        <a:cs typeface="Times New Roman" panose="02020603050405020304" pitchFamily="18" charset="0"/>
+                      </a:endParaRPr>
+                    </a:p>
+                  </a:txBody>
+                  <a:tcPr marL="9525" marR="9525" marT="9525" marB="9525" anchor="ctr">
+                    <a:solidFill>
+                      <a:srgbClr val="F39211"/>
+                    </a:solidFill>
+                  </a:tcPr>
+                </a:tc>
+                <a:tc>
+                  <a:txBody>
+                    <a:bodyPr/>
+                    <a:lstStyle/>
+                    <a:p>
+                      <a:pPr>
+                        <a:lnSpc>
+                          <a:spcPct val="107000"/>
+                        </a:lnSpc>
+                        <a:spcAft>
+                          <a:spcPts val="0"/>
+                        </a:spcAft>
+                      </a:pPr>
+                      <a:r>
+                        <a:rPr lang="pt-BR" sz="1600">
+                          <a:solidFill>
+                            <a:schemeClr val="bg1"/>
+                          </a:solidFill>
+                          <a:effectLst/>
+                        </a:rPr>
+                        <a:t>Subtração</a:t>
+                      </a:r>
+                      <a:endParaRPr lang="pt-BR" sz="1600">
+                        <a:solidFill>
+                          <a:schemeClr val="bg1"/>
+                        </a:solidFill>
+                        <a:effectLst/>
+                        <a:latin typeface="Times New Roman" panose="02020603050405020304" pitchFamily="18" charset="0"/>
+                        <a:ea typeface="Times New Roman" panose="02020603050405020304" pitchFamily="18" charset="0"/>
+                        <a:cs typeface="Times New Roman" panose="02020603050405020304" pitchFamily="18" charset="0"/>
+                      </a:endParaRPr>
+                    </a:p>
+                  </a:txBody>
+                  <a:tcPr marL="9525" marR="9525" marT="9525" marB="9525" anchor="ctr">
+                    <a:solidFill>
+                      <a:srgbClr val="F39211"/>
+                    </a:solidFill>
+                  </a:tcPr>
+                </a:tc>
+                <a:tc>
+                  <a:txBody>
+                    <a:bodyPr/>
+                    <a:lstStyle/>
+                    <a:p>
+                      <a:pPr>
+                        <a:lnSpc>
+                          <a:spcPct val="107000"/>
+                        </a:lnSpc>
+                        <a:spcAft>
+                          <a:spcPts val="0"/>
+                        </a:spcAft>
+                      </a:pPr>
+                      <a:r>
+                        <a:rPr lang="pt-BR" sz="1600">
+                          <a:solidFill>
+                            <a:schemeClr val="bg1"/>
+                          </a:solidFill>
+                          <a:effectLst/>
+                        </a:rPr>
+                        <a:t>10 - 5</a:t>
+                      </a:r>
+                      <a:endParaRPr lang="pt-BR" sz="1600">
+                        <a:solidFill>
+                          <a:schemeClr val="bg1"/>
+                        </a:solidFill>
+                        <a:effectLst/>
+                        <a:latin typeface="Times New Roman" panose="02020603050405020304" pitchFamily="18" charset="0"/>
+                        <a:ea typeface="Times New Roman" panose="02020603050405020304" pitchFamily="18" charset="0"/>
+                        <a:cs typeface="Times New Roman" panose="02020603050405020304" pitchFamily="18" charset="0"/>
+                      </a:endParaRPr>
+                    </a:p>
+                  </a:txBody>
+                  <a:tcPr marL="9525" marR="9525" marT="9525" marB="9525" anchor="ctr">
+                    <a:solidFill>
+                      <a:srgbClr val="F39211"/>
+                    </a:solidFill>
+                  </a:tcPr>
+                </a:tc>
+                <a:tc>
+                  <a:txBody>
+                    <a:bodyPr/>
+                    <a:lstStyle/>
+                    <a:p>
+                      <a:pPr>
+                        <a:lnSpc>
+                          <a:spcPct val="107000"/>
+                        </a:lnSpc>
+                        <a:spcAft>
+                          <a:spcPts val="0"/>
+                        </a:spcAft>
+                      </a:pPr>
+                      <a:r>
+                        <a:rPr lang="pt-BR" sz="1600">
+                          <a:solidFill>
+                            <a:schemeClr val="bg1"/>
+                          </a:solidFill>
+                          <a:effectLst/>
+                        </a:rPr>
+                        <a:t>5</a:t>
+                      </a:r>
+                      <a:endParaRPr lang="pt-BR" sz="1600">
+                        <a:solidFill>
+                          <a:schemeClr val="bg1"/>
+                        </a:solidFill>
+                        <a:effectLst/>
+                        <a:latin typeface="Times New Roman" panose="02020603050405020304" pitchFamily="18" charset="0"/>
+                        <a:ea typeface="Times New Roman" panose="02020603050405020304" pitchFamily="18" charset="0"/>
+                        <a:cs typeface="Times New Roman" panose="02020603050405020304" pitchFamily="18" charset="0"/>
+                      </a:endParaRPr>
+                    </a:p>
+                  </a:txBody>
+                  <a:tcPr marL="9525" marR="9525" marT="9525" marB="9525" anchor="ctr">
+                    <a:solidFill>
+                      <a:srgbClr val="F39211"/>
+                    </a:solidFill>
+                  </a:tcPr>
+                </a:tc>
+                <a:extLst>
+                  <a:ext uri="{0D108BD9-81ED-4DB2-BD59-A6C34878D82A}">
+                    <a16:rowId xmlns:a16="http://schemas.microsoft.com/office/drawing/2014/main" val="3814030560"/>
+                  </a:ext>
+                </a:extLst>
+              </a:tr>
+              <a:tr h="356201">
+                <a:tc>
+                  <a:txBody>
+                    <a:bodyPr/>
+                    <a:lstStyle/>
+                    <a:p>
+                      <a:pPr>
+                        <a:lnSpc>
+                          <a:spcPct val="107000"/>
+                        </a:lnSpc>
+                        <a:spcAft>
+                          <a:spcPts val="0"/>
+                        </a:spcAft>
+                      </a:pPr>
+                      <a:r>
+                        <a:rPr lang="pt-BR" sz="1600">
+                          <a:solidFill>
+                            <a:schemeClr val="bg1"/>
+                          </a:solidFill>
+                          <a:effectLst/>
+                        </a:rPr>
+                        <a:t>*</a:t>
+                      </a:r>
+                      <a:endParaRPr lang="pt-BR" sz="1600">
+                        <a:solidFill>
+                          <a:schemeClr val="bg1"/>
+                        </a:solidFill>
+                        <a:effectLst/>
+                        <a:latin typeface="Times New Roman" panose="02020603050405020304" pitchFamily="18" charset="0"/>
+                        <a:ea typeface="Times New Roman" panose="02020603050405020304" pitchFamily="18" charset="0"/>
+                        <a:cs typeface="Times New Roman" panose="02020603050405020304" pitchFamily="18" charset="0"/>
+                      </a:endParaRPr>
+                    </a:p>
+                  </a:txBody>
+                  <a:tcPr marL="9525" marR="9525" marT="9525" marB="9525" anchor="ctr">
+                    <a:solidFill>
+                      <a:srgbClr val="F39211"/>
+                    </a:solidFill>
+                  </a:tcPr>
+                </a:tc>
+                <a:tc>
+                  <a:txBody>
+                    <a:bodyPr/>
+                    <a:lstStyle/>
+                    <a:p>
+                      <a:pPr>
+                        <a:lnSpc>
+                          <a:spcPct val="107000"/>
+                        </a:lnSpc>
+                        <a:spcAft>
+                          <a:spcPts val="0"/>
+                        </a:spcAft>
+                      </a:pPr>
+                      <a:r>
+                        <a:rPr lang="pt-BR" sz="1600">
+                          <a:solidFill>
+                            <a:schemeClr val="bg1"/>
+                          </a:solidFill>
+                          <a:effectLst/>
+                        </a:rPr>
+                        <a:t>Multiplicação</a:t>
+                      </a:r>
+                      <a:endParaRPr lang="pt-BR" sz="1600">
+                        <a:solidFill>
+                          <a:schemeClr val="bg1"/>
+                        </a:solidFill>
+                        <a:effectLst/>
+                        <a:latin typeface="Times New Roman" panose="02020603050405020304" pitchFamily="18" charset="0"/>
+                        <a:ea typeface="Times New Roman" panose="02020603050405020304" pitchFamily="18" charset="0"/>
+                        <a:cs typeface="Times New Roman" panose="02020603050405020304" pitchFamily="18" charset="0"/>
+                      </a:endParaRPr>
+                    </a:p>
+                  </a:txBody>
+                  <a:tcPr marL="9525" marR="9525" marT="9525" marB="9525" anchor="ctr">
+                    <a:solidFill>
+                      <a:srgbClr val="F39211"/>
+                    </a:solidFill>
+                  </a:tcPr>
+                </a:tc>
+                <a:tc>
+                  <a:txBody>
+                    <a:bodyPr/>
+                    <a:lstStyle/>
+                    <a:p>
+                      <a:pPr>
+                        <a:lnSpc>
+                          <a:spcPct val="107000"/>
+                        </a:lnSpc>
+                        <a:spcAft>
+                          <a:spcPts val="0"/>
+                        </a:spcAft>
+                      </a:pPr>
+                      <a:r>
+                        <a:rPr lang="pt-BR" sz="1600" dirty="0">
+                          <a:solidFill>
+                            <a:schemeClr val="bg1"/>
+                          </a:solidFill>
+                          <a:effectLst/>
+                        </a:rPr>
+                        <a:t>10 * 5</a:t>
+                      </a:r>
+                      <a:endParaRPr lang="pt-BR" sz="1600" dirty="0">
+                        <a:solidFill>
+                          <a:schemeClr val="bg1"/>
+                        </a:solidFill>
+                        <a:effectLst/>
+                        <a:latin typeface="Times New Roman" panose="02020603050405020304" pitchFamily="18" charset="0"/>
+                        <a:ea typeface="Times New Roman" panose="02020603050405020304" pitchFamily="18" charset="0"/>
+                        <a:cs typeface="Times New Roman" panose="02020603050405020304" pitchFamily="18" charset="0"/>
+                      </a:endParaRPr>
+                    </a:p>
+                  </a:txBody>
+                  <a:tcPr marL="9525" marR="9525" marT="9525" marB="9525" anchor="ctr">
+                    <a:solidFill>
+                      <a:srgbClr val="F39211"/>
+                    </a:solidFill>
+                  </a:tcPr>
+                </a:tc>
+                <a:tc>
+                  <a:txBody>
+                    <a:bodyPr/>
+                    <a:lstStyle/>
+                    <a:p>
+                      <a:pPr>
+                        <a:lnSpc>
+                          <a:spcPct val="107000"/>
+                        </a:lnSpc>
+                        <a:spcAft>
+                          <a:spcPts val="0"/>
+                        </a:spcAft>
+                      </a:pPr>
+                      <a:r>
+                        <a:rPr lang="pt-BR" sz="1600">
+                          <a:solidFill>
+                            <a:schemeClr val="bg1"/>
+                          </a:solidFill>
+                          <a:effectLst/>
+                        </a:rPr>
+                        <a:t>50</a:t>
+                      </a:r>
+                      <a:endParaRPr lang="pt-BR" sz="1600">
+                        <a:solidFill>
+                          <a:schemeClr val="bg1"/>
+                        </a:solidFill>
+                        <a:effectLst/>
+                        <a:latin typeface="Times New Roman" panose="02020603050405020304" pitchFamily="18" charset="0"/>
+                        <a:ea typeface="Times New Roman" panose="02020603050405020304" pitchFamily="18" charset="0"/>
+                        <a:cs typeface="Times New Roman" panose="02020603050405020304" pitchFamily="18" charset="0"/>
+                      </a:endParaRPr>
+                    </a:p>
+                  </a:txBody>
+                  <a:tcPr marL="9525" marR="9525" marT="9525" marB="9525" anchor="ctr">
+                    <a:solidFill>
+                      <a:srgbClr val="F39211"/>
+                    </a:solidFill>
+                  </a:tcPr>
+                </a:tc>
+                <a:extLst>
+                  <a:ext uri="{0D108BD9-81ED-4DB2-BD59-A6C34878D82A}">
+                    <a16:rowId xmlns:a16="http://schemas.microsoft.com/office/drawing/2014/main" val="297355375"/>
+                  </a:ext>
+                </a:extLst>
+              </a:tr>
+              <a:tr h="356201">
+                <a:tc>
+                  <a:txBody>
+                    <a:bodyPr/>
+                    <a:lstStyle/>
+                    <a:p>
+                      <a:pPr>
+                        <a:lnSpc>
+                          <a:spcPct val="107000"/>
+                        </a:lnSpc>
+                        <a:spcAft>
+                          <a:spcPts val="0"/>
+                        </a:spcAft>
+                      </a:pPr>
+                      <a:r>
+                        <a:rPr lang="pt-BR" sz="1600">
+                          <a:solidFill>
+                            <a:schemeClr val="bg1"/>
+                          </a:solidFill>
+                          <a:effectLst/>
+                        </a:rPr>
+                        <a:t>/</a:t>
+                      </a:r>
+                      <a:endParaRPr lang="pt-BR" sz="1600">
+                        <a:solidFill>
+                          <a:schemeClr val="bg1"/>
+                        </a:solidFill>
+                        <a:effectLst/>
+                        <a:latin typeface="Times New Roman" panose="02020603050405020304" pitchFamily="18" charset="0"/>
+                        <a:ea typeface="Times New Roman" panose="02020603050405020304" pitchFamily="18" charset="0"/>
+                        <a:cs typeface="Times New Roman" panose="02020603050405020304" pitchFamily="18" charset="0"/>
+                      </a:endParaRPr>
+                    </a:p>
+                  </a:txBody>
+                  <a:tcPr marL="9525" marR="9525" marT="9525" marB="9525" anchor="ctr">
+                    <a:solidFill>
+                      <a:srgbClr val="F39211"/>
+                    </a:solidFill>
+                  </a:tcPr>
+                </a:tc>
+                <a:tc>
+                  <a:txBody>
+                    <a:bodyPr/>
+                    <a:lstStyle/>
+                    <a:p>
+                      <a:pPr>
+                        <a:lnSpc>
+                          <a:spcPct val="107000"/>
+                        </a:lnSpc>
+                        <a:spcAft>
+                          <a:spcPts val="0"/>
+                        </a:spcAft>
+                      </a:pPr>
+                      <a:r>
+                        <a:rPr lang="pt-BR" sz="1600">
+                          <a:solidFill>
+                            <a:schemeClr val="bg1"/>
+                          </a:solidFill>
+                          <a:effectLst/>
+                        </a:rPr>
+                        <a:t>Divisão</a:t>
+                      </a:r>
+                      <a:endParaRPr lang="pt-BR" sz="1600">
+                        <a:solidFill>
+                          <a:schemeClr val="bg1"/>
+                        </a:solidFill>
+                        <a:effectLst/>
+                        <a:latin typeface="Times New Roman" panose="02020603050405020304" pitchFamily="18" charset="0"/>
+                        <a:ea typeface="Times New Roman" panose="02020603050405020304" pitchFamily="18" charset="0"/>
+                        <a:cs typeface="Times New Roman" panose="02020603050405020304" pitchFamily="18" charset="0"/>
+                      </a:endParaRPr>
+                    </a:p>
+                  </a:txBody>
+                  <a:tcPr marL="9525" marR="9525" marT="9525" marB="9525" anchor="ctr">
+                    <a:solidFill>
+                      <a:srgbClr val="F39211"/>
+                    </a:solidFill>
+                  </a:tcPr>
+                </a:tc>
+                <a:tc>
+                  <a:txBody>
+                    <a:bodyPr/>
+                    <a:lstStyle/>
+                    <a:p>
+                      <a:pPr>
+                        <a:lnSpc>
+                          <a:spcPct val="107000"/>
+                        </a:lnSpc>
+                        <a:spcAft>
+                          <a:spcPts val="0"/>
+                        </a:spcAft>
+                      </a:pPr>
+                      <a:r>
+                        <a:rPr lang="pt-BR" sz="1600">
+                          <a:solidFill>
+                            <a:schemeClr val="bg1"/>
+                          </a:solidFill>
+                          <a:effectLst/>
+                        </a:rPr>
+                        <a:t>10 / 2</a:t>
+                      </a:r>
+                      <a:endParaRPr lang="pt-BR" sz="1600">
+                        <a:solidFill>
+                          <a:schemeClr val="bg1"/>
+                        </a:solidFill>
+                        <a:effectLst/>
+                        <a:latin typeface="Times New Roman" panose="02020603050405020304" pitchFamily="18" charset="0"/>
+                        <a:ea typeface="Times New Roman" panose="02020603050405020304" pitchFamily="18" charset="0"/>
+                        <a:cs typeface="Times New Roman" panose="02020603050405020304" pitchFamily="18" charset="0"/>
+                      </a:endParaRPr>
+                    </a:p>
+                  </a:txBody>
+                  <a:tcPr marL="9525" marR="9525" marT="9525" marB="9525" anchor="ctr">
+                    <a:solidFill>
+                      <a:srgbClr val="F39211"/>
+                    </a:solidFill>
+                  </a:tcPr>
+                </a:tc>
+                <a:tc>
+                  <a:txBody>
+                    <a:bodyPr/>
+                    <a:lstStyle/>
+                    <a:p>
+                      <a:pPr>
+                        <a:lnSpc>
+                          <a:spcPct val="107000"/>
+                        </a:lnSpc>
+                        <a:spcAft>
+                          <a:spcPts val="0"/>
+                        </a:spcAft>
+                      </a:pPr>
+                      <a:r>
+                        <a:rPr lang="pt-BR" sz="1600" dirty="0">
+                          <a:solidFill>
+                            <a:schemeClr val="bg1"/>
+                          </a:solidFill>
+                          <a:effectLst/>
+                        </a:rPr>
+                        <a:t>5</a:t>
+                      </a:r>
+                      <a:endParaRPr lang="pt-BR" sz="1600" dirty="0">
+                        <a:solidFill>
+                          <a:schemeClr val="bg1"/>
+                        </a:solidFill>
+                        <a:effectLst/>
+                        <a:latin typeface="Times New Roman" panose="02020603050405020304" pitchFamily="18" charset="0"/>
+                        <a:ea typeface="Times New Roman" panose="02020603050405020304" pitchFamily="18" charset="0"/>
+                        <a:cs typeface="Times New Roman" panose="02020603050405020304" pitchFamily="18" charset="0"/>
+                      </a:endParaRPr>
+                    </a:p>
+                  </a:txBody>
+                  <a:tcPr marL="9525" marR="9525" marT="9525" marB="9525" anchor="ctr">
+                    <a:solidFill>
+                      <a:srgbClr val="F39211"/>
+                    </a:solidFill>
+                  </a:tcPr>
+                </a:tc>
+                <a:extLst>
+                  <a:ext uri="{0D108BD9-81ED-4DB2-BD59-A6C34878D82A}">
+                    <a16:rowId xmlns:a16="http://schemas.microsoft.com/office/drawing/2014/main" val="2143981579"/>
+                  </a:ext>
+                </a:extLst>
+              </a:tr>
+              <a:tr h="356201">
+                <a:tc>
+                  <a:txBody>
+                    <a:bodyPr/>
+                    <a:lstStyle/>
+                    <a:p>
+                      <a:pPr>
+                        <a:lnSpc>
+                          <a:spcPct val="107000"/>
+                        </a:lnSpc>
+                        <a:spcAft>
+                          <a:spcPts val="0"/>
+                        </a:spcAft>
+                      </a:pPr>
+                      <a:r>
+                        <a:rPr lang="pt-BR" sz="1600">
+                          <a:solidFill>
+                            <a:schemeClr val="bg1"/>
+                          </a:solidFill>
+                          <a:effectLst/>
+                        </a:rPr>
+                        <a:t>%</a:t>
+                      </a:r>
+                      <a:endParaRPr lang="pt-BR" sz="1600">
+                        <a:solidFill>
+                          <a:schemeClr val="bg1"/>
+                        </a:solidFill>
+                        <a:effectLst/>
+                        <a:latin typeface="Times New Roman" panose="02020603050405020304" pitchFamily="18" charset="0"/>
+                        <a:ea typeface="Times New Roman" panose="02020603050405020304" pitchFamily="18" charset="0"/>
+                        <a:cs typeface="Times New Roman" panose="02020603050405020304" pitchFamily="18" charset="0"/>
+                      </a:endParaRPr>
+                    </a:p>
+                  </a:txBody>
+                  <a:tcPr marL="9525" marR="9525" marT="9525" marB="9525" anchor="ctr">
+                    <a:solidFill>
+                      <a:srgbClr val="F39211"/>
+                    </a:solidFill>
+                  </a:tcPr>
+                </a:tc>
+                <a:tc>
+                  <a:txBody>
+                    <a:bodyPr/>
+                    <a:lstStyle/>
+                    <a:p>
+                      <a:pPr>
+                        <a:lnSpc>
+                          <a:spcPct val="107000"/>
+                        </a:lnSpc>
+                        <a:spcAft>
+                          <a:spcPts val="0"/>
+                        </a:spcAft>
+                      </a:pPr>
+                      <a:r>
+                        <a:rPr lang="pt-BR" sz="1600">
+                          <a:solidFill>
+                            <a:schemeClr val="bg1"/>
+                          </a:solidFill>
+                          <a:effectLst/>
+                        </a:rPr>
+                        <a:t>Módulo (resto)</a:t>
+                      </a:r>
+                      <a:endParaRPr lang="pt-BR" sz="1600">
+                        <a:solidFill>
+                          <a:schemeClr val="bg1"/>
+                        </a:solidFill>
+                        <a:effectLst/>
+                        <a:latin typeface="Times New Roman" panose="02020603050405020304" pitchFamily="18" charset="0"/>
+                        <a:ea typeface="Times New Roman" panose="02020603050405020304" pitchFamily="18" charset="0"/>
+                        <a:cs typeface="Times New Roman" panose="02020603050405020304" pitchFamily="18" charset="0"/>
+                      </a:endParaRPr>
+                    </a:p>
+                  </a:txBody>
+                  <a:tcPr marL="9525" marR="9525" marT="9525" marB="9525" anchor="ctr">
+                    <a:solidFill>
+                      <a:srgbClr val="F39211"/>
+                    </a:solidFill>
+                  </a:tcPr>
+                </a:tc>
+                <a:tc>
+                  <a:txBody>
+                    <a:bodyPr/>
+                    <a:lstStyle/>
+                    <a:p>
+                      <a:pPr>
+                        <a:lnSpc>
+                          <a:spcPct val="107000"/>
+                        </a:lnSpc>
+                        <a:spcAft>
+                          <a:spcPts val="0"/>
+                        </a:spcAft>
+                      </a:pPr>
+                      <a:r>
+                        <a:rPr lang="pt-BR" sz="1600">
+                          <a:solidFill>
+                            <a:schemeClr val="bg1"/>
+                          </a:solidFill>
+                          <a:effectLst/>
+                        </a:rPr>
+                        <a:t>10 % 3</a:t>
+                      </a:r>
+                      <a:endParaRPr lang="pt-BR" sz="1600">
+                        <a:solidFill>
+                          <a:schemeClr val="bg1"/>
+                        </a:solidFill>
+                        <a:effectLst/>
+                        <a:latin typeface="Times New Roman" panose="02020603050405020304" pitchFamily="18" charset="0"/>
+                        <a:ea typeface="Times New Roman" panose="02020603050405020304" pitchFamily="18" charset="0"/>
+                        <a:cs typeface="Times New Roman" panose="02020603050405020304" pitchFamily="18" charset="0"/>
+                      </a:endParaRPr>
+                    </a:p>
+                  </a:txBody>
+                  <a:tcPr marL="9525" marR="9525" marT="9525" marB="9525" anchor="ctr">
+                    <a:solidFill>
+                      <a:srgbClr val="F39211"/>
+                    </a:solidFill>
+                  </a:tcPr>
+                </a:tc>
+                <a:tc>
+                  <a:txBody>
+                    <a:bodyPr/>
+                    <a:lstStyle/>
+                    <a:p>
+                      <a:pPr>
+                        <a:lnSpc>
+                          <a:spcPct val="107000"/>
+                        </a:lnSpc>
+                        <a:spcAft>
+                          <a:spcPts val="0"/>
+                        </a:spcAft>
+                      </a:pPr>
+                      <a:r>
+                        <a:rPr lang="pt-BR" sz="1600" dirty="0">
+                          <a:solidFill>
+                            <a:schemeClr val="bg1"/>
+                          </a:solidFill>
+                          <a:effectLst/>
+                        </a:rPr>
+                        <a:t>1</a:t>
+                      </a:r>
+                      <a:endParaRPr lang="pt-BR" sz="1600" dirty="0">
+                        <a:solidFill>
+                          <a:schemeClr val="bg1"/>
+                        </a:solidFill>
+                        <a:effectLst/>
+                        <a:latin typeface="Times New Roman" panose="02020603050405020304" pitchFamily="18" charset="0"/>
+                        <a:ea typeface="Times New Roman" panose="02020603050405020304" pitchFamily="18" charset="0"/>
+                        <a:cs typeface="Times New Roman" panose="02020603050405020304" pitchFamily="18" charset="0"/>
+                      </a:endParaRPr>
+                    </a:p>
+                  </a:txBody>
+                  <a:tcPr marL="9525" marR="9525" marT="9525" marB="9525" anchor="ctr">
+                    <a:solidFill>
+                      <a:srgbClr val="F39211"/>
+                    </a:solidFill>
+                  </a:tcPr>
+                </a:tc>
+                <a:extLst>
+                  <a:ext uri="{0D108BD9-81ED-4DB2-BD59-A6C34878D82A}">
+                    <a16:rowId xmlns:a16="http://schemas.microsoft.com/office/drawing/2014/main" val="4093559123"/>
+                  </a:ext>
+                </a:extLst>
+              </a:tr>
+            </a:tbl>
+          </a:graphicData>
+        </a:graphic>
+      </p:graphicFrame>
+    </p:spTree>
+    <p:extLst>
+      <p:ext uri="{BB962C8B-B14F-4D97-AF65-F5344CB8AC3E}">
+        <p14:creationId xmlns:p14="http://schemas.microsoft.com/office/powerpoint/2010/main" val="2974325803"/>
+      </p:ext>
+    </p:extLst>
+  </p:cSld>
+  <p:clrMapOvr>
+    <a:masterClrMapping/>
+  </p:clrMapOvr>
+</p:sld>
+</file>
+
+<file path=ppt/slides/slide15.xml><?xml version="1.0" encoding="utf-8"?>
+<p:sld xmlns:a="http://schemas.openxmlformats.org/drawingml/2006/main" xmlns:r="http://schemas.openxmlformats.org/officeDocument/2006/relationships" xmlns:p="http://schemas.openxmlformats.org/presentationml/2006/main">
+  <p:cSld>
+    <p:spTree>
+      <p:nvGrpSpPr>
+        <p:cNvPr id="1" name=""/>
+        <p:cNvGrpSpPr/>
+        <p:nvPr/>
+      </p:nvGrpSpPr>
+      <p:grpSpPr>
+        <a:xfrm>
+          <a:off x="0" y="0"/>
+          <a:ext cx="0" cy="0"/>
+          <a:chOff x="0" y="0"/>
+          <a:chExt cx="0" cy="0"/>
+        </a:xfrm>
+      </p:grpSpPr>
+      <p:sp>
+        <p:nvSpPr>
+          <p:cNvPr id="2" name="Título 1">
+            <a:extLst>
+              <a:ext uri="{FF2B5EF4-FFF2-40B4-BE49-F238E27FC236}">
+                <a16:creationId xmlns:a16="http://schemas.microsoft.com/office/drawing/2014/main" id="{E1BF4364-A6CD-4460-A48D-6779B48ADDBE}"/>
+              </a:ext>
+            </a:extLst>
+          </p:cNvPr>
+          <p:cNvSpPr>
+            <a:spLocks noGrp="1"/>
+          </p:cNvSpPr>
+          <p:nvPr>
+            <p:ph type="title"/>
+          </p:nvPr>
+        </p:nvSpPr>
+        <p:spPr>
+          <a:xfrm>
+            <a:off x="338845" y="167352"/>
+            <a:ext cx="9692640" cy="1533440"/>
+          </a:xfrm>
+        </p:spPr>
+        <p:txBody>
+          <a:bodyPr>
+            <a:noAutofit/>
+          </a:bodyPr>
+          <a:lstStyle/>
+          <a:p>
+            <a:r>
+              <a:rPr lang="pt-BR" sz="3400" b="1" dirty="0">
+                <a:solidFill>
+                  <a:srgbClr val="00758F"/>
+                </a:solidFill>
+              </a:rPr>
+              <a:t>Consultas com Funções: </a:t>
+            </a:r>
+            <a:br>
+              <a:rPr lang="pt-BR" sz="3400" b="1" dirty="0">
+                <a:solidFill>
+                  <a:srgbClr val="00758F"/>
+                </a:solidFill>
+              </a:rPr>
+            </a:br>
+            <a:r>
+              <a:rPr lang="pt-BR" sz="3400" b="1" dirty="0">
+                <a:solidFill>
+                  <a:srgbClr val="F39211"/>
+                </a:solidFill>
+              </a:rPr>
+              <a:t>1.1 Funções de Cálculo e Operadores Aritméticos no MySQL</a:t>
+            </a:r>
+            <a:endParaRPr lang="pt-BR" sz="3400" dirty="0">
+              <a:solidFill>
+                <a:srgbClr val="F39211"/>
+              </a:solidFill>
+            </a:endParaRPr>
+          </a:p>
+        </p:txBody>
+      </p:sp>
+      <p:pic>
+        <p:nvPicPr>
+          <p:cNvPr id="4" name="Picture 6" descr="https://www.mysql.com/common/logos/logo-mysql-170x115.png">
+            <a:extLst>
+              <a:ext uri="{FF2B5EF4-FFF2-40B4-BE49-F238E27FC236}">
+                <a16:creationId xmlns:a16="http://schemas.microsoft.com/office/drawing/2014/main" id="{441DFD02-E8A2-4690-9CD7-1CC407F2024E}"/>
+              </a:ext>
+            </a:extLst>
+          </p:cNvPr>
+          <p:cNvPicPr>
+            <a:picLocks noChangeAspect="1" noChangeArrowheads="1"/>
+          </p:cNvPicPr>
+          <p:nvPr/>
+        </p:nvPicPr>
+        <p:blipFill>
+          <a:blip r:embed="rId2">
+            <a:extLst>
+              <a:ext uri="{28A0092B-C50C-407E-A947-70E740481C1C}">
+                <a14:useLocalDpi xmlns:a14="http://schemas.microsoft.com/office/drawing/2010/main" val="0"/>
+              </a:ext>
+            </a:extLst>
+          </a:blip>
+          <a:srcRect/>
+          <a:stretch>
+            <a:fillRect/>
+          </a:stretch>
+        </p:blipFill>
+        <p:spPr bwMode="auto">
+          <a:xfrm>
+            <a:off x="9774793" y="5753675"/>
+            <a:ext cx="1385775" cy="936973"/>
+          </a:xfrm>
+          <a:prstGeom prst="rect">
+            <a:avLst/>
+          </a:prstGeom>
+          <a:noFill/>
+          <a:extLst>
+            <a:ext uri="{909E8E84-426E-40DD-AFC4-6F175D3DCCD1}">
+              <a14:hiddenFill xmlns:a14="http://schemas.microsoft.com/office/drawing/2010/main">
+                <a:solidFill>
+                  <a:srgbClr val="FFFFFF"/>
+                </a:solidFill>
+              </a14:hiddenFill>
+            </a:ext>
+          </a:extLst>
+        </p:spPr>
+      </p:pic>
+      <p:sp>
+        <p:nvSpPr>
+          <p:cNvPr id="6" name="CaixaDeTexto 5">
+            <a:extLst>
+              <a:ext uri="{FF2B5EF4-FFF2-40B4-BE49-F238E27FC236}">
+                <a16:creationId xmlns:a16="http://schemas.microsoft.com/office/drawing/2014/main" id="{AF06CEA4-1D6A-4FB2-B738-A9362ADA1CCA}"/>
+              </a:ext>
+            </a:extLst>
+          </p:cNvPr>
+          <p:cNvSpPr txBox="1"/>
+          <p:nvPr/>
+        </p:nvSpPr>
+        <p:spPr>
+          <a:xfrm>
+            <a:off x="338845" y="1861542"/>
+            <a:ext cx="10088523" cy="2970044"/>
+          </a:xfrm>
+          <a:prstGeom prst="rect">
+            <a:avLst/>
+          </a:prstGeom>
+          <a:noFill/>
+        </p:spPr>
+        <p:txBody>
+          <a:bodyPr wrap="square" rtlCol="0">
+            <a:spAutoFit/>
+          </a:bodyPr>
+          <a:lstStyle/>
+          <a:p>
+            <a:r>
+              <a:rPr lang="pt-BR" dirty="0"/>
+              <a:t>Podemos usar esses operadores com </a:t>
+            </a:r>
+            <a:r>
+              <a:rPr lang="pt-BR" b="1" dirty="0"/>
+              <a:t>colunas numéricas</a:t>
+            </a:r>
+            <a:r>
+              <a:rPr lang="pt-BR" dirty="0"/>
+              <a:t> em consultas, como:</a:t>
+            </a:r>
+            <a:br>
+              <a:rPr lang="pt-BR" dirty="0"/>
+            </a:br>
+            <a:r>
+              <a:rPr lang="pt-BR" b="1" dirty="0">
+                <a:solidFill>
+                  <a:srgbClr val="0000FF"/>
+                </a:solidFill>
+              </a:rPr>
+              <a:t>SELECT</a:t>
+            </a:r>
+            <a:r>
+              <a:rPr lang="pt-BR" dirty="0"/>
+              <a:t> </a:t>
+            </a:r>
+            <a:r>
+              <a:rPr lang="pt-BR" dirty="0" err="1">
+                <a:solidFill>
+                  <a:schemeClr val="bg1">
+                    <a:lumMod val="50000"/>
+                  </a:schemeClr>
+                </a:solidFill>
+              </a:rPr>
+              <a:t>preco_unitario</a:t>
+            </a:r>
+            <a:r>
+              <a:rPr lang="pt-BR" dirty="0">
+                <a:solidFill>
+                  <a:schemeClr val="bg1">
+                    <a:lumMod val="50000"/>
+                  </a:schemeClr>
+                </a:solidFill>
+              </a:rPr>
+              <a:t> </a:t>
+            </a:r>
+            <a:r>
+              <a:rPr lang="pt-BR" b="1" dirty="0">
+                <a:solidFill>
+                  <a:schemeClr val="bg1">
+                    <a:lumMod val="50000"/>
+                  </a:schemeClr>
+                </a:solidFill>
+              </a:rPr>
+              <a:t>*</a:t>
+            </a:r>
+            <a:r>
+              <a:rPr lang="pt-BR" dirty="0">
+                <a:solidFill>
+                  <a:schemeClr val="bg1">
+                    <a:lumMod val="50000"/>
+                  </a:schemeClr>
+                </a:solidFill>
+              </a:rPr>
+              <a:t> estoque</a:t>
+            </a:r>
+            <a:r>
+              <a:rPr lang="pt-BR" dirty="0"/>
+              <a:t> </a:t>
+            </a:r>
+            <a:r>
+              <a:rPr lang="pt-BR" b="1" dirty="0">
+                <a:solidFill>
+                  <a:srgbClr val="0000FF"/>
+                </a:solidFill>
+              </a:rPr>
+              <a:t>AS</a:t>
+            </a:r>
+            <a:r>
+              <a:rPr lang="pt-BR" dirty="0"/>
+              <a:t> </a:t>
+            </a:r>
+            <a:r>
+              <a:rPr lang="pt-BR" dirty="0" err="1">
+                <a:solidFill>
+                  <a:schemeClr val="bg1">
+                    <a:lumMod val="50000"/>
+                  </a:schemeClr>
+                </a:solidFill>
+              </a:rPr>
+              <a:t>total_em_estoque</a:t>
+            </a:r>
+            <a:endParaRPr lang="pt-BR" dirty="0">
+              <a:solidFill>
+                <a:schemeClr val="bg1">
+                  <a:lumMod val="50000"/>
+                </a:schemeClr>
+              </a:solidFill>
+            </a:endParaRPr>
+          </a:p>
+          <a:p>
+            <a:r>
+              <a:rPr lang="pt-BR" b="1" dirty="0">
+                <a:solidFill>
+                  <a:srgbClr val="0000FF"/>
+                </a:solidFill>
+              </a:rPr>
+              <a:t>FROM</a:t>
+            </a:r>
+            <a:r>
+              <a:rPr lang="pt-BR" dirty="0"/>
+              <a:t> </a:t>
+            </a:r>
+            <a:r>
+              <a:rPr lang="pt-BR" dirty="0">
+                <a:solidFill>
+                  <a:schemeClr val="bg1">
+                    <a:lumMod val="50000"/>
+                  </a:schemeClr>
+                </a:solidFill>
+              </a:rPr>
+              <a:t>produtos</a:t>
+            </a:r>
+            <a:r>
+              <a:rPr lang="pt-BR" b="1" dirty="0"/>
+              <a:t>;</a:t>
+            </a:r>
+          </a:p>
+          <a:p>
+            <a:endParaRPr lang="pt-BR" b="1" dirty="0"/>
+          </a:p>
+          <a:p>
+            <a:r>
+              <a:rPr lang="pt-BR" sz="2100" b="1" dirty="0"/>
+              <a:t>Funções Numéricas do MySQL:</a:t>
+            </a:r>
+            <a:endParaRPr lang="pt-BR" sz="2100" dirty="0"/>
+          </a:p>
+          <a:p>
+            <a:endParaRPr lang="pt-BR" b="1" dirty="0"/>
+          </a:p>
+          <a:p>
+            <a:endParaRPr lang="pt-BR" b="1" dirty="0"/>
+          </a:p>
+          <a:p>
+            <a:endParaRPr lang="pt-BR" dirty="0"/>
+          </a:p>
+          <a:p>
+            <a:endParaRPr lang="pt-BR" sz="2000" dirty="0"/>
+          </a:p>
+          <a:p>
+            <a:endParaRPr lang="pt-BR" sz="2000" dirty="0"/>
+          </a:p>
+        </p:txBody>
+      </p:sp>
+      <p:graphicFrame>
+        <p:nvGraphicFramePr>
+          <p:cNvPr id="10" name="Tabela 9">
+            <a:extLst>
+              <a:ext uri="{FF2B5EF4-FFF2-40B4-BE49-F238E27FC236}">
+                <a16:creationId xmlns:a16="http://schemas.microsoft.com/office/drawing/2014/main" id="{B5973C3B-2A27-4B9F-9BDF-BDEB9D280632}"/>
+              </a:ext>
+            </a:extLst>
+          </p:cNvPr>
+          <p:cNvGraphicFramePr>
+            <a:graphicFrameLocks noGrp="1"/>
+          </p:cNvGraphicFramePr>
+          <p:nvPr>
+            <p:extLst>
+              <p:ext uri="{D42A27DB-BD31-4B8C-83A1-F6EECF244321}">
+                <p14:modId xmlns:p14="http://schemas.microsoft.com/office/powerpoint/2010/main" val="636543631"/>
+              </p:ext>
+            </p:extLst>
+          </p:nvPr>
+        </p:nvGraphicFramePr>
+        <p:xfrm>
+          <a:off x="437059" y="3475008"/>
+          <a:ext cx="10723509" cy="3215640"/>
+        </p:xfrm>
+        <a:graphic>
+          <a:graphicData uri="http://schemas.openxmlformats.org/drawingml/2006/table">
+            <a:tbl>
+              <a:tblPr firstRow="1" firstCol="1" bandRow="1">
+                <a:tableStyleId>{5C22544A-7EE6-4342-B048-85BDC9FD1C3A}</a:tableStyleId>
+              </a:tblPr>
+              <a:tblGrid>
+                <a:gridCol w="3574503">
+                  <a:extLst>
+                    <a:ext uri="{9D8B030D-6E8A-4147-A177-3AD203B41FA5}">
+                      <a16:colId xmlns:a16="http://schemas.microsoft.com/office/drawing/2014/main" val="664032137"/>
+                    </a:ext>
+                  </a:extLst>
+                </a:gridCol>
+                <a:gridCol w="3574503">
+                  <a:extLst>
+                    <a:ext uri="{9D8B030D-6E8A-4147-A177-3AD203B41FA5}">
+                      <a16:colId xmlns:a16="http://schemas.microsoft.com/office/drawing/2014/main" val="636193825"/>
+                    </a:ext>
+                  </a:extLst>
+                </a:gridCol>
+                <a:gridCol w="3574503">
+                  <a:extLst>
+                    <a:ext uri="{9D8B030D-6E8A-4147-A177-3AD203B41FA5}">
+                      <a16:colId xmlns:a16="http://schemas.microsoft.com/office/drawing/2014/main" val="3311568042"/>
+                    </a:ext>
+                  </a:extLst>
+                </a:gridCol>
+              </a:tblGrid>
+              <a:tr h="284293">
+                <a:tc>
+                  <a:txBody>
+                    <a:bodyPr/>
+                    <a:lstStyle/>
+                    <a:p>
+                      <a:pPr algn="ctr">
+                        <a:lnSpc>
+                          <a:spcPct val="107000"/>
+                        </a:lnSpc>
+                        <a:spcAft>
+                          <a:spcPts val="0"/>
+                        </a:spcAft>
+                      </a:pPr>
+                      <a:r>
+                        <a:rPr lang="pt-BR" sz="1800">
+                          <a:effectLst/>
+                        </a:rPr>
+                        <a:t>Função</a:t>
+                      </a:r>
+                      <a:endParaRPr lang="pt-BR" sz="1800">
+                        <a:effectLst/>
+                        <a:latin typeface="Times New Roman" panose="02020603050405020304" pitchFamily="18" charset="0"/>
+                        <a:ea typeface="Times New Roman" panose="02020603050405020304" pitchFamily="18" charset="0"/>
+                        <a:cs typeface="Times New Roman" panose="02020603050405020304" pitchFamily="18" charset="0"/>
+                      </a:endParaRPr>
+                    </a:p>
+                  </a:txBody>
+                  <a:tcPr marL="9525" marR="9525" marT="9525" marB="9525" anchor="ctr">
+                    <a:solidFill>
+                      <a:srgbClr val="00758F"/>
+                    </a:solidFill>
+                  </a:tcPr>
+                </a:tc>
+                <a:tc>
+                  <a:txBody>
+                    <a:bodyPr/>
+                    <a:lstStyle/>
+                    <a:p>
+                      <a:pPr algn="ctr">
+                        <a:lnSpc>
+                          <a:spcPct val="107000"/>
+                        </a:lnSpc>
+                        <a:spcAft>
+                          <a:spcPts val="0"/>
+                        </a:spcAft>
+                      </a:pPr>
+                      <a:r>
+                        <a:rPr lang="pt-BR" sz="1800">
+                          <a:effectLst/>
+                        </a:rPr>
+                        <a:t>O que faz</a:t>
+                      </a:r>
+                      <a:endParaRPr lang="pt-BR" sz="1800">
+                        <a:effectLst/>
+                        <a:latin typeface="Times New Roman" panose="02020603050405020304" pitchFamily="18" charset="0"/>
+                        <a:ea typeface="Times New Roman" panose="02020603050405020304" pitchFamily="18" charset="0"/>
+                        <a:cs typeface="Times New Roman" panose="02020603050405020304" pitchFamily="18" charset="0"/>
+                      </a:endParaRPr>
+                    </a:p>
+                  </a:txBody>
+                  <a:tcPr marL="9525" marR="9525" marT="9525" marB="9525" anchor="ctr">
+                    <a:solidFill>
+                      <a:srgbClr val="00758F"/>
+                    </a:solidFill>
+                  </a:tcPr>
+                </a:tc>
+                <a:tc>
+                  <a:txBody>
+                    <a:bodyPr/>
+                    <a:lstStyle/>
+                    <a:p>
+                      <a:pPr algn="ctr">
+                        <a:lnSpc>
+                          <a:spcPct val="107000"/>
+                        </a:lnSpc>
+                        <a:spcAft>
+                          <a:spcPts val="0"/>
+                        </a:spcAft>
+                      </a:pPr>
+                      <a:r>
+                        <a:rPr lang="pt-BR" sz="1800" dirty="0">
+                          <a:effectLst/>
+                        </a:rPr>
+                        <a:t>Exemplo</a:t>
+                      </a:r>
+                      <a:endParaRPr lang="pt-BR" sz="1800" dirty="0">
+                        <a:effectLst/>
+                        <a:latin typeface="Times New Roman" panose="02020603050405020304" pitchFamily="18" charset="0"/>
+                        <a:ea typeface="Times New Roman" panose="02020603050405020304" pitchFamily="18" charset="0"/>
+                        <a:cs typeface="Times New Roman" panose="02020603050405020304" pitchFamily="18" charset="0"/>
+                      </a:endParaRPr>
+                    </a:p>
+                  </a:txBody>
+                  <a:tcPr marL="9525" marR="9525" marT="9525" marB="9525" anchor="ctr">
+                    <a:solidFill>
+                      <a:srgbClr val="00758F"/>
+                    </a:solidFill>
+                  </a:tcPr>
+                </a:tc>
+                <a:extLst>
+                  <a:ext uri="{0D108BD9-81ED-4DB2-BD59-A6C34878D82A}">
+                    <a16:rowId xmlns:a16="http://schemas.microsoft.com/office/drawing/2014/main" val="329543728"/>
+                  </a:ext>
+                </a:extLst>
+              </a:tr>
+              <a:tr h="284293">
+                <a:tc>
+                  <a:txBody>
+                    <a:bodyPr/>
+                    <a:lstStyle/>
+                    <a:p>
+                      <a:pPr>
+                        <a:lnSpc>
+                          <a:spcPct val="107000"/>
+                        </a:lnSpc>
+                        <a:spcAft>
+                          <a:spcPts val="0"/>
+                        </a:spcAft>
+                      </a:pPr>
+                      <a:r>
+                        <a:rPr lang="pt-BR" sz="1800">
+                          <a:solidFill>
+                            <a:schemeClr val="bg1"/>
+                          </a:solidFill>
+                          <a:effectLst/>
+                        </a:rPr>
+                        <a:t>ROUND()</a:t>
+                      </a:r>
+                      <a:endParaRPr lang="pt-BR" sz="1800">
+                        <a:solidFill>
+                          <a:schemeClr val="bg1"/>
+                        </a:solidFill>
+                        <a:effectLst/>
+                        <a:latin typeface="Times New Roman" panose="02020603050405020304" pitchFamily="18" charset="0"/>
+                        <a:ea typeface="Times New Roman" panose="02020603050405020304" pitchFamily="18" charset="0"/>
+                        <a:cs typeface="Times New Roman" panose="02020603050405020304" pitchFamily="18" charset="0"/>
+                      </a:endParaRPr>
+                    </a:p>
+                  </a:txBody>
+                  <a:tcPr marL="9525" marR="9525" marT="9525" marB="9525" anchor="ctr">
+                    <a:solidFill>
+                      <a:srgbClr val="F39211"/>
+                    </a:solidFill>
+                  </a:tcPr>
+                </a:tc>
+                <a:tc>
+                  <a:txBody>
+                    <a:bodyPr/>
+                    <a:lstStyle/>
+                    <a:p>
+                      <a:pPr>
+                        <a:lnSpc>
+                          <a:spcPct val="107000"/>
+                        </a:lnSpc>
+                        <a:spcAft>
+                          <a:spcPts val="0"/>
+                        </a:spcAft>
+                      </a:pPr>
+                      <a:r>
+                        <a:rPr lang="pt-BR" sz="1800">
+                          <a:solidFill>
+                            <a:schemeClr val="bg1"/>
+                          </a:solidFill>
+                          <a:effectLst/>
+                        </a:rPr>
+                        <a:t>Arredonda um número</a:t>
+                      </a:r>
+                      <a:endParaRPr lang="pt-BR" sz="1800">
+                        <a:solidFill>
+                          <a:schemeClr val="bg1"/>
+                        </a:solidFill>
+                        <a:effectLst/>
+                        <a:latin typeface="Times New Roman" panose="02020603050405020304" pitchFamily="18" charset="0"/>
+                        <a:ea typeface="Times New Roman" panose="02020603050405020304" pitchFamily="18" charset="0"/>
+                        <a:cs typeface="Times New Roman" panose="02020603050405020304" pitchFamily="18" charset="0"/>
+                      </a:endParaRPr>
+                    </a:p>
+                  </a:txBody>
+                  <a:tcPr marL="9525" marR="9525" marT="9525" marB="9525" anchor="ctr">
+                    <a:solidFill>
+                      <a:srgbClr val="F39211"/>
+                    </a:solidFill>
+                  </a:tcPr>
+                </a:tc>
+                <a:tc>
+                  <a:txBody>
+                    <a:bodyPr/>
+                    <a:lstStyle/>
+                    <a:p>
+                      <a:pPr>
+                        <a:lnSpc>
+                          <a:spcPct val="107000"/>
+                        </a:lnSpc>
+                        <a:spcAft>
+                          <a:spcPts val="0"/>
+                        </a:spcAft>
+                      </a:pPr>
+                      <a:r>
+                        <a:rPr lang="pt-BR" sz="1800">
+                          <a:solidFill>
+                            <a:schemeClr val="bg1"/>
+                          </a:solidFill>
+                          <a:effectLst/>
+                        </a:rPr>
+                        <a:t>ROUND(10.456, 2) → 10.46</a:t>
+                      </a:r>
+                      <a:endParaRPr lang="pt-BR" sz="1800">
+                        <a:solidFill>
+                          <a:schemeClr val="bg1"/>
+                        </a:solidFill>
+                        <a:effectLst/>
+                        <a:latin typeface="Times New Roman" panose="02020603050405020304" pitchFamily="18" charset="0"/>
+                        <a:ea typeface="Times New Roman" panose="02020603050405020304" pitchFamily="18" charset="0"/>
+                        <a:cs typeface="Times New Roman" panose="02020603050405020304" pitchFamily="18" charset="0"/>
+                      </a:endParaRPr>
+                    </a:p>
+                  </a:txBody>
+                  <a:tcPr marL="9525" marR="9525" marT="9525" marB="9525" anchor="ctr">
+                    <a:solidFill>
+                      <a:srgbClr val="F39211"/>
+                    </a:solidFill>
+                  </a:tcPr>
+                </a:tc>
+                <a:extLst>
+                  <a:ext uri="{0D108BD9-81ED-4DB2-BD59-A6C34878D82A}">
+                    <a16:rowId xmlns:a16="http://schemas.microsoft.com/office/drawing/2014/main" val="149268218"/>
+                  </a:ext>
+                </a:extLst>
+              </a:tr>
+              <a:tr h="284293">
+                <a:tc>
+                  <a:txBody>
+                    <a:bodyPr/>
+                    <a:lstStyle/>
+                    <a:p>
+                      <a:pPr>
+                        <a:lnSpc>
+                          <a:spcPct val="107000"/>
+                        </a:lnSpc>
+                        <a:spcAft>
+                          <a:spcPts val="0"/>
+                        </a:spcAft>
+                      </a:pPr>
+                      <a:r>
+                        <a:rPr lang="pt-BR" sz="1800">
+                          <a:solidFill>
+                            <a:schemeClr val="bg1"/>
+                          </a:solidFill>
+                          <a:effectLst/>
+                        </a:rPr>
+                        <a:t>CEIL() ou CEILING()</a:t>
+                      </a:r>
+                      <a:endParaRPr lang="pt-BR" sz="1800">
+                        <a:solidFill>
+                          <a:schemeClr val="bg1"/>
+                        </a:solidFill>
+                        <a:effectLst/>
+                        <a:latin typeface="Times New Roman" panose="02020603050405020304" pitchFamily="18" charset="0"/>
+                        <a:ea typeface="Times New Roman" panose="02020603050405020304" pitchFamily="18" charset="0"/>
+                        <a:cs typeface="Times New Roman" panose="02020603050405020304" pitchFamily="18" charset="0"/>
+                      </a:endParaRPr>
+                    </a:p>
+                  </a:txBody>
+                  <a:tcPr marL="9525" marR="9525" marT="9525" marB="9525" anchor="ctr">
+                    <a:solidFill>
+                      <a:srgbClr val="F39211"/>
+                    </a:solidFill>
+                  </a:tcPr>
+                </a:tc>
+                <a:tc>
+                  <a:txBody>
+                    <a:bodyPr/>
+                    <a:lstStyle/>
+                    <a:p>
+                      <a:pPr>
+                        <a:lnSpc>
+                          <a:spcPct val="107000"/>
+                        </a:lnSpc>
+                        <a:spcAft>
+                          <a:spcPts val="0"/>
+                        </a:spcAft>
+                      </a:pPr>
+                      <a:r>
+                        <a:rPr lang="pt-BR" sz="1800">
+                          <a:solidFill>
+                            <a:schemeClr val="bg1"/>
+                          </a:solidFill>
+                          <a:effectLst/>
+                        </a:rPr>
+                        <a:t>Arredonda para cima</a:t>
+                      </a:r>
+                      <a:endParaRPr lang="pt-BR" sz="1800">
+                        <a:solidFill>
+                          <a:schemeClr val="bg1"/>
+                        </a:solidFill>
+                        <a:effectLst/>
+                        <a:latin typeface="Times New Roman" panose="02020603050405020304" pitchFamily="18" charset="0"/>
+                        <a:ea typeface="Times New Roman" panose="02020603050405020304" pitchFamily="18" charset="0"/>
+                        <a:cs typeface="Times New Roman" panose="02020603050405020304" pitchFamily="18" charset="0"/>
+                      </a:endParaRPr>
+                    </a:p>
+                  </a:txBody>
+                  <a:tcPr marL="9525" marR="9525" marT="9525" marB="9525" anchor="ctr">
+                    <a:solidFill>
+                      <a:srgbClr val="F39211"/>
+                    </a:solidFill>
+                  </a:tcPr>
+                </a:tc>
+                <a:tc>
+                  <a:txBody>
+                    <a:bodyPr/>
+                    <a:lstStyle/>
+                    <a:p>
+                      <a:pPr>
+                        <a:lnSpc>
+                          <a:spcPct val="107000"/>
+                        </a:lnSpc>
+                        <a:spcAft>
+                          <a:spcPts val="0"/>
+                        </a:spcAft>
+                      </a:pPr>
+                      <a:r>
+                        <a:rPr lang="pt-BR" sz="1800">
+                          <a:solidFill>
+                            <a:schemeClr val="bg1"/>
+                          </a:solidFill>
+                          <a:effectLst/>
+                        </a:rPr>
+                        <a:t>CEIL(10.2) → 11</a:t>
+                      </a:r>
+                      <a:endParaRPr lang="pt-BR" sz="1800">
+                        <a:solidFill>
+                          <a:schemeClr val="bg1"/>
+                        </a:solidFill>
+                        <a:effectLst/>
+                        <a:latin typeface="Times New Roman" panose="02020603050405020304" pitchFamily="18" charset="0"/>
+                        <a:ea typeface="Times New Roman" panose="02020603050405020304" pitchFamily="18" charset="0"/>
+                        <a:cs typeface="Times New Roman" panose="02020603050405020304" pitchFamily="18" charset="0"/>
+                      </a:endParaRPr>
+                    </a:p>
+                  </a:txBody>
+                  <a:tcPr marL="9525" marR="9525" marT="9525" marB="9525" anchor="ctr">
+                    <a:solidFill>
+                      <a:srgbClr val="F39211"/>
+                    </a:solidFill>
+                  </a:tcPr>
+                </a:tc>
+                <a:extLst>
+                  <a:ext uri="{0D108BD9-81ED-4DB2-BD59-A6C34878D82A}">
+                    <a16:rowId xmlns:a16="http://schemas.microsoft.com/office/drawing/2014/main" val="2420119148"/>
+                  </a:ext>
+                </a:extLst>
+              </a:tr>
+              <a:tr h="284293">
+                <a:tc>
+                  <a:txBody>
+                    <a:bodyPr/>
+                    <a:lstStyle/>
+                    <a:p>
+                      <a:pPr>
+                        <a:lnSpc>
+                          <a:spcPct val="107000"/>
+                        </a:lnSpc>
+                        <a:spcAft>
+                          <a:spcPts val="0"/>
+                        </a:spcAft>
+                      </a:pPr>
+                      <a:r>
+                        <a:rPr lang="pt-BR" sz="1800">
+                          <a:solidFill>
+                            <a:schemeClr val="bg1"/>
+                          </a:solidFill>
+                          <a:effectLst/>
+                        </a:rPr>
+                        <a:t>FLOOR()</a:t>
+                      </a:r>
+                      <a:endParaRPr lang="pt-BR" sz="1800">
+                        <a:solidFill>
+                          <a:schemeClr val="bg1"/>
+                        </a:solidFill>
+                        <a:effectLst/>
+                        <a:latin typeface="Times New Roman" panose="02020603050405020304" pitchFamily="18" charset="0"/>
+                        <a:ea typeface="Times New Roman" panose="02020603050405020304" pitchFamily="18" charset="0"/>
+                        <a:cs typeface="Times New Roman" panose="02020603050405020304" pitchFamily="18" charset="0"/>
+                      </a:endParaRPr>
+                    </a:p>
+                  </a:txBody>
+                  <a:tcPr marL="9525" marR="9525" marT="9525" marB="9525" anchor="ctr">
+                    <a:solidFill>
+                      <a:srgbClr val="F39211"/>
+                    </a:solidFill>
+                  </a:tcPr>
+                </a:tc>
+                <a:tc>
+                  <a:txBody>
+                    <a:bodyPr/>
+                    <a:lstStyle/>
+                    <a:p>
+                      <a:pPr>
+                        <a:lnSpc>
+                          <a:spcPct val="107000"/>
+                        </a:lnSpc>
+                        <a:spcAft>
+                          <a:spcPts val="0"/>
+                        </a:spcAft>
+                      </a:pPr>
+                      <a:r>
+                        <a:rPr lang="pt-BR" sz="1800">
+                          <a:solidFill>
+                            <a:schemeClr val="bg1"/>
+                          </a:solidFill>
+                          <a:effectLst/>
+                        </a:rPr>
+                        <a:t>Arredonda para baixo</a:t>
+                      </a:r>
+                      <a:endParaRPr lang="pt-BR" sz="1800">
+                        <a:solidFill>
+                          <a:schemeClr val="bg1"/>
+                        </a:solidFill>
+                        <a:effectLst/>
+                        <a:latin typeface="Times New Roman" panose="02020603050405020304" pitchFamily="18" charset="0"/>
+                        <a:ea typeface="Times New Roman" panose="02020603050405020304" pitchFamily="18" charset="0"/>
+                        <a:cs typeface="Times New Roman" panose="02020603050405020304" pitchFamily="18" charset="0"/>
+                      </a:endParaRPr>
+                    </a:p>
+                  </a:txBody>
+                  <a:tcPr marL="9525" marR="9525" marT="9525" marB="9525" anchor="ctr">
+                    <a:solidFill>
+                      <a:srgbClr val="F39211"/>
+                    </a:solidFill>
+                  </a:tcPr>
+                </a:tc>
+                <a:tc>
+                  <a:txBody>
+                    <a:bodyPr/>
+                    <a:lstStyle/>
+                    <a:p>
+                      <a:pPr>
+                        <a:lnSpc>
+                          <a:spcPct val="107000"/>
+                        </a:lnSpc>
+                        <a:spcAft>
+                          <a:spcPts val="0"/>
+                        </a:spcAft>
+                      </a:pPr>
+                      <a:r>
+                        <a:rPr lang="pt-BR" sz="1800" dirty="0">
+                          <a:solidFill>
+                            <a:schemeClr val="bg1"/>
+                          </a:solidFill>
+                          <a:effectLst/>
+                        </a:rPr>
+                        <a:t>FLOOR(10.9) → 10</a:t>
+                      </a:r>
+                      <a:endParaRPr lang="pt-BR" sz="1800" dirty="0">
+                        <a:solidFill>
+                          <a:schemeClr val="bg1"/>
+                        </a:solidFill>
+                        <a:effectLst/>
+                        <a:latin typeface="Times New Roman" panose="02020603050405020304" pitchFamily="18" charset="0"/>
+                        <a:ea typeface="Times New Roman" panose="02020603050405020304" pitchFamily="18" charset="0"/>
+                        <a:cs typeface="Times New Roman" panose="02020603050405020304" pitchFamily="18" charset="0"/>
+                      </a:endParaRPr>
+                    </a:p>
+                  </a:txBody>
+                  <a:tcPr marL="9525" marR="9525" marT="9525" marB="9525" anchor="ctr">
+                    <a:solidFill>
+                      <a:srgbClr val="F39211"/>
+                    </a:solidFill>
+                  </a:tcPr>
+                </a:tc>
+                <a:extLst>
+                  <a:ext uri="{0D108BD9-81ED-4DB2-BD59-A6C34878D82A}">
+                    <a16:rowId xmlns:a16="http://schemas.microsoft.com/office/drawing/2014/main" val="501143958"/>
+                  </a:ext>
+                </a:extLst>
+              </a:tr>
+              <a:tr h="513081">
+                <a:tc>
+                  <a:txBody>
+                    <a:bodyPr/>
+                    <a:lstStyle/>
+                    <a:p>
+                      <a:pPr>
+                        <a:lnSpc>
+                          <a:spcPct val="107000"/>
+                        </a:lnSpc>
+                        <a:spcAft>
+                          <a:spcPts val="0"/>
+                        </a:spcAft>
+                      </a:pPr>
+                      <a:r>
+                        <a:rPr lang="pt-BR" sz="1800">
+                          <a:solidFill>
+                            <a:schemeClr val="bg1"/>
+                          </a:solidFill>
+                          <a:effectLst/>
+                        </a:rPr>
+                        <a:t>ABS()</a:t>
+                      </a:r>
+                      <a:endParaRPr lang="pt-BR" sz="1800">
+                        <a:solidFill>
+                          <a:schemeClr val="bg1"/>
+                        </a:solidFill>
+                        <a:effectLst/>
+                        <a:latin typeface="Times New Roman" panose="02020603050405020304" pitchFamily="18" charset="0"/>
+                        <a:ea typeface="Times New Roman" panose="02020603050405020304" pitchFamily="18" charset="0"/>
+                        <a:cs typeface="Times New Roman" panose="02020603050405020304" pitchFamily="18" charset="0"/>
+                      </a:endParaRPr>
+                    </a:p>
+                  </a:txBody>
+                  <a:tcPr marL="9525" marR="9525" marT="9525" marB="9525" anchor="ctr">
+                    <a:solidFill>
+                      <a:srgbClr val="F39211"/>
+                    </a:solidFill>
+                  </a:tcPr>
+                </a:tc>
+                <a:tc>
+                  <a:txBody>
+                    <a:bodyPr/>
+                    <a:lstStyle/>
+                    <a:p>
+                      <a:pPr>
+                        <a:lnSpc>
+                          <a:spcPct val="107000"/>
+                        </a:lnSpc>
+                        <a:spcAft>
+                          <a:spcPts val="0"/>
+                        </a:spcAft>
+                      </a:pPr>
+                      <a:r>
+                        <a:rPr lang="pt-BR" sz="1800">
+                          <a:solidFill>
+                            <a:schemeClr val="bg1"/>
+                          </a:solidFill>
+                          <a:effectLst/>
+                        </a:rPr>
+                        <a:t>Valor absoluto (número sem sinal)</a:t>
+                      </a:r>
+                      <a:endParaRPr lang="pt-BR" sz="1800">
+                        <a:solidFill>
+                          <a:schemeClr val="bg1"/>
+                        </a:solidFill>
+                        <a:effectLst/>
+                        <a:latin typeface="Times New Roman" panose="02020603050405020304" pitchFamily="18" charset="0"/>
+                        <a:ea typeface="Times New Roman" panose="02020603050405020304" pitchFamily="18" charset="0"/>
+                        <a:cs typeface="Times New Roman" panose="02020603050405020304" pitchFamily="18" charset="0"/>
+                      </a:endParaRPr>
+                    </a:p>
+                  </a:txBody>
+                  <a:tcPr marL="9525" marR="9525" marT="9525" marB="9525" anchor="ctr">
+                    <a:solidFill>
+                      <a:srgbClr val="F39211"/>
+                    </a:solidFill>
+                  </a:tcPr>
+                </a:tc>
+                <a:tc>
+                  <a:txBody>
+                    <a:bodyPr/>
+                    <a:lstStyle/>
+                    <a:p>
+                      <a:pPr>
+                        <a:lnSpc>
+                          <a:spcPct val="107000"/>
+                        </a:lnSpc>
+                        <a:spcAft>
+                          <a:spcPts val="0"/>
+                        </a:spcAft>
+                      </a:pPr>
+                      <a:r>
+                        <a:rPr lang="pt-BR" sz="1800" dirty="0">
+                          <a:solidFill>
+                            <a:schemeClr val="bg1"/>
+                          </a:solidFill>
+                          <a:effectLst/>
+                        </a:rPr>
+                        <a:t>ABS(-25) → 25</a:t>
+                      </a:r>
+                      <a:endParaRPr lang="pt-BR" sz="1800" dirty="0">
+                        <a:solidFill>
+                          <a:schemeClr val="bg1"/>
+                        </a:solidFill>
+                        <a:effectLst/>
+                        <a:latin typeface="Times New Roman" panose="02020603050405020304" pitchFamily="18" charset="0"/>
+                        <a:ea typeface="Times New Roman" panose="02020603050405020304" pitchFamily="18" charset="0"/>
+                        <a:cs typeface="Times New Roman" panose="02020603050405020304" pitchFamily="18" charset="0"/>
+                      </a:endParaRPr>
+                    </a:p>
+                  </a:txBody>
+                  <a:tcPr marL="9525" marR="9525" marT="9525" marB="9525" anchor="ctr">
+                    <a:solidFill>
+                      <a:srgbClr val="F39211"/>
+                    </a:solidFill>
+                  </a:tcPr>
+                </a:tc>
+                <a:extLst>
+                  <a:ext uri="{0D108BD9-81ED-4DB2-BD59-A6C34878D82A}">
+                    <a16:rowId xmlns:a16="http://schemas.microsoft.com/office/drawing/2014/main" val="3068098523"/>
+                  </a:ext>
+                </a:extLst>
+              </a:tr>
+              <a:tr h="284293">
+                <a:tc>
+                  <a:txBody>
+                    <a:bodyPr/>
+                    <a:lstStyle/>
+                    <a:p>
+                      <a:pPr>
+                        <a:lnSpc>
+                          <a:spcPct val="107000"/>
+                        </a:lnSpc>
+                        <a:spcAft>
+                          <a:spcPts val="0"/>
+                        </a:spcAft>
+                      </a:pPr>
+                      <a:r>
+                        <a:rPr lang="pt-BR" sz="1800">
+                          <a:solidFill>
+                            <a:schemeClr val="bg1"/>
+                          </a:solidFill>
+                          <a:effectLst/>
+                        </a:rPr>
+                        <a:t>POWER(x, y)</a:t>
+                      </a:r>
+                      <a:endParaRPr lang="pt-BR" sz="1800">
+                        <a:solidFill>
+                          <a:schemeClr val="bg1"/>
+                        </a:solidFill>
+                        <a:effectLst/>
+                        <a:latin typeface="Times New Roman" panose="02020603050405020304" pitchFamily="18" charset="0"/>
+                        <a:ea typeface="Times New Roman" panose="02020603050405020304" pitchFamily="18" charset="0"/>
+                        <a:cs typeface="Times New Roman" panose="02020603050405020304" pitchFamily="18" charset="0"/>
+                      </a:endParaRPr>
+                    </a:p>
+                  </a:txBody>
+                  <a:tcPr marL="9525" marR="9525" marT="9525" marB="9525" anchor="ctr">
+                    <a:solidFill>
+                      <a:srgbClr val="F39211"/>
+                    </a:solidFill>
+                  </a:tcPr>
+                </a:tc>
+                <a:tc>
+                  <a:txBody>
+                    <a:bodyPr/>
+                    <a:lstStyle/>
+                    <a:p>
+                      <a:pPr>
+                        <a:lnSpc>
+                          <a:spcPct val="107000"/>
+                        </a:lnSpc>
+                        <a:spcAft>
+                          <a:spcPts val="0"/>
+                        </a:spcAft>
+                      </a:pPr>
+                      <a:r>
+                        <a:rPr lang="pt-BR" sz="1800">
+                          <a:solidFill>
+                            <a:schemeClr val="bg1"/>
+                          </a:solidFill>
+                          <a:effectLst/>
+                        </a:rPr>
+                        <a:t>Potência: x elevado à y</a:t>
+                      </a:r>
+                      <a:endParaRPr lang="pt-BR" sz="1800">
+                        <a:solidFill>
+                          <a:schemeClr val="bg1"/>
+                        </a:solidFill>
+                        <a:effectLst/>
+                        <a:latin typeface="Times New Roman" panose="02020603050405020304" pitchFamily="18" charset="0"/>
+                        <a:ea typeface="Times New Roman" panose="02020603050405020304" pitchFamily="18" charset="0"/>
+                        <a:cs typeface="Times New Roman" panose="02020603050405020304" pitchFamily="18" charset="0"/>
+                      </a:endParaRPr>
+                    </a:p>
+                  </a:txBody>
+                  <a:tcPr marL="9525" marR="9525" marT="9525" marB="9525" anchor="ctr">
+                    <a:solidFill>
+                      <a:srgbClr val="F39211"/>
+                    </a:solidFill>
+                  </a:tcPr>
+                </a:tc>
+                <a:tc>
+                  <a:txBody>
+                    <a:bodyPr/>
+                    <a:lstStyle/>
+                    <a:p>
+                      <a:pPr>
+                        <a:lnSpc>
+                          <a:spcPct val="107000"/>
+                        </a:lnSpc>
+                        <a:spcAft>
+                          <a:spcPts val="0"/>
+                        </a:spcAft>
+                      </a:pPr>
+                      <a:r>
+                        <a:rPr lang="pt-BR" sz="1800" dirty="0">
+                          <a:solidFill>
+                            <a:schemeClr val="bg1"/>
+                          </a:solidFill>
+                          <a:effectLst/>
+                        </a:rPr>
+                        <a:t>POWER(2, 3) → 8</a:t>
+                      </a:r>
+                      <a:endParaRPr lang="pt-BR" sz="1800" dirty="0">
+                        <a:solidFill>
+                          <a:schemeClr val="bg1"/>
+                        </a:solidFill>
+                        <a:effectLst/>
+                        <a:latin typeface="Times New Roman" panose="02020603050405020304" pitchFamily="18" charset="0"/>
+                        <a:ea typeface="Times New Roman" panose="02020603050405020304" pitchFamily="18" charset="0"/>
+                        <a:cs typeface="Times New Roman" panose="02020603050405020304" pitchFamily="18" charset="0"/>
+                      </a:endParaRPr>
+                    </a:p>
+                  </a:txBody>
+                  <a:tcPr marL="9525" marR="9525" marT="9525" marB="9525" anchor="ctr">
+                    <a:solidFill>
+                      <a:srgbClr val="F39211"/>
+                    </a:solidFill>
+                  </a:tcPr>
+                </a:tc>
+                <a:extLst>
+                  <a:ext uri="{0D108BD9-81ED-4DB2-BD59-A6C34878D82A}">
+                    <a16:rowId xmlns:a16="http://schemas.microsoft.com/office/drawing/2014/main" val="3199431258"/>
+                  </a:ext>
+                </a:extLst>
+              </a:tr>
+              <a:tr h="284293">
+                <a:tc>
+                  <a:txBody>
+                    <a:bodyPr/>
+                    <a:lstStyle/>
+                    <a:p>
+                      <a:pPr>
+                        <a:lnSpc>
+                          <a:spcPct val="107000"/>
+                        </a:lnSpc>
+                        <a:spcAft>
+                          <a:spcPts val="0"/>
+                        </a:spcAft>
+                      </a:pPr>
+                      <a:r>
+                        <a:rPr lang="pt-BR" sz="1800">
+                          <a:solidFill>
+                            <a:schemeClr val="bg1"/>
+                          </a:solidFill>
+                          <a:effectLst/>
+                        </a:rPr>
+                        <a:t>SQRT()</a:t>
+                      </a:r>
+                      <a:endParaRPr lang="pt-BR" sz="1800">
+                        <a:solidFill>
+                          <a:schemeClr val="bg1"/>
+                        </a:solidFill>
+                        <a:effectLst/>
+                        <a:latin typeface="Times New Roman" panose="02020603050405020304" pitchFamily="18" charset="0"/>
+                        <a:ea typeface="Times New Roman" panose="02020603050405020304" pitchFamily="18" charset="0"/>
+                        <a:cs typeface="Times New Roman" panose="02020603050405020304" pitchFamily="18" charset="0"/>
+                      </a:endParaRPr>
+                    </a:p>
+                  </a:txBody>
+                  <a:tcPr marL="9525" marR="9525" marT="9525" marB="9525" anchor="ctr">
+                    <a:solidFill>
+                      <a:srgbClr val="F39211"/>
+                    </a:solidFill>
+                  </a:tcPr>
+                </a:tc>
+                <a:tc>
+                  <a:txBody>
+                    <a:bodyPr/>
+                    <a:lstStyle/>
+                    <a:p>
+                      <a:pPr>
+                        <a:lnSpc>
+                          <a:spcPct val="107000"/>
+                        </a:lnSpc>
+                        <a:spcAft>
+                          <a:spcPts val="0"/>
+                        </a:spcAft>
+                      </a:pPr>
+                      <a:r>
+                        <a:rPr lang="pt-BR" sz="1800">
+                          <a:solidFill>
+                            <a:schemeClr val="bg1"/>
+                          </a:solidFill>
+                          <a:effectLst/>
+                        </a:rPr>
+                        <a:t>Raiz quadrada</a:t>
+                      </a:r>
+                      <a:endParaRPr lang="pt-BR" sz="1800">
+                        <a:solidFill>
+                          <a:schemeClr val="bg1"/>
+                        </a:solidFill>
+                        <a:effectLst/>
+                        <a:latin typeface="Times New Roman" panose="02020603050405020304" pitchFamily="18" charset="0"/>
+                        <a:ea typeface="Times New Roman" panose="02020603050405020304" pitchFamily="18" charset="0"/>
+                        <a:cs typeface="Times New Roman" panose="02020603050405020304" pitchFamily="18" charset="0"/>
+                      </a:endParaRPr>
+                    </a:p>
+                  </a:txBody>
+                  <a:tcPr marL="9525" marR="9525" marT="9525" marB="9525" anchor="ctr">
+                    <a:solidFill>
+                      <a:srgbClr val="F39211"/>
+                    </a:solidFill>
+                  </a:tcPr>
+                </a:tc>
+                <a:tc>
+                  <a:txBody>
+                    <a:bodyPr/>
+                    <a:lstStyle/>
+                    <a:p>
+                      <a:pPr>
+                        <a:lnSpc>
+                          <a:spcPct val="107000"/>
+                        </a:lnSpc>
+                        <a:spcAft>
+                          <a:spcPts val="0"/>
+                        </a:spcAft>
+                      </a:pPr>
+                      <a:r>
+                        <a:rPr lang="pt-BR" sz="1800">
+                          <a:solidFill>
+                            <a:schemeClr val="bg1"/>
+                          </a:solidFill>
+                          <a:effectLst/>
+                        </a:rPr>
+                        <a:t>SQRT(16) → 4</a:t>
+                      </a:r>
+                      <a:endParaRPr lang="pt-BR" sz="1800">
+                        <a:solidFill>
+                          <a:schemeClr val="bg1"/>
+                        </a:solidFill>
+                        <a:effectLst/>
+                        <a:latin typeface="Times New Roman" panose="02020603050405020304" pitchFamily="18" charset="0"/>
+                        <a:ea typeface="Times New Roman" panose="02020603050405020304" pitchFamily="18" charset="0"/>
+                        <a:cs typeface="Times New Roman" panose="02020603050405020304" pitchFamily="18" charset="0"/>
+                      </a:endParaRPr>
+                    </a:p>
+                  </a:txBody>
+                  <a:tcPr marL="9525" marR="9525" marT="9525" marB="9525" anchor="ctr">
+                    <a:solidFill>
+                      <a:srgbClr val="F39211"/>
+                    </a:solidFill>
+                  </a:tcPr>
+                </a:tc>
+                <a:extLst>
+                  <a:ext uri="{0D108BD9-81ED-4DB2-BD59-A6C34878D82A}">
+                    <a16:rowId xmlns:a16="http://schemas.microsoft.com/office/drawing/2014/main" val="813807620"/>
+                  </a:ext>
+                </a:extLst>
+              </a:tr>
+              <a:tr h="284293">
+                <a:tc>
+                  <a:txBody>
+                    <a:bodyPr/>
+                    <a:lstStyle/>
+                    <a:p>
+                      <a:pPr>
+                        <a:lnSpc>
+                          <a:spcPct val="107000"/>
+                        </a:lnSpc>
+                        <a:spcAft>
+                          <a:spcPts val="0"/>
+                        </a:spcAft>
+                      </a:pPr>
+                      <a:r>
+                        <a:rPr lang="pt-BR" sz="1800">
+                          <a:solidFill>
+                            <a:schemeClr val="bg1"/>
+                          </a:solidFill>
+                          <a:effectLst/>
+                        </a:rPr>
+                        <a:t>MOD()</a:t>
+                      </a:r>
+                      <a:endParaRPr lang="pt-BR" sz="1800">
+                        <a:solidFill>
+                          <a:schemeClr val="bg1"/>
+                        </a:solidFill>
+                        <a:effectLst/>
+                        <a:latin typeface="Times New Roman" panose="02020603050405020304" pitchFamily="18" charset="0"/>
+                        <a:ea typeface="Times New Roman" panose="02020603050405020304" pitchFamily="18" charset="0"/>
+                        <a:cs typeface="Times New Roman" panose="02020603050405020304" pitchFamily="18" charset="0"/>
+                      </a:endParaRPr>
+                    </a:p>
+                  </a:txBody>
+                  <a:tcPr marL="9525" marR="9525" marT="9525" marB="9525" anchor="ctr">
+                    <a:solidFill>
+                      <a:srgbClr val="F39211"/>
+                    </a:solidFill>
+                  </a:tcPr>
+                </a:tc>
+                <a:tc>
+                  <a:txBody>
+                    <a:bodyPr/>
+                    <a:lstStyle/>
+                    <a:p>
+                      <a:pPr>
+                        <a:lnSpc>
+                          <a:spcPct val="107000"/>
+                        </a:lnSpc>
+                        <a:spcAft>
+                          <a:spcPts val="0"/>
+                        </a:spcAft>
+                      </a:pPr>
+                      <a:r>
+                        <a:rPr lang="pt-BR" sz="1800">
+                          <a:solidFill>
+                            <a:schemeClr val="bg1"/>
+                          </a:solidFill>
+                          <a:effectLst/>
+                        </a:rPr>
+                        <a:t>Resto da divisão (igual a %)</a:t>
+                      </a:r>
+                      <a:endParaRPr lang="pt-BR" sz="1800">
+                        <a:solidFill>
+                          <a:schemeClr val="bg1"/>
+                        </a:solidFill>
+                        <a:effectLst/>
+                        <a:latin typeface="Times New Roman" panose="02020603050405020304" pitchFamily="18" charset="0"/>
+                        <a:ea typeface="Times New Roman" panose="02020603050405020304" pitchFamily="18" charset="0"/>
+                        <a:cs typeface="Times New Roman" panose="02020603050405020304" pitchFamily="18" charset="0"/>
+                      </a:endParaRPr>
+                    </a:p>
+                  </a:txBody>
+                  <a:tcPr marL="9525" marR="9525" marT="9525" marB="9525" anchor="ctr">
+                    <a:solidFill>
+                      <a:srgbClr val="F39211"/>
+                    </a:solidFill>
+                  </a:tcPr>
+                </a:tc>
+                <a:tc>
+                  <a:txBody>
+                    <a:bodyPr/>
+                    <a:lstStyle/>
+                    <a:p>
+                      <a:pPr>
+                        <a:lnSpc>
+                          <a:spcPct val="107000"/>
+                        </a:lnSpc>
+                        <a:spcAft>
+                          <a:spcPts val="0"/>
+                        </a:spcAft>
+                      </a:pPr>
+                      <a:r>
+                        <a:rPr lang="pt-BR" sz="1800">
+                          <a:solidFill>
+                            <a:schemeClr val="bg1"/>
+                          </a:solidFill>
+                          <a:effectLst/>
+                        </a:rPr>
+                        <a:t>MOD(10, 3) → 1</a:t>
+                      </a:r>
+                      <a:endParaRPr lang="pt-BR" sz="1800">
+                        <a:solidFill>
+                          <a:schemeClr val="bg1"/>
+                        </a:solidFill>
+                        <a:effectLst/>
+                        <a:latin typeface="Times New Roman" panose="02020603050405020304" pitchFamily="18" charset="0"/>
+                        <a:ea typeface="Times New Roman" panose="02020603050405020304" pitchFamily="18" charset="0"/>
+                        <a:cs typeface="Times New Roman" panose="02020603050405020304" pitchFamily="18" charset="0"/>
+                      </a:endParaRPr>
+                    </a:p>
+                  </a:txBody>
+                  <a:tcPr marL="9525" marR="9525" marT="9525" marB="9525" anchor="ctr">
+                    <a:solidFill>
+                      <a:srgbClr val="F39211"/>
+                    </a:solidFill>
+                  </a:tcPr>
+                </a:tc>
+                <a:extLst>
+                  <a:ext uri="{0D108BD9-81ED-4DB2-BD59-A6C34878D82A}">
+                    <a16:rowId xmlns:a16="http://schemas.microsoft.com/office/drawing/2014/main" val="2161202338"/>
+                  </a:ext>
+                </a:extLst>
+              </a:tr>
+              <a:tr h="513081">
+                <a:tc>
+                  <a:txBody>
+                    <a:bodyPr/>
+                    <a:lstStyle/>
+                    <a:p>
+                      <a:pPr>
+                        <a:lnSpc>
+                          <a:spcPct val="107000"/>
+                        </a:lnSpc>
+                        <a:spcAft>
+                          <a:spcPts val="0"/>
+                        </a:spcAft>
+                      </a:pPr>
+                      <a:r>
+                        <a:rPr lang="pt-BR" sz="1800">
+                          <a:solidFill>
+                            <a:schemeClr val="bg1"/>
+                          </a:solidFill>
+                          <a:effectLst/>
+                        </a:rPr>
+                        <a:t>TRUNCATE(x, d)</a:t>
+                      </a:r>
+                      <a:endParaRPr lang="pt-BR" sz="1800">
+                        <a:solidFill>
+                          <a:schemeClr val="bg1"/>
+                        </a:solidFill>
+                        <a:effectLst/>
+                        <a:latin typeface="Times New Roman" panose="02020603050405020304" pitchFamily="18" charset="0"/>
+                        <a:ea typeface="Times New Roman" panose="02020603050405020304" pitchFamily="18" charset="0"/>
+                        <a:cs typeface="Times New Roman" panose="02020603050405020304" pitchFamily="18" charset="0"/>
+                      </a:endParaRPr>
+                    </a:p>
+                  </a:txBody>
+                  <a:tcPr marL="9525" marR="9525" marT="9525" marB="9525" anchor="ctr">
+                    <a:solidFill>
+                      <a:srgbClr val="F39211"/>
+                    </a:solidFill>
+                  </a:tcPr>
+                </a:tc>
+                <a:tc>
+                  <a:txBody>
+                    <a:bodyPr/>
+                    <a:lstStyle/>
+                    <a:p>
+                      <a:pPr>
+                        <a:lnSpc>
+                          <a:spcPct val="107000"/>
+                        </a:lnSpc>
+                        <a:spcAft>
+                          <a:spcPts val="0"/>
+                        </a:spcAft>
+                      </a:pPr>
+                      <a:r>
+                        <a:rPr lang="pt-BR" sz="1800" dirty="0">
+                          <a:solidFill>
+                            <a:schemeClr val="bg1"/>
+                          </a:solidFill>
+                          <a:effectLst/>
+                        </a:rPr>
+                        <a:t>Corta o número para d casas decimais</a:t>
+                      </a:r>
+                      <a:endParaRPr lang="pt-BR" sz="1800" dirty="0">
+                        <a:solidFill>
+                          <a:schemeClr val="bg1"/>
+                        </a:solidFill>
+                        <a:effectLst/>
+                        <a:latin typeface="Times New Roman" panose="02020603050405020304" pitchFamily="18" charset="0"/>
+                        <a:ea typeface="Times New Roman" panose="02020603050405020304" pitchFamily="18" charset="0"/>
+                        <a:cs typeface="Times New Roman" panose="02020603050405020304" pitchFamily="18" charset="0"/>
+                      </a:endParaRPr>
+                    </a:p>
+                  </a:txBody>
+                  <a:tcPr marL="9525" marR="9525" marT="9525" marB="9525" anchor="ctr">
+                    <a:solidFill>
+                      <a:srgbClr val="F39211"/>
+                    </a:solidFill>
+                  </a:tcPr>
+                </a:tc>
+                <a:tc>
+                  <a:txBody>
+                    <a:bodyPr/>
+                    <a:lstStyle/>
+                    <a:p>
+                      <a:pPr>
+                        <a:lnSpc>
+                          <a:spcPct val="107000"/>
+                        </a:lnSpc>
+                        <a:spcAft>
+                          <a:spcPts val="0"/>
+                        </a:spcAft>
+                      </a:pPr>
+                      <a:r>
+                        <a:rPr lang="pt-BR" sz="1800" dirty="0">
+                          <a:solidFill>
+                            <a:schemeClr val="bg1"/>
+                          </a:solidFill>
+                          <a:effectLst/>
+                        </a:rPr>
+                        <a:t>TRUNCATE(10.5678, 2) → 10.56</a:t>
+                      </a:r>
+                      <a:endParaRPr lang="pt-BR" sz="1800" dirty="0">
+                        <a:solidFill>
+                          <a:schemeClr val="bg1"/>
+                        </a:solidFill>
+                        <a:effectLst/>
+                        <a:latin typeface="Times New Roman" panose="02020603050405020304" pitchFamily="18" charset="0"/>
+                        <a:ea typeface="Times New Roman" panose="02020603050405020304" pitchFamily="18" charset="0"/>
+                        <a:cs typeface="Times New Roman" panose="02020603050405020304" pitchFamily="18" charset="0"/>
+                      </a:endParaRPr>
+                    </a:p>
+                  </a:txBody>
+                  <a:tcPr marL="9525" marR="9525" marT="9525" marB="9525" anchor="ctr">
+                    <a:solidFill>
+                      <a:srgbClr val="F39211"/>
+                    </a:solidFill>
+                  </a:tcPr>
+                </a:tc>
+                <a:extLst>
+                  <a:ext uri="{0D108BD9-81ED-4DB2-BD59-A6C34878D82A}">
+                    <a16:rowId xmlns:a16="http://schemas.microsoft.com/office/drawing/2014/main" val="2449664281"/>
+                  </a:ext>
+                </a:extLst>
+              </a:tr>
+            </a:tbl>
+          </a:graphicData>
+        </a:graphic>
+      </p:graphicFrame>
+      <p:sp>
+        <p:nvSpPr>
+          <p:cNvPr id="11" name="Rectangle 3">
+            <a:extLst>
+              <a:ext uri="{FF2B5EF4-FFF2-40B4-BE49-F238E27FC236}">
+                <a16:creationId xmlns:a16="http://schemas.microsoft.com/office/drawing/2014/main" id="{D9BCA995-0712-42F0-9296-D234A6F24670}"/>
+              </a:ext>
+            </a:extLst>
+          </p:cNvPr>
+          <p:cNvSpPr>
+            <a:spLocks noChangeArrowheads="1"/>
+          </p:cNvSpPr>
+          <p:nvPr/>
+        </p:nvSpPr>
+        <p:spPr bwMode="auto">
+          <a:xfrm>
+            <a:off x="338845" y="3771149"/>
+            <a:ext cx="12192000" cy="457200"/>
+          </a:xfrm>
+          <a:prstGeom prst="rect">
+            <a:avLst/>
+          </a:prstGeom>
+          <a:noFill/>
+          <a:ln>
+            <a:noFill/>
+          </a:ln>
+          <a:effectLst/>
+          <a:extLst>
+            <a:ext uri="{909E8E84-426E-40DD-AFC4-6F175D3DCCD1}">
+              <a14:hiddenFill xmlns:a14="http://schemas.microsoft.com/office/drawing/2010/main">
+                <a:solidFill>
+                  <a:schemeClr val="accent1"/>
+                </a:solidFill>
+              </a14:hiddenFill>
+            </a:ext>
+            <a:ext uri="{91240B29-F687-4F45-9708-019B960494DF}">
+              <a14:hiddenLine xmlns:a14="http://schemas.microsoft.com/office/drawing/2010/main" w="9525">
+                <a:solidFill>
+                  <a:schemeClr val="tx1"/>
+                </a:solidFill>
+                <a:miter lim="800000"/>
+                <a:headEnd/>
+                <a:tailEnd/>
+              </a14:hiddenLine>
+            </a:ext>
+            <a:ext uri="{AF507438-7753-43E0-B8FC-AC1667EBCBE1}">
+              <a14:hiddenEffects xmlns:a14="http://schemas.microsoft.com/office/drawing/2010/main">
+                <a:effectLst>
+                  <a:outerShdw dist="35921" dir="2700000" algn="ctr" rotWithShape="0">
+                    <a:schemeClr val="bg2"/>
+                  </a:outerShdw>
+                </a:effectLst>
+              </a14:hiddenEffects>
+            </a:ext>
+          </a:extLst>
+        </p:spPr>
+        <p:txBody>
+          <a:bodyPr vert="horz" wrap="none" lIns="91440" tIns="45720" rIns="91440" bIns="45720" numCol="1" anchor="ctr" anchorCtr="0" compatLnSpc="1">
+            <a:prstTxWarp prst="textNoShape">
+              <a:avLst/>
+            </a:prstTxWarp>
+            <a:spAutoFit/>
+          </a:bodyPr>
+          <a:lstStyle/>
+          <a:p>
+            <a:pPr marL="0" marR="0" lvl="0" indent="0" algn="l" defTabSz="914400" rtl="0" eaLnBrk="0" fontAlgn="base" latinLnBrk="0" hangingPunct="0">
+              <a:lnSpc>
+                <a:spcPct val="100000"/>
+              </a:lnSpc>
+              <a:spcBef>
+                <a:spcPct val="0"/>
+              </a:spcBef>
+              <a:spcAft>
+                <a:spcPct val="0"/>
+              </a:spcAft>
+              <a:buClrTx/>
+              <a:buSzTx/>
+              <a:buFontTx/>
+              <a:buNone/>
+              <a:tabLst/>
+            </a:pPr>
+            <a:br>
+              <a:rPr kumimoji="0" lang="pt-BR" altLang="pt-BR" sz="1200" b="0" i="0" u="none" strike="noStrike" cap="none" normalizeH="0" baseline="0">
+                <a:ln>
+                  <a:noFill/>
+                </a:ln>
+                <a:solidFill>
+                  <a:schemeClr val="tx1"/>
+                </a:solidFill>
+                <a:effectLst/>
+                <a:latin typeface="Arial" panose="020B0604020202020204" pitchFamily="34" charset="0"/>
+                <a:ea typeface="Times New Roman" panose="02020603050405020304" pitchFamily="18" charset="0"/>
+              </a:rPr>
+            </a:br>
+            <a:br>
+              <a:rPr kumimoji="0" lang="pt-BR" altLang="pt-BR" sz="1200" b="0" i="0" u="none" strike="noStrike" cap="none" normalizeH="0" baseline="0">
+                <a:ln>
+                  <a:noFill/>
+                </a:ln>
+                <a:solidFill>
+                  <a:schemeClr val="tx1"/>
+                </a:solidFill>
+                <a:effectLst/>
+                <a:latin typeface="Arial" panose="020B0604020202020204" pitchFamily="34" charset="0"/>
+                <a:ea typeface="Times New Roman" panose="02020603050405020304" pitchFamily="18" charset="0"/>
+              </a:rPr>
+            </a:br>
+            <a:endParaRPr kumimoji="0" lang="pt-BR" altLang="pt-BR" sz="1800" b="0" i="0" u="none" strike="noStrike" cap="none" normalizeH="0" baseline="0">
+              <a:ln>
+                <a:noFill/>
+              </a:ln>
+              <a:solidFill>
+                <a:schemeClr val="tx1"/>
+              </a:solidFill>
+              <a:effectLst/>
+              <a:latin typeface="Arial" panose="020B0604020202020204" pitchFamily="34" charset="0"/>
+            </a:endParaRPr>
+          </a:p>
+        </p:txBody>
+      </p:sp>
+    </p:spTree>
+    <p:extLst>
+      <p:ext uri="{BB962C8B-B14F-4D97-AF65-F5344CB8AC3E}">
+        <p14:creationId xmlns:p14="http://schemas.microsoft.com/office/powerpoint/2010/main" val="612455304"/>
+      </p:ext>
+    </p:extLst>
+  </p:cSld>
+  <p:clrMapOvr>
+    <a:masterClrMapping/>
+  </p:clrMapOvr>
+</p:sld>
+</file>
+
+<file path=ppt/slides/slide16.xml><?xml version="1.0" encoding="utf-8"?>
+<p:sld xmlns:a="http://schemas.openxmlformats.org/drawingml/2006/main" xmlns:r="http://schemas.openxmlformats.org/officeDocument/2006/relationships" xmlns:p="http://schemas.openxmlformats.org/presentationml/2006/main">
+  <p:cSld>
+    <p:spTree>
+      <p:nvGrpSpPr>
+        <p:cNvPr id="1" name=""/>
+        <p:cNvGrpSpPr/>
+        <p:nvPr/>
+      </p:nvGrpSpPr>
+      <p:grpSpPr>
+        <a:xfrm>
+          <a:off x="0" y="0"/>
+          <a:ext cx="0" cy="0"/>
+          <a:chOff x="0" y="0"/>
+          <a:chExt cx="0" cy="0"/>
+        </a:xfrm>
+      </p:grpSpPr>
+      <p:sp>
+        <p:nvSpPr>
+          <p:cNvPr id="2" name="Título 1">
+            <a:extLst>
+              <a:ext uri="{FF2B5EF4-FFF2-40B4-BE49-F238E27FC236}">
+                <a16:creationId xmlns:a16="http://schemas.microsoft.com/office/drawing/2014/main" id="{E1BF4364-A6CD-4460-A48D-6779B48ADDBE}"/>
+              </a:ext>
+            </a:extLst>
+          </p:cNvPr>
+          <p:cNvSpPr>
+            <a:spLocks noGrp="1"/>
+          </p:cNvSpPr>
+          <p:nvPr>
+            <p:ph type="title"/>
+          </p:nvPr>
+        </p:nvSpPr>
+        <p:spPr>
+          <a:xfrm>
+            <a:off x="338845" y="158493"/>
+            <a:ext cx="10954797" cy="1533440"/>
+          </a:xfrm>
+        </p:spPr>
+        <p:txBody>
+          <a:bodyPr>
+            <a:noAutofit/>
+          </a:bodyPr>
+          <a:lstStyle/>
+          <a:p>
+            <a:r>
+              <a:rPr lang="pt-BR" sz="3300" b="1" dirty="0">
+                <a:solidFill>
+                  <a:srgbClr val="00758F"/>
+                </a:solidFill>
+              </a:rPr>
+              <a:t>Consultas com Funções: </a:t>
+            </a:r>
+            <a:br>
+              <a:rPr lang="pt-BR" sz="3300" b="1" dirty="0">
+                <a:solidFill>
+                  <a:srgbClr val="00758F"/>
+                </a:solidFill>
+              </a:rPr>
+            </a:br>
+            <a:r>
+              <a:rPr lang="pt-BR" sz="3300" b="1" dirty="0">
+                <a:solidFill>
+                  <a:srgbClr val="F39211"/>
+                </a:solidFill>
+              </a:rPr>
+              <a:t>1.2 Funções de Cálculo e Operadores Aritméticos no MySQL (Exemplos)</a:t>
+            </a:r>
+            <a:endParaRPr lang="pt-BR" sz="3300" dirty="0">
+              <a:solidFill>
+                <a:srgbClr val="F39211"/>
+              </a:solidFill>
+            </a:endParaRPr>
+          </a:p>
+        </p:txBody>
+      </p:sp>
+      <p:pic>
+        <p:nvPicPr>
+          <p:cNvPr id="4" name="Picture 6" descr="https://www.mysql.com/common/logos/logo-mysql-170x115.png">
+            <a:extLst>
+              <a:ext uri="{FF2B5EF4-FFF2-40B4-BE49-F238E27FC236}">
+                <a16:creationId xmlns:a16="http://schemas.microsoft.com/office/drawing/2014/main" id="{441DFD02-E8A2-4690-9CD7-1CC407F2024E}"/>
+              </a:ext>
+            </a:extLst>
+          </p:cNvPr>
+          <p:cNvPicPr>
+            <a:picLocks noChangeAspect="1" noChangeArrowheads="1"/>
+          </p:cNvPicPr>
+          <p:nvPr/>
+        </p:nvPicPr>
+        <p:blipFill>
+          <a:blip r:embed="rId2">
+            <a:extLst>
+              <a:ext uri="{28A0092B-C50C-407E-A947-70E740481C1C}">
+                <a14:useLocalDpi xmlns:a14="http://schemas.microsoft.com/office/drawing/2010/main" val="0"/>
+              </a:ext>
+            </a:extLst>
+          </a:blip>
+          <a:srcRect/>
+          <a:stretch>
+            <a:fillRect/>
+          </a:stretch>
+        </p:blipFill>
+        <p:spPr bwMode="auto">
+          <a:xfrm>
+            <a:off x="9774793" y="5753675"/>
+            <a:ext cx="1385775" cy="936973"/>
+          </a:xfrm>
+          <a:prstGeom prst="rect">
+            <a:avLst/>
+          </a:prstGeom>
+          <a:noFill/>
+          <a:extLst>
+            <a:ext uri="{909E8E84-426E-40DD-AFC4-6F175D3DCCD1}">
+              <a14:hiddenFill xmlns:a14="http://schemas.microsoft.com/office/drawing/2010/main">
+                <a:solidFill>
+                  <a:srgbClr val="FFFFFF"/>
+                </a:solidFill>
+              </a14:hiddenFill>
+            </a:ext>
+          </a:extLst>
+        </p:spPr>
+      </p:pic>
+      <p:sp>
+        <p:nvSpPr>
+          <p:cNvPr id="6" name="CaixaDeTexto 5">
+            <a:extLst>
+              <a:ext uri="{FF2B5EF4-FFF2-40B4-BE49-F238E27FC236}">
+                <a16:creationId xmlns:a16="http://schemas.microsoft.com/office/drawing/2014/main" id="{AF06CEA4-1D6A-4FB2-B738-A9362ADA1CCA}"/>
+              </a:ext>
+            </a:extLst>
+          </p:cNvPr>
+          <p:cNvSpPr txBox="1"/>
+          <p:nvPr/>
+        </p:nvSpPr>
+        <p:spPr>
+          <a:xfrm>
+            <a:off x="338845" y="1873858"/>
+            <a:ext cx="10088523" cy="4708981"/>
+          </a:xfrm>
+          <a:prstGeom prst="rect">
+            <a:avLst/>
+          </a:prstGeom>
+          <a:noFill/>
+        </p:spPr>
+        <p:txBody>
+          <a:bodyPr wrap="square" rtlCol="0">
+            <a:spAutoFit/>
+          </a:bodyPr>
+          <a:lstStyle/>
+          <a:p>
+            <a:r>
+              <a:rPr lang="pt-BR" sz="2000" dirty="0"/>
+              <a:t>1 - </a:t>
+            </a:r>
+            <a:r>
+              <a:rPr lang="pt-BR" sz="2000" b="1" dirty="0"/>
+              <a:t>Exemplo: </a:t>
+            </a:r>
+            <a:r>
+              <a:rPr lang="pt-BR" sz="2000" dirty="0"/>
+              <a:t>Calcular o valor total de cada item de venda (preço x quantidade):</a:t>
+            </a:r>
+            <a:br>
+              <a:rPr lang="pt-BR" sz="2000" dirty="0"/>
+            </a:br>
+            <a:r>
+              <a:rPr lang="pt-BR" sz="2000" dirty="0"/>
+              <a:t>Multiplica a quantidade vendida pelo preço unitário para obter o total de cada item da venda.</a:t>
+            </a:r>
+          </a:p>
+          <a:p>
+            <a:br>
+              <a:rPr lang="pt-BR" sz="2000" dirty="0"/>
+            </a:br>
+            <a:r>
+              <a:rPr lang="pt-BR" sz="2000" b="1" dirty="0">
+                <a:solidFill>
+                  <a:srgbClr val="0000FF"/>
+                </a:solidFill>
+              </a:rPr>
+              <a:t>SELECT</a:t>
+            </a:r>
+            <a:r>
+              <a:rPr lang="pt-BR" sz="2000" dirty="0"/>
+              <a:t> </a:t>
+            </a:r>
+            <a:r>
+              <a:rPr lang="pt-BR" sz="2000" dirty="0" err="1">
+                <a:solidFill>
+                  <a:schemeClr val="bg1">
+                    <a:lumMod val="50000"/>
+                  </a:schemeClr>
+                </a:solidFill>
+              </a:rPr>
+              <a:t>id_venda</a:t>
+            </a:r>
+            <a:r>
+              <a:rPr lang="pt-BR" sz="2000" b="1" dirty="0"/>
+              <a:t>,</a:t>
+            </a:r>
+            <a:r>
+              <a:rPr lang="pt-BR" sz="2000" dirty="0"/>
+              <a:t> </a:t>
+            </a:r>
+            <a:r>
+              <a:rPr lang="pt-BR" sz="2000" dirty="0" err="1">
+                <a:solidFill>
+                  <a:schemeClr val="bg1">
+                    <a:lumMod val="50000"/>
+                  </a:schemeClr>
+                </a:solidFill>
+              </a:rPr>
+              <a:t>id_produto</a:t>
+            </a:r>
+            <a:r>
+              <a:rPr lang="pt-BR" sz="2000" b="1" dirty="0"/>
+              <a:t>,</a:t>
+            </a:r>
+            <a:endParaRPr lang="pt-BR" sz="2000" dirty="0"/>
+          </a:p>
+          <a:p>
+            <a:r>
+              <a:rPr lang="pt-BR" sz="2000" dirty="0"/>
+              <a:t>       </a:t>
+            </a:r>
+            <a:r>
+              <a:rPr lang="pt-BR" sz="2000" dirty="0">
+                <a:solidFill>
+                  <a:schemeClr val="bg1">
+                    <a:lumMod val="50000"/>
+                  </a:schemeClr>
+                </a:solidFill>
+              </a:rPr>
+              <a:t>quantidade</a:t>
+            </a:r>
+            <a:r>
+              <a:rPr lang="pt-BR" sz="2000" dirty="0"/>
+              <a:t> </a:t>
+            </a:r>
+            <a:r>
+              <a:rPr lang="pt-BR" sz="2000" b="1" dirty="0">
+                <a:solidFill>
+                  <a:schemeClr val="bg1">
+                    <a:lumMod val="50000"/>
+                  </a:schemeClr>
+                </a:solidFill>
+              </a:rPr>
+              <a:t>*</a:t>
+            </a:r>
+            <a:r>
+              <a:rPr lang="pt-BR" sz="2000" dirty="0">
+                <a:solidFill>
+                  <a:schemeClr val="bg1">
+                    <a:lumMod val="50000"/>
+                  </a:schemeClr>
+                </a:solidFill>
+              </a:rPr>
+              <a:t> </a:t>
+            </a:r>
+            <a:r>
+              <a:rPr lang="pt-BR" sz="2000" dirty="0" err="1">
+                <a:solidFill>
+                  <a:schemeClr val="bg1">
+                    <a:lumMod val="50000"/>
+                  </a:schemeClr>
+                </a:solidFill>
+              </a:rPr>
+              <a:t>preco_unitario</a:t>
+            </a:r>
+            <a:r>
+              <a:rPr lang="pt-BR" sz="2000" dirty="0">
+                <a:solidFill>
+                  <a:schemeClr val="bg1">
+                    <a:lumMod val="50000"/>
+                  </a:schemeClr>
+                </a:solidFill>
+              </a:rPr>
+              <a:t> </a:t>
+            </a:r>
+            <a:r>
+              <a:rPr lang="pt-BR" sz="2000" b="1" dirty="0">
+                <a:solidFill>
+                  <a:srgbClr val="0000FF"/>
+                </a:solidFill>
+              </a:rPr>
+              <a:t>AS</a:t>
+            </a:r>
+            <a:r>
+              <a:rPr lang="pt-BR" sz="2000" dirty="0"/>
+              <a:t> </a:t>
+            </a:r>
+            <a:r>
+              <a:rPr lang="pt-BR" sz="2000" dirty="0" err="1">
+                <a:solidFill>
+                  <a:schemeClr val="bg1">
+                    <a:lumMod val="50000"/>
+                  </a:schemeClr>
+                </a:solidFill>
+              </a:rPr>
+              <a:t>total_item</a:t>
+            </a:r>
+            <a:endParaRPr lang="pt-BR" sz="2000" dirty="0">
+              <a:solidFill>
+                <a:schemeClr val="bg1">
+                  <a:lumMod val="50000"/>
+                </a:schemeClr>
+              </a:solidFill>
+            </a:endParaRPr>
+          </a:p>
+          <a:p>
+            <a:r>
+              <a:rPr lang="pt-BR" sz="2000" b="1" dirty="0">
+                <a:solidFill>
+                  <a:srgbClr val="0000FF"/>
+                </a:solidFill>
+              </a:rPr>
+              <a:t>FROM</a:t>
+            </a:r>
+            <a:r>
+              <a:rPr lang="pt-BR" sz="2000" dirty="0"/>
+              <a:t> </a:t>
+            </a:r>
+            <a:r>
+              <a:rPr lang="pt-BR" sz="2000" dirty="0" err="1">
+                <a:solidFill>
+                  <a:schemeClr val="bg1">
+                    <a:lumMod val="50000"/>
+                  </a:schemeClr>
+                </a:solidFill>
+              </a:rPr>
+              <a:t>itens_venda</a:t>
+            </a:r>
+            <a:r>
+              <a:rPr lang="pt-BR" sz="2000" b="1" dirty="0"/>
+              <a:t>;</a:t>
+            </a:r>
+            <a:endParaRPr lang="pt-BR" sz="2000" dirty="0"/>
+          </a:p>
+          <a:p>
+            <a:r>
+              <a:rPr lang="pt-BR" sz="2000" dirty="0"/>
+              <a:t> </a:t>
+            </a:r>
+          </a:p>
+          <a:p>
+            <a:r>
+              <a:rPr lang="pt-BR" sz="2000" dirty="0"/>
+              <a:t>2 - </a:t>
+            </a:r>
+            <a:r>
+              <a:rPr lang="pt-BR" sz="2000" b="1" dirty="0"/>
+              <a:t>Exemplo: </a:t>
+            </a:r>
+            <a:r>
+              <a:rPr lang="pt-BR" sz="2000" dirty="0"/>
+              <a:t>Calcular o total estimado em estoque (produto):</a:t>
+            </a:r>
+            <a:br>
+              <a:rPr lang="pt-BR" sz="2000" dirty="0"/>
+            </a:br>
+            <a:r>
+              <a:rPr lang="pt-BR" sz="2000" dirty="0"/>
+              <a:t>Multiplica o preço unitário pelo estoque disponível para saber o valor total em estoque.</a:t>
+            </a:r>
+          </a:p>
+          <a:p>
+            <a:br>
+              <a:rPr lang="pt-BR" sz="2000" dirty="0"/>
+            </a:br>
+            <a:r>
+              <a:rPr lang="pt-BR" sz="2000" b="1" dirty="0">
+                <a:solidFill>
+                  <a:srgbClr val="0000FF"/>
+                </a:solidFill>
+              </a:rPr>
+              <a:t>SELECT</a:t>
+            </a:r>
+            <a:r>
+              <a:rPr lang="pt-BR" sz="2000" dirty="0"/>
+              <a:t> </a:t>
+            </a:r>
+            <a:r>
+              <a:rPr lang="pt-BR" sz="2000" dirty="0" err="1">
+                <a:solidFill>
+                  <a:schemeClr val="bg1">
+                    <a:lumMod val="50000"/>
+                  </a:schemeClr>
+                </a:solidFill>
+              </a:rPr>
+              <a:t>nome_produto</a:t>
+            </a:r>
+            <a:r>
+              <a:rPr lang="pt-BR" sz="2000" b="1" dirty="0"/>
+              <a:t>,</a:t>
+            </a:r>
+            <a:r>
+              <a:rPr lang="pt-BR" sz="2000" dirty="0"/>
+              <a:t> </a:t>
+            </a:r>
+          </a:p>
+          <a:p>
+            <a:r>
+              <a:rPr lang="pt-BR" sz="2000" dirty="0"/>
+              <a:t>       </a:t>
+            </a:r>
+            <a:r>
+              <a:rPr lang="pt-BR" sz="2000" dirty="0" err="1">
+                <a:solidFill>
+                  <a:schemeClr val="bg1">
+                    <a:lumMod val="50000"/>
+                  </a:schemeClr>
+                </a:solidFill>
+              </a:rPr>
+              <a:t>preco_unitario</a:t>
+            </a:r>
+            <a:r>
+              <a:rPr lang="pt-BR" sz="2000" dirty="0">
+                <a:solidFill>
+                  <a:schemeClr val="bg1">
+                    <a:lumMod val="50000"/>
+                  </a:schemeClr>
+                </a:solidFill>
+              </a:rPr>
+              <a:t> </a:t>
+            </a:r>
+            <a:r>
+              <a:rPr lang="pt-BR" sz="2000" b="1" dirty="0">
+                <a:solidFill>
+                  <a:schemeClr val="bg1">
+                    <a:lumMod val="50000"/>
+                  </a:schemeClr>
+                </a:solidFill>
+              </a:rPr>
+              <a:t>*</a:t>
+            </a:r>
+            <a:r>
+              <a:rPr lang="pt-BR" sz="2000" dirty="0">
+                <a:solidFill>
+                  <a:schemeClr val="bg1">
+                    <a:lumMod val="50000"/>
+                  </a:schemeClr>
+                </a:solidFill>
+              </a:rPr>
+              <a:t> estoque</a:t>
+            </a:r>
+            <a:r>
+              <a:rPr lang="pt-BR" sz="2000" dirty="0"/>
+              <a:t> </a:t>
+            </a:r>
+            <a:r>
+              <a:rPr lang="pt-BR" sz="2000" b="1" dirty="0">
+                <a:solidFill>
+                  <a:srgbClr val="0000FF"/>
+                </a:solidFill>
+              </a:rPr>
+              <a:t>AS</a:t>
+            </a:r>
+            <a:r>
+              <a:rPr lang="pt-BR" sz="2000" dirty="0"/>
+              <a:t> </a:t>
+            </a:r>
+            <a:r>
+              <a:rPr lang="pt-BR" sz="2000" dirty="0" err="1">
+                <a:solidFill>
+                  <a:schemeClr val="bg1">
+                    <a:lumMod val="50000"/>
+                  </a:schemeClr>
+                </a:solidFill>
+              </a:rPr>
+              <a:t>valor_estoque</a:t>
+            </a:r>
+            <a:endParaRPr lang="pt-BR" sz="2000" dirty="0">
+              <a:solidFill>
+                <a:schemeClr val="bg1">
+                  <a:lumMod val="50000"/>
+                </a:schemeClr>
+              </a:solidFill>
+            </a:endParaRPr>
+          </a:p>
+          <a:p>
+            <a:r>
+              <a:rPr lang="pt-BR" sz="2000" b="1" dirty="0">
+                <a:solidFill>
+                  <a:srgbClr val="0000FF"/>
+                </a:solidFill>
+              </a:rPr>
+              <a:t>FROM</a:t>
+            </a:r>
+            <a:r>
+              <a:rPr lang="pt-BR" sz="2000" dirty="0"/>
+              <a:t> </a:t>
+            </a:r>
+            <a:r>
+              <a:rPr lang="pt-BR" sz="2000" dirty="0">
+                <a:solidFill>
+                  <a:schemeClr val="bg1">
+                    <a:lumMod val="50000"/>
+                  </a:schemeClr>
+                </a:solidFill>
+              </a:rPr>
+              <a:t>produtos</a:t>
+            </a:r>
+            <a:r>
+              <a:rPr lang="pt-BR" sz="2000" b="1" dirty="0"/>
+              <a:t>;</a:t>
+            </a:r>
+            <a:endParaRPr lang="pt-BR" sz="2000" dirty="0"/>
+          </a:p>
+        </p:txBody>
+      </p:sp>
+      <p:sp>
+        <p:nvSpPr>
+          <p:cNvPr id="11" name="Rectangle 3">
+            <a:extLst>
+              <a:ext uri="{FF2B5EF4-FFF2-40B4-BE49-F238E27FC236}">
+                <a16:creationId xmlns:a16="http://schemas.microsoft.com/office/drawing/2014/main" id="{D9BCA995-0712-42F0-9296-D234A6F24670}"/>
+              </a:ext>
+            </a:extLst>
+          </p:cNvPr>
+          <p:cNvSpPr>
+            <a:spLocks noChangeArrowheads="1"/>
+          </p:cNvSpPr>
+          <p:nvPr/>
+        </p:nvSpPr>
+        <p:spPr bwMode="auto">
+          <a:xfrm>
+            <a:off x="338845" y="3771149"/>
+            <a:ext cx="12192000" cy="457200"/>
+          </a:xfrm>
+          <a:prstGeom prst="rect">
+            <a:avLst/>
+          </a:prstGeom>
+          <a:noFill/>
+          <a:ln>
+            <a:noFill/>
+          </a:ln>
+          <a:effectLst/>
+          <a:extLst>
+            <a:ext uri="{909E8E84-426E-40DD-AFC4-6F175D3DCCD1}">
+              <a14:hiddenFill xmlns:a14="http://schemas.microsoft.com/office/drawing/2010/main">
+                <a:solidFill>
+                  <a:schemeClr val="accent1"/>
+                </a:solidFill>
+              </a14:hiddenFill>
+            </a:ext>
+            <a:ext uri="{91240B29-F687-4F45-9708-019B960494DF}">
+              <a14:hiddenLine xmlns:a14="http://schemas.microsoft.com/office/drawing/2010/main" w="9525">
+                <a:solidFill>
+                  <a:schemeClr val="tx1"/>
+                </a:solidFill>
+                <a:miter lim="800000"/>
+                <a:headEnd/>
+                <a:tailEnd/>
+              </a14:hiddenLine>
+            </a:ext>
+            <a:ext uri="{AF507438-7753-43E0-B8FC-AC1667EBCBE1}">
+              <a14:hiddenEffects xmlns:a14="http://schemas.microsoft.com/office/drawing/2010/main">
+                <a:effectLst>
+                  <a:outerShdw dist="35921" dir="2700000" algn="ctr" rotWithShape="0">
+                    <a:schemeClr val="bg2"/>
+                  </a:outerShdw>
+                </a:effectLst>
+              </a14:hiddenEffects>
+            </a:ext>
+          </a:extLst>
+        </p:spPr>
+        <p:txBody>
+          <a:bodyPr vert="horz" wrap="none" lIns="91440" tIns="45720" rIns="91440" bIns="45720" numCol="1" anchor="ctr" anchorCtr="0" compatLnSpc="1">
+            <a:prstTxWarp prst="textNoShape">
+              <a:avLst/>
+            </a:prstTxWarp>
+            <a:spAutoFit/>
+          </a:bodyPr>
+          <a:lstStyle/>
+          <a:p>
+            <a:pPr marL="0" marR="0" lvl="0" indent="0" algn="l" defTabSz="914400" rtl="0" eaLnBrk="0" fontAlgn="base" latinLnBrk="0" hangingPunct="0">
+              <a:lnSpc>
+                <a:spcPct val="100000"/>
+              </a:lnSpc>
+              <a:spcBef>
+                <a:spcPct val="0"/>
+              </a:spcBef>
+              <a:spcAft>
+                <a:spcPct val="0"/>
+              </a:spcAft>
+              <a:buClrTx/>
+              <a:buSzTx/>
+              <a:buFontTx/>
+              <a:buNone/>
+              <a:tabLst/>
+            </a:pPr>
+            <a:br>
+              <a:rPr kumimoji="0" lang="pt-BR" altLang="pt-BR" sz="1200" b="0" i="0" u="none" strike="noStrike" cap="none" normalizeH="0" baseline="0">
+                <a:ln>
+                  <a:noFill/>
+                </a:ln>
+                <a:solidFill>
+                  <a:schemeClr val="tx1"/>
+                </a:solidFill>
+                <a:effectLst/>
+                <a:latin typeface="Arial" panose="020B0604020202020204" pitchFamily="34" charset="0"/>
+                <a:ea typeface="Times New Roman" panose="02020603050405020304" pitchFamily="18" charset="0"/>
+              </a:rPr>
+            </a:br>
+            <a:br>
+              <a:rPr kumimoji="0" lang="pt-BR" altLang="pt-BR" sz="1200" b="0" i="0" u="none" strike="noStrike" cap="none" normalizeH="0" baseline="0">
+                <a:ln>
+                  <a:noFill/>
+                </a:ln>
+                <a:solidFill>
+                  <a:schemeClr val="tx1"/>
+                </a:solidFill>
+                <a:effectLst/>
+                <a:latin typeface="Arial" panose="020B0604020202020204" pitchFamily="34" charset="0"/>
+                <a:ea typeface="Times New Roman" panose="02020603050405020304" pitchFamily="18" charset="0"/>
+              </a:rPr>
+            </a:br>
+            <a:endParaRPr kumimoji="0" lang="pt-BR" altLang="pt-BR" sz="1800" b="0" i="0" u="none" strike="noStrike" cap="none" normalizeH="0" baseline="0">
+              <a:ln>
+                <a:noFill/>
+              </a:ln>
+              <a:solidFill>
+                <a:schemeClr val="tx1"/>
+              </a:solidFill>
+              <a:effectLst/>
+              <a:latin typeface="Arial" panose="020B0604020202020204" pitchFamily="34" charset="0"/>
+            </a:endParaRPr>
+          </a:p>
+        </p:txBody>
+      </p:sp>
+    </p:spTree>
+    <p:extLst>
+      <p:ext uri="{BB962C8B-B14F-4D97-AF65-F5344CB8AC3E}">
+        <p14:creationId xmlns:p14="http://schemas.microsoft.com/office/powerpoint/2010/main" val="3554646341"/>
+      </p:ext>
+    </p:extLst>
+  </p:cSld>
+  <p:clrMapOvr>
+    <a:masterClrMapping/>
+  </p:clrMapOvr>
+</p:sld>
+</file>
+
+<file path=ppt/slides/slide17.xml><?xml version="1.0" encoding="utf-8"?>
+<p:sld xmlns:a="http://schemas.openxmlformats.org/drawingml/2006/main" xmlns:r="http://schemas.openxmlformats.org/officeDocument/2006/relationships" xmlns:p="http://schemas.openxmlformats.org/presentationml/2006/main">
+  <p:cSld>
+    <p:spTree>
+      <p:nvGrpSpPr>
+        <p:cNvPr id="1" name=""/>
+        <p:cNvGrpSpPr/>
+        <p:nvPr/>
+      </p:nvGrpSpPr>
+      <p:grpSpPr>
+        <a:xfrm>
+          <a:off x="0" y="0"/>
+          <a:ext cx="0" cy="0"/>
+          <a:chOff x="0" y="0"/>
+          <a:chExt cx="0" cy="0"/>
+        </a:xfrm>
+      </p:grpSpPr>
+      <p:sp>
+        <p:nvSpPr>
+          <p:cNvPr id="2" name="Título 1">
+            <a:extLst>
+              <a:ext uri="{FF2B5EF4-FFF2-40B4-BE49-F238E27FC236}">
+                <a16:creationId xmlns:a16="http://schemas.microsoft.com/office/drawing/2014/main" id="{E1BF4364-A6CD-4460-A48D-6779B48ADDBE}"/>
+              </a:ext>
+            </a:extLst>
+          </p:cNvPr>
+          <p:cNvSpPr>
+            <a:spLocks noGrp="1"/>
+          </p:cNvSpPr>
+          <p:nvPr>
+            <p:ph type="title"/>
+          </p:nvPr>
+        </p:nvSpPr>
+        <p:spPr>
+          <a:xfrm>
+            <a:off x="338845" y="158493"/>
+            <a:ext cx="10954797" cy="1533440"/>
+          </a:xfrm>
+        </p:spPr>
+        <p:txBody>
+          <a:bodyPr>
+            <a:noAutofit/>
+          </a:bodyPr>
+          <a:lstStyle/>
+          <a:p>
+            <a:r>
+              <a:rPr lang="pt-BR" sz="3300" b="1" dirty="0">
+                <a:solidFill>
+                  <a:srgbClr val="00758F"/>
+                </a:solidFill>
+              </a:rPr>
+              <a:t>Consultas com Funções: </a:t>
+            </a:r>
+            <a:br>
+              <a:rPr lang="pt-BR" sz="3300" b="1" dirty="0">
+                <a:solidFill>
+                  <a:srgbClr val="00758F"/>
+                </a:solidFill>
+              </a:rPr>
+            </a:br>
+            <a:r>
+              <a:rPr lang="pt-BR" sz="3300" b="1" dirty="0">
+                <a:solidFill>
+                  <a:srgbClr val="F39211"/>
+                </a:solidFill>
+              </a:rPr>
+              <a:t>1.3 Funções de Cálculo e Operadores Aritméticos no MySQL (Exemplos)</a:t>
+            </a:r>
+            <a:endParaRPr lang="pt-BR" sz="3300" dirty="0">
+              <a:solidFill>
+                <a:srgbClr val="F39211"/>
+              </a:solidFill>
+            </a:endParaRPr>
+          </a:p>
+        </p:txBody>
+      </p:sp>
+      <p:pic>
+        <p:nvPicPr>
+          <p:cNvPr id="4" name="Picture 6" descr="https://www.mysql.com/common/logos/logo-mysql-170x115.png">
+            <a:extLst>
+              <a:ext uri="{FF2B5EF4-FFF2-40B4-BE49-F238E27FC236}">
+                <a16:creationId xmlns:a16="http://schemas.microsoft.com/office/drawing/2014/main" id="{441DFD02-E8A2-4690-9CD7-1CC407F2024E}"/>
+              </a:ext>
+            </a:extLst>
+          </p:cNvPr>
+          <p:cNvPicPr>
+            <a:picLocks noChangeAspect="1" noChangeArrowheads="1"/>
+          </p:cNvPicPr>
+          <p:nvPr/>
+        </p:nvPicPr>
+        <p:blipFill>
+          <a:blip r:embed="rId2">
+            <a:extLst>
+              <a:ext uri="{28A0092B-C50C-407E-A947-70E740481C1C}">
+                <a14:useLocalDpi xmlns:a14="http://schemas.microsoft.com/office/drawing/2010/main" val="0"/>
+              </a:ext>
+            </a:extLst>
+          </a:blip>
+          <a:srcRect/>
+          <a:stretch>
+            <a:fillRect/>
+          </a:stretch>
+        </p:blipFill>
+        <p:spPr bwMode="auto">
+          <a:xfrm>
+            <a:off x="9774793" y="5753675"/>
+            <a:ext cx="1385775" cy="936973"/>
+          </a:xfrm>
+          <a:prstGeom prst="rect">
+            <a:avLst/>
+          </a:prstGeom>
+          <a:noFill/>
+          <a:extLst>
+            <a:ext uri="{909E8E84-426E-40DD-AFC4-6F175D3DCCD1}">
+              <a14:hiddenFill xmlns:a14="http://schemas.microsoft.com/office/drawing/2010/main">
+                <a:solidFill>
+                  <a:srgbClr val="FFFFFF"/>
+                </a:solidFill>
+              </a14:hiddenFill>
+            </a:ext>
+          </a:extLst>
+        </p:spPr>
+      </p:pic>
+      <p:sp>
+        <p:nvSpPr>
+          <p:cNvPr id="6" name="CaixaDeTexto 5">
+            <a:extLst>
+              <a:ext uri="{FF2B5EF4-FFF2-40B4-BE49-F238E27FC236}">
+                <a16:creationId xmlns:a16="http://schemas.microsoft.com/office/drawing/2014/main" id="{AF06CEA4-1D6A-4FB2-B738-A9362ADA1CCA}"/>
+              </a:ext>
+            </a:extLst>
+          </p:cNvPr>
+          <p:cNvSpPr txBox="1"/>
+          <p:nvPr/>
+        </p:nvSpPr>
+        <p:spPr>
+          <a:xfrm>
+            <a:off x="338845" y="1873858"/>
+            <a:ext cx="10088523" cy="4801314"/>
+          </a:xfrm>
+          <a:prstGeom prst="rect">
+            <a:avLst/>
+          </a:prstGeom>
+          <a:noFill/>
+        </p:spPr>
+        <p:txBody>
+          <a:bodyPr wrap="square" rtlCol="0">
+            <a:spAutoFit/>
+          </a:bodyPr>
+          <a:lstStyle/>
+          <a:p>
+            <a:r>
+              <a:rPr lang="pt-BR" sz="2000" dirty="0"/>
+              <a:t>3 - </a:t>
+            </a:r>
+            <a:r>
+              <a:rPr lang="pt-BR" sz="2000" b="1" dirty="0"/>
+              <a:t>Exemplo:  </a:t>
+            </a:r>
+            <a:r>
+              <a:rPr lang="pt-BR" sz="2000" dirty="0"/>
+              <a:t>Arredondar o valor total de uma venda (simulando um valor com casas decimais):</a:t>
+            </a:r>
+            <a:br>
+              <a:rPr lang="pt-BR" sz="2000" dirty="0"/>
+            </a:br>
+            <a:r>
+              <a:rPr lang="pt-BR" sz="2000" dirty="0"/>
+              <a:t>Arredonda o valor total da venda para duas casas decimais, útil para valores monetários.</a:t>
+            </a:r>
+          </a:p>
+          <a:p>
+            <a:br>
+              <a:rPr lang="pt-BR" sz="2000" dirty="0"/>
+            </a:br>
+            <a:r>
+              <a:rPr lang="pt-BR" sz="2000" b="1" dirty="0">
+                <a:solidFill>
+                  <a:srgbClr val="0000FF"/>
+                </a:solidFill>
+              </a:rPr>
+              <a:t>SELECT</a:t>
+            </a:r>
+            <a:r>
+              <a:rPr lang="pt-BR" sz="2000" dirty="0"/>
+              <a:t> </a:t>
+            </a:r>
+            <a:r>
+              <a:rPr lang="pt-BR" sz="2000" dirty="0" err="1">
+                <a:solidFill>
+                  <a:schemeClr val="bg1">
+                    <a:lumMod val="50000"/>
+                  </a:schemeClr>
+                </a:solidFill>
+              </a:rPr>
+              <a:t>id_venda</a:t>
+            </a:r>
+            <a:r>
+              <a:rPr lang="pt-BR" sz="2000" b="1" dirty="0"/>
+              <a:t>,</a:t>
+            </a:r>
+            <a:r>
+              <a:rPr lang="pt-BR" sz="2000" dirty="0"/>
+              <a:t> </a:t>
+            </a:r>
+          </a:p>
+          <a:p>
+            <a:r>
+              <a:rPr lang="pt-BR" sz="2000" dirty="0"/>
+              <a:t>       </a:t>
+            </a:r>
+            <a:r>
+              <a:rPr lang="pt-BR" sz="2000" b="1" dirty="0">
+                <a:solidFill>
+                  <a:srgbClr val="0000FF"/>
+                </a:solidFill>
+              </a:rPr>
+              <a:t>ROUND</a:t>
+            </a:r>
+            <a:r>
+              <a:rPr lang="pt-BR" sz="2000" b="1" dirty="0"/>
+              <a:t>(</a:t>
+            </a:r>
+            <a:r>
+              <a:rPr lang="pt-BR" sz="2000" dirty="0" err="1">
+                <a:solidFill>
+                  <a:schemeClr val="bg1">
+                    <a:lumMod val="50000"/>
+                  </a:schemeClr>
+                </a:solidFill>
+              </a:rPr>
+              <a:t>valor_total</a:t>
+            </a:r>
+            <a:r>
+              <a:rPr lang="pt-BR" sz="2000" b="1" dirty="0"/>
+              <a:t>,</a:t>
+            </a:r>
+            <a:r>
+              <a:rPr lang="pt-BR" sz="2000" dirty="0"/>
+              <a:t> </a:t>
+            </a:r>
+            <a:r>
+              <a:rPr lang="pt-BR" sz="2000" dirty="0">
+                <a:solidFill>
+                  <a:srgbClr val="F39211"/>
+                </a:solidFill>
+              </a:rPr>
+              <a:t>2</a:t>
+            </a:r>
+            <a:r>
+              <a:rPr lang="pt-BR" sz="2000" b="1" dirty="0"/>
+              <a:t>)</a:t>
+            </a:r>
+            <a:r>
+              <a:rPr lang="pt-BR" sz="2000" dirty="0"/>
+              <a:t> </a:t>
+            </a:r>
+            <a:r>
+              <a:rPr lang="pt-BR" sz="2000" b="1" dirty="0">
+                <a:solidFill>
+                  <a:srgbClr val="0000FF"/>
+                </a:solidFill>
+              </a:rPr>
+              <a:t>AS</a:t>
+            </a:r>
+            <a:r>
+              <a:rPr lang="pt-BR" sz="2000" dirty="0"/>
+              <a:t> </a:t>
+            </a:r>
+            <a:r>
+              <a:rPr lang="pt-BR" sz="2000" dirty="0" err="1">
+                <a:solidFill>
+                  <a:schemeClr val="bg1">
+                    <a:lumMod val="50000"/>
+                  </a:schemeClr>
+                </a:solidFill>
+              </a:rPr>
+              <a:t>valor_arredondado</a:t>
+            </a:r>
+            <a:endParaRPr lang="pt-BR" sz="2000" dirty="0">
+              <a:solidFill>
+                <a:schemeClr val="bg1">
+                  <a:lumMod val="50000"/>
+                </a:schemeClr>
+              </a:solidFill>
+            </a:endParaRPr>
+          </a:p>
+          <a:p>
+            <a:r>
+              <a:rPr lang="pt-BR" sz="2000" b="1" dirty="0">
+                <a:solidFill>
+                  <a:srgbClr val="0000FF"/>
+                </a:solidFill>
+              </a:rPr>
+              <a:t>FROM</a:t>
+            </a:r>
+            <a:r>
+              <a:rPr lang="pt-BR" sz="2000" dirty="0"/>
+              <a:t> </a:t>
+            </a:r>
+            <a:r>
+              <a:rPr lang="pt-BR" sz="2000" dirty="0">
+                <a:solidFill>
+                  <a:schemeClr val="bg1">
+                    <a:lumMod val="50000"/>
+                  </a:schemeClr>
+                </a:solidFill>
+              </a:rPr>
+              <a:t>vendas</a:t>
+            </a:r>
+            <a:r>
+              <a:rPr lang="pt-BR" sz="2000" b="1" dirty="0"/>
+              <a:t>;</a:t>
+            </a:r>
+            <a:br>
+              <a:rPr lang="pt-BR" sz="2000" b="1" dirty="0"/>
+            </a:br>
+            <a:br>
+              <a:rPr lang="pt-BR" sz="2000" b="1" dirty="0"/>
+            </a:br>
+            <a:r>
+              <a:rPr lang="pt-BR" dirty="0"/>
+              <a:t>4 - </a:t>
+            </a:r>
+            <a:r>
+              <a:rPr lang="pt-BR" b="1" dirty="0"/>
+              <a:t>Exemplo: </a:t>
+            </a:r>
+            <a:r>
+              <a:rPr lang="pt-BR" dirty="0"/>
+              <a:t> Mostrar produtos com mais de R$ 1000 em estoque:</a:t>
+            </a:r>
+            <a:br>
+              <a:rPr lang="pt-BR" dirty="0"/>
+            </a:br>
+            <a:r>
+              <a:rPr lang="pt-BR" dirty="0"/>
+              <a:t>Filtra os produtos cujo valor total em estoque (preço × quantidade) é maior que 1000.</a:t>
+            </a:r>
+          </a:p>
+          <a:p>
+            <a:br>
+              <a:rPr lang="pt-BR" dirty="0"/>
+            </a:br>
+            <a:r>
+              <a:rPr lang="pt-BR" b="1" dirty="0">
+                <a:solidFill>
+                  <a:srgbClr val="0000FF"/>
+                </a:solidFill>
+              </a:rPr>
+              <a:t>SELECT</a:t>
+            </a:r>
+            <a:r>
+              <a:rPr lang="pt-BR" dirty="0"/>
+              <a:t> </a:t>
+            </a:r>
+            <a:r>
+              <a:rPr lang="pt-BR" dirty="0" err="1">
+                <a:solidFill>
+                  <a:schemeClr val="bg1">
+                    <a:lumMod val="50000"/>
+                  </a:schemeClr>
+                </a:solidFill>
+              </a:rPr>
+              <a:t>nome_produto</a:t>
+            </a:r>
+            <a:r>
+              <a:rPr lang="pt-BR" b="1" dirty="0"/>
+              <a:t>,</a:t>
+            </a:r>
+            <a:r>
+              <a:rPr lang="pt-BR" dirty="0"/>
+              <a:t> </a:t>
+            </a:r>
+            <a:r>
+              <a:rPr lang="pt-BR" dirty="0" err="1">
+                <a:solidFill>
+                  <a:schemeClr val="bg1">
+                    <a:lumMod val="50000"/>
+                  </a:schemeClr>
+                </a:solidFill>
+              </a:rPr>
+              <a:t>preco_unitario</a:t>
+            </a:r>
+            <a:r>
+              <a:rPr lang="pt-BR" b="1" dirty="0"/>
+              <a:t>,</a:t>
+            </a:r>
+            <a:r>
+              <a:rPr lang="pt-BR" dirty="0"/>
+              <a:t> </a:t>
+            </a:r>
+            <a:r>
+              <a:rPr lang="pt-BR" dirty="0">
+                <a:solidFill>
+                  <a:schemeClr val="bg1">
+                    <a:lumMod val="50000"/>
+                  </a:schemeClr>
+                </a:solidFill>
+              </a:rPr>
+              <a:t>estoque</a:t>
+            </a:r>
+            <a:r>
+              <a:rPr lang="pt-BR" b="1" dirty="0"/>
+              <a:t>,</a:t>
+            </a:r>
+            <a:endParaRPr lang="pt-BR" dirty="0"/>
+          </a:p>
+          <a:p>
+            <a:r>
+              <a:rPr lang="pt-BR" dirty="0"/>
+              <a:t>       </a:t>
+            </a:r>
+            <a:r>
+              <a:rPr lang="pt-BR" dirty="0" err="1">
+                <a:solidFill>
+                  <a:schemeClr val="bg1">
+                    <a:lumMod val="50000"/>
+                  </a:schemeClr>
+                </a:solidFill>
+              </a:rPr>
+              <a:t>preco_unitario</a:t>
+            </a:r>
+            <a:r>
+              <a:rPr lang="pt-BR" dirty="0">
+                <a:solidFill>
+                  <a:schemeClr val="bg1">
+                    <a:lumMod val="50000"/>
+                  </a:schemeClr>
+                </a:solidFill>
+              </a:rPr>
+              <a:t> </a:t>
+            </a:r>
+            <a:r>
+              <a:rPr lang="pt-BR" b="1" dirty="0">
+                <a:solidFill>
+                  <a:schemeClr val="bg1">
+                    <a:lumMod val="50000"/>
+                  </a:schemeClr>
+                </a:solidFill>
+              </a:rPr>
+              <a:t>*</a:t>
+            </a:r>
+            <a:r>
+              <a:rPr lang="pt-BR" dirty="0">
+                <a:solidFill>
+                  <a:schemeClr val="bg1">
+                    <a:lumMod val="50000"/>
+                  </a:schemeClr>
+                </a:solidFill>
+              </a:rPr>
+              <a:t> estoque </a:t>
+            </a:r>
+            <a:r>
+              <a:rPr lang="pt-BR" b="1" dirty="0">
+                <a:solidFill>
+                  <a:srgbClr val="0000FF"/>
+                </a:solidFill>
+              </a:rPr>
+              <a:t>AS</a:t>
+            </a:r>
+            <a:r>
+              <a:rPr lang="pt-BR" dirty="0"/>
+              <a:t> </a:t>
+            </a:r>
+            <a:r>
+              <a:rPr lang="pt-BR" dirty="0" err="1">
+                <a:solidFill>
+                  <a:schemeClr val="bg1">
+                    <a:lumMod val="50000"/>
+                  </a:schemeClr>
+                </a:solidFill>
+              </a:rPr>
+              <a:t>valor_estoque</a:t>
+            </a:r>
+            <a:endParaRPr lang="pt-BR" dirty="0">
+              <a:solidFill>
+                <a:schemeClr val="bg1">
+                  <a:lumMod val="50000"/>
+                </a:schemeClr>
+              </a:solidFill>
+            </a:endParaRPr>
+          </a:p>
+          <a:p>
+            <a:r>
+              <a:rPr lang="pt-BR" b="1" dirty="0">
+                <a:solidFill>
+                  <a:srgbClr val="0000FF"/>
+                </a:solidFill>
+              </a:rPr>
+              <a:t>FROM</a:t>
+            </a:r>
+            <a:r>
+              <a:rPr lang="pt-BR" dirty="0"/>
+              <a:t> </a:t>
+            </a:r>
+            <a:r>
+              <a:rPr lang="pt-BR" dirty="0">
+                <a:solidFill>
+                  <a:schemeClr val="bg1">
+                    <a:lumMod val="50000"/>
+                  </a:schemeClr>
+                </a:solidFill>
+              </a:rPr>
+              <a:t>produtos</a:t>
+            </a:r>
+          </a:p>
+          <a:p>
+            <a:r>
+              <a:rPr lang="pt-BR" b="1" dirty="0">
+                <a:solidFill>
+                  <a:srgbClr val="0000FF"/>
+                </a:solidFill>
+              </a:rPr>
+              <a:t>WHERE</a:t>
+            </a:r>
+            <a:r>
+              <a:rPr lang="pt-BR" dirty="0"/>
+              <a:t> </a:t>
+            </a:r>
+            <a:r>
+              <a:rPr lang="pt-BR" dirty="0" err="1">
+                <a:solidFill>
+                  <a:schemeClr val="bg1">
+                    <a:lumMod val="50000"/>
+                  </a:schemeClr>
+                </a:solidFill>
+              </a:rPr>
+              <a:t>preco_unitario</a:t>
+            </a:r>
+            <a:r>
+              <a:rPr lang="pt-BR" dirty="0">
+                <a:solidFill>
+                  <a:schemeClr val="bg1">
+                    <a:lumMod val="50000"/>
+                  </a:schemeClr>
+                </a:solidFill>
+              </a:rPr>
+              <a:t> </a:t>
+            </a:r>
+            <a:r>
+              <a:rPr lang="pt-BR" b="1" dirty="0">
+                <a:solidFill>
+                  <a:schemeClr val="bg1">
+                    <a:lumMod val="50000"/>
+                  </a:schemeClr>
+                </a:solidFill>
+              </a:rPr>
+              <a:t>*</a:t>
+            </a:r>
+            <a:r>
+              <a:rPr lang="pt-BR" dirty="0"/>
+              <a:t> </a:t>
+            </a:r>
+            <a:r>
+              <a:rPr lang="pt-BR" dirty="0">
+                <a:solidFill>
+                  <a:schemeClr val="bg1">
+                    <a:lumMod val="50000"/>
+                  </a:schemeClr>
+                </a:solidFill>
+              </a:rPr>
+              <a:t>estoque</a:t>
+            </a:r>
+            <a:r>
+              <a:rPr lang="pt-BR" dirty="0"/>
+              <a:t> </a:t>
+            </a:r>
+            <a:r>
+              <a:rPr lang="pt-BR" b="1" dirty="0"/>
+              <a:t>&gt;</a:t>
+            </a:r>
+            <a:r>
+              <a:rPr lang="pt-BR" dirty="0"/>
+              <a:t> </a:t>
+            </a:r>
+            <a:r>
+              <a:rPr lang="pt-BR" dirty="0">
+                <a:solidFill>
+                  <a:srgbClr val="F39211"/>
+                </a:solidFill>
+              </a:rPr>
+              <a:t>1000</a:t>
+            </a:r>
+            <a:r>
+              <a:rPr lang="pt-BR" b="1" dirty="0"/>
+              <a:t>;</a:t>
+            </a:r>
+            <a:endParaRPr lang="pt-BR" dirty="0"/>
+          </a:p>
+        </p:txBody>
+      </p:sp>
+      <p:sp>
+        <p:nvSpPr>
+          <p:cNvPr id="11" name="Rectangle 3">
+            <a:extLst>
+              <a:ext uri="{FF2B5EF4-FFF2-40B4-BE49-F238E27FC236}">
+                <a16:creationId xmlns:a16="http://schemas.microsoft.com/office/drawing/2014/main" id="{D9BCA995-0712-42F0-9296-D234A6F24670}"/>
+              </a:ext>
+            </a:extLst>
+          </p:cNvPr>
+          <p:cNvSpPr>
+            <a:spLocks noChangeArrowheads="1"/>
+          </p:cNvSpPr>
+          <p:nvPr/>
+        </p:nvSpPr>
+        <p:spPr bwMode="auto">
+          <a:xfrm>
+            <a:off x="338845" y="3771149"/>
+            <a:ext cx="12192000" cy="457200"/>
+          </a:xfrm>
+          <a:prstGeom prst="rect">
+            <a:avLst/>
+          </a:prstGeom>
+          <a:noFill/>
+          <a:ln>
+            <a:noFill/>
+          </a:ln>
+          <a:effectLst/>
+          <a:extLst>
+            <a:ext uri="{909E8E84-426E-40DD-AFC4-6F175D3DCCD1}">
+              <a14:hiddenFill xmlns:a14="http://schemas.microsoft.com/office/drawing/2010/main">
+                <a:solidFill>
+                  <a:schemeClr val="accent1"/>
+                </a:solidFill>
+              </a14:hiddenFill>
+            </a:ext>
+            <a:ext uri="{91240B29-F687-4F45-9708-019B960494DF}">
+              <a14:hiddenLine xmlns:a14="http://schemas.microsoft.com/office/drawing/2010/main" w="9525">
+                <a:solidFill>
+                  <a:schemeClr val="tx1"/>
+                </a:solidFill>
+                <a:miter lim="800000"/>
+                <a:headEnd/>
+                <a:tailEnd/>
+              </a14:hiddenLine>
+            </a:ext>
+            <a:ext uri="{AF507438-7753-43E0-B8FC-AC1667EBCBE1}">
+              <a14:hiddenEffects xmlns:a14="http://schemas.microsoft.com/office/drawing/2010/main">
+                <a:effectLst>
+                  <a:outerShdw dist="35921" dir="2700000" algn="ctr" rotWithShape="0">
+                    <a:schemeClr val="bg2"/>
+                  </a:outerShdw>
+                </a:effectLst>
+              </a14:hiddenEffects>
+            </a:ext>
+          </a:extLst>
+        </p:spPr>
+        <p:txBody>
+          <a:bodyPr vert="horz" wrap="none" lIns="91440" tIns="45720" rIns="91440" bIns="45720" numCol="1" anchor="ctr" anchorCtr="0" compatLnSpc="1">
+            <a:prstTxWarp prst="textNoShape">
+              <a:avLst/>
+            </a:prstTxWarp>
+            <a:spAutoFit/>
+          </a:bodyPr>
+          <a:lstStyle/>
+          <a:p>
+            <a:pPr marL="0" marR="0" lvl="0" indent="0" algn="l" defTabSz="914400" rtl="0" eaLnBrk="0" fontAlgn="base" latinLnBrk="0" hangingPunct="0">
+              <a:lnSpc>
+                <a:spcPct val="100000"/>
+              </a:lnSpc>
+              <a:spcBef>
+                <a:spcPct val="0"/>
+              </a:spcBef>
+              <a:spcAft>
+                <a:spcPct val="0"/>
+              </a:spcAft>
+              <a:buClrTx/>
+              <a:buSzTx/>
+              <a:buFontTx/>
+              <a:buNone/>
+              <a:tabLst/>
+            </a:pPr>
+            <a:br>
+              <a:rPr kumimoji="0" lang="pt-BR" altLang="pt-BR" sz="1200" b="0" i="0" u="none" strike="noStrike" cap="none" normalizeH="0" baseline="0">
+                <a:ln>
+                  <a:noFill/>
+                </a:ln>
+                <a:solidFill>
+                  <a:schemeClr val="tx1"/>
+                </a:solidFill>
+                <a:effectLst/>
+                <a:latin typeface="Arial" panose="020B0604020202020204" pitchFamily="34" charset="0"/>
+                <a:ea typeface="Times New Roman" panose="02020603050405020304" pitchFamily="18" charset="0"/>
+              </a:rPr>
+            </a:br>
+            <a:br>
+              <a:rPr kumimoji="0" lang="pt-BR" altLang="pt-BR" sz="1200" b="0" i="0" u="none" strike="noStrike" cap="none" normalizeH="0" baseline="0">
+                <a:ln>
+                  <a:noFill/>
+                </a:ln>
+                <a:solidFill>
+                  <a:schemeClr val="tx1"/>
+                </a:solidFill>
+                <a:effectLst/>
+                <a:latin typeface="Arial" panose="020B0604020202020204" pitchFamily="34" charset="0"/>
+                <a:ea typeface="Times New Roman" panose="02020603050405020304" pitchFamily="18" charset="0"/>
+              </a:rPr>
+            </a:br>
+            <a:endParaRPr kumimoji="0" lang="pt-BR" altLang="pt-BR" sz="1800" b="0" i="0" u="none" strike="noStrike" cap="none" normalizeH="0" baseline="0">
+              <a:ln>
+                <a:noFill/>
+              </a:ln>
+              <a:solidFill>
+                <a:schemeClr val="tx1"/>
+              </a:solidFill>
+              <a:effectLst/>
+              <a:latin typeface="Arial" panose="020B0604020202020204" pitchFamily="34" charset="0"/>
+            </a:endParaRPr>
+          </a:p>
+        </p:txBody>
+      </p:sp>
+    </p:spTree>
+    <p:extLst>
+      <p:ext uri="{BB962C8B-B14F-4D97-AF65-F5344CB8AC3E}">
+        <p14:creationId xmlns:p14="http://schemas.microsoft.com/office/powerpoint/2010/main" val="4174308676"/>
+      </p:ext>
+    </p:extLst>
+  </p:cSld>
+  <p:clrMapOvr>
+    <a:masterClrMapping/>
+  </p:clrMapOvr>
+</p:sld>
+</file>
+
+<file path=ppt/slides/slide18.xml><?xml version="1.0" encoding="utf-8"?>
+<p:sld xmlns:a="http://schemas.openxmlformats.org/drawingml/2006/main" xmlns:r="http://schemas.openxmlformats.org/officeDocument/2006/relationships" xmlns:p="http://schemas.openxmlformats.org/presentationml/2006/main">
+  <p:cSld>
+    <p:spTree>
+      <p:nvGrpSpPr>
+        <p:cNvPr id="1" name=""/>
+        <p:cNvGrpSpPr/>
+        <p:nvPr/>
+      </p:nvGrpSpPr>
+      <p:grpSpPr>
+        <a:xfrm>
+          <a:off x="0" y="0"/>
+          <a:ext cx="0" cy="0"/>
+          <a:chOff x="0" y="0"/>
+          <a:chExt cx="0" cy="0"/>
+        </a:xfrm>
+      </p:grpSpPr>
+      <p:sp>
+        <p:nvSpPr>
+          <p:cNvPr id="2" name="Título 1">
+            <a:extLst>
+              <a:ext uri="{FF2B5EF4-FFF2-40B4-BE49-F238E27FC236}">
+                <a16:creationId xmlns:a16="http://schemas.microsoft.com/office/drawing/2014/main" id="{E1BF4364-A6CD-4460-A48D-6779B48ADDBE}"/>
+              </a:ext>
+            </a:extLst>
+          </p:cNvPr>
+          <p:cNvSpPr>
+            <a:spLocks noGrp="1"/>
+          </p:cNvSpPr>
+          <p:nvPr>
+            <p:ph type="title"/>
+          </p:nvPr>
+        </p:nvSpPr>
+        <p:spPr>
+          <a:xfrm>
+            <a:off x="338845" y="158493"/>
+            <a:ext cx="10954797" cy="1533440"/>
+          </a:xfrm>
+        </p:spPr>
+        <p:txBody>
+          <a:bodyPr>
+            <a:noAutofit/>
+          </a:bodyPr>
+          <a:lstStyle/>
+          <a:p>
+            <a:r>
+              <a:rPr lang="pt-BR" sz="3300" b="1" dirty="0">
+                <a:solidFill>
+                  <a:srgbClr val="00758F"/>
+                </a:solidFill>
+              </a:rPr>
+              <a:t>Consultas com Funções: </a:t>
+            </a:r>
+            <a:br>
+              <a:rPr lang="pt-BR" sz="3300" b="1" dirty="0">
+                <a:solidFill>
+                  <a:srgbClr val="00758F"/>
+                </a:solidFill>
+              </a:rPr>
+            </a:br>
+            <a:r>
+              <a:rPr lang="pt-BR" sz="3300" b="1" dirty="0">
+                <a:solidFill>
+                  <a:srgbClr val="F39211"/>
+                </a:solidFill>
+              </a:rPr>
+              <a:t>1.4 Funções de Cálculo e Operadores Aritméticos no MySQL (Exemplos)</a:t>
+            </a:r>
+            <a:endParaRPr lang="pt-BR" sz="3300" dirty="0">
+              <a:solidFill>
+                <a:srgbClr val="F39211"/>
+              </a:solidFill>
+            </a:endParaRPr>
+          </a:p>
+        </p:txBody>
+      </p:sp>
+      <p:pic>
+        <p:nvPicPr>
+          <p:cNvPr id="4" name="Picture 6" descr="https://www.mysql.com/common/logos/logo-mysql-170x115.png">
+            <a:extLst>
+              <a:ext uri="{FF2B5EF4-FFF2-40B4-BE49-F238E27FC236}">
+                <a16:creationId xmlns:a16="http://schemas.microsoft.com/office/drawing/2014/main" id="{441DFD02-E8A2-4690-9CD7-1CC407F2024E}"/>
+              </a:ext>
+            </a:extLst>
+          </p:cNvPr>
+          <p:cNvPicPr>
+            <a:picLocks noChangeAspect="1" noChangeArrowheads="1"/>
+          </p:cNvPicPr>
+          <p:nvPr/>
+        </p:nvPicPr>
+        <p:blipFill>
+          <a:blip r:embed="rId2">
+            <a:extLst>
+              <a:ext uri="{28A0092B-C50C-407E-A947-70E740481C1C}">
+                <a14:useLocalDpi xmlns:a14="http://schemas.microsoft.com/office/drawing/2010/main" val="0"/>
+              </a:ext>
+            </a:extLst>
+          </a:blip>
+          <a:srcRect/>
+          <a:stretch>
+            <a:fillRect/>
+          </a:stretch>
+        </p:blipFill>
+        <p:spPr bwMode="auto">
+          <a:xfrm>
+            <a:off x="9774793" y="5753675"/>
+            <a:ext cx="1385775" cy="936973"/>
+          </a:xfrm>
+          <a:prstGeom prst="rect">
+            <a:avLst/>
+          </a:prstGeom>
+          <a:noFill/>
+          <a:extLst>
+            <a:ext uri="{909E8E84-426E-40DD-AFC4-6F175D3DCCD1}">
+              <a14:hiddenFill xmlns:a14="http://schemas.microsoft.com/office/drawing/2010/main">
+                <a:solidFill>
+                  <a:srgbClr val="FFFFFF"/>
+                </a:solidFill>
+              </a14:hiddenFill>
+            </a:ext>
+          </a:extLst>
+        </p:spPr>
+      </p:pic>
+      <p:sp>
+        <p:nvSpPr>
+          <p:cNvPr id="6" name="CaixaDeTexto 5">
+            <a:extLst>
+              <a:ext uri="{FF2B5EF4-FFF2-40B4-BE49-F238E27FC236}">
+                <a16:creationId xmlns:a16="http://schemas.microsoft.com/office/drawing/2014/main" id="{AF06CEA4-1D6A-4FB2-B738-A9362ADA1CCA}"/>
+              </a:ext>
+            </a:extLst>
+          </p:cNvPr>
+          <p:cNvSpPr txBox="1"/>
+          <p:nvPr/>
+        </p:nvSpPr>
+        <p:spPr>
+          <a:xfrm>
+            <a:off x="338845" y="1873858"/>
+            <a:ext cx="10088523" cy="1323439"/>
+          </a:xfrm>
+          <a:prstGeom prst="rect">
+            <a:avLst/>
+          </a:prstGeom>
+          <a:noFill/>
+        </p:spPr>
+        <p:txBody>
+          <a:bodyPr wrap="square" rtlCol="0">
+            <a:spAutoFit/>
+          </a:bodyPr>
+          <a:lstStyle/>
+          <a:p>
+            <a:r>
+              <a:rPr lang="pt-BR" sz="2000" dirty="0"/>
+              <a:t>5 - </a:t>
+            </a:r>
+            <a:r>
+              <a:rPr lang="pt-BR" sz="2000" b="1" dirty="0"/>
+              <a:t>Exemplo: </a:t>
+            </a:r>
+            <a:r>
+              <a:rPr lang="pt-BR" sz="2000" dirty="0"/>
+              <a:t>Mostrar valor absoluto de variação (simulado):</a:t>
+            </a:r>
+            <a:br>
+              <a:rPr lang="pt-BR" sz="2000" dirty="0"/>
+            </a:br>
+            <a:r>
+              <a:rPr lang="pt-BR" sz="2000" dirty="0"/>
+              <a:t>Retorna o valor positivo de uma variação negativa, útil para cálculos de diferença.</a:t>
+            </a:r>
+          </a:p>
+          <a:p>
+            <a:br>
+              <a:rPr lang="pt-BR" sz="2000" dirty="0"/>
+            </a:br>
+            <a:r>
+              <a:rPr lang="pt-BR" sz="2000" b="1" dirty="0">
+                <a:solidFill>
+                  <a:srgbClr val="0000FF"/>
+                </a:solidFill>
+              </a:rPr>
+              <a:t>SELECT</a:t>
+            </a:r>
+            <a:r>
+              <a:rPr lang="pt-BR" sz="2000" dirty="0"/>
+              <a:t> </a:t>
+            </a:r>
+            <a:r>
+              <a:rPr lang="pt-BR" sz="2000" b="1" dirty="0">
+                <a:solidFill>
+                  <a:srgbClr val="0000FF"/>
+                </a:solidFill>
+              </a:rPr>
+              <a:t>ABS</a:t>
+            </a:r>
+            <a:r>
+              <a:rPr lang="pt-BR" sz="2000" b="1" dirty="0"/>
+              <a:t>(</a:t>
+            </a:r>
+            <a:r>
+              <a:rPr lang="pt-BR" sz="2000" dirty="0"/>
+              <a:t>-</a:t>
+            </a:r>
+            <a:r>
+              <a:rPr lang="pt-BR" sz="2000" dirty="0">
+                <a:solidFill>
+                  <a:srgbClr val="F39211"/>
+                </a:solidFill>
+              </a:rPr>
+              <a:t>150.75</a:t>
+            </a:r>
+            <a:r>
+              <a:rPr lang="pt-BR" sz="2000" b="1" dirty="0"/>
+              <a:t>)</a:t>
+            </a:r>
+            <a:r>
+              <a:rPr lang="pt-BR" sz="2000" dirty="0"/>
+              <a:t> </a:t>
+            </a:r>
+            <a:r>
+              <a:rPr lang="pt-BR" sz="2000" b="1" dirty="0">
+                <a:solidFill>
+                  <a:srgbClr val="0000FF"/>
+                </a:solidFill>
+              </a:rPr>
+              <a:t>AS</a:t>
+            </a:r>
+            <a:r>
+              <a:rPr lang="pt-BR" sz="2000" dirty="0"/>
+              <a:t> </a:t>
+            </a:r>
+            <a:r>
+              <a:rPr lang="pt-BR" sz="2000" dirty="0" err="1">
+                <a:solidFill>
+                  <a:schemeClr val="bg1">
+                    <a:lumMod val="50000"/>
+                  </a:schemeClr>
+                </a:solidFill>
+              </a:rPr>
+              <a:t>variacao_positiva</a:t>
+            </a:r>
+            <a:r>
+              <a:rPr lang="pt-BR" sz="2000" b="1" dirty="0"/>
+              <a:t>;</a:t>
+            </a:r>
+            <a:endParaRPr lang="pt-BR" sz="2000" dirty="0"/>
+          </a:p>
+        </p:txBody>
+      </p:sp>
+    </p:spTree>
+    <p:extLst>
+      <p:ext uri="{BB962C8B-B14F-4D97-AF65-F5344CB8AC3E}">
+        <p14:creationId xmlns:p14="http://schemas.microsoft.com/office/powerpoint/2010/main" val="2443141718"/>
+      </p:ext>
+    </p:extLst>
+  </p:cSld>
+  <p:clrMapOvr>
+    <a:masterClrMapping/>
+  </p:clrMapOvr>
+</p:sld>
+</file>
+
+<file path=ppt/slides/slide19.xml><?xml version="1.0" encoding="utf-8"?>
+<p:sld xmlns:a="http://schemas.openxmlformats.org/drawingml/2006/main" xmlns:r="http://schemas.openxmlformats.org/officeDocument/2006/relationships" xmlns:p="http://schemas.openxmlformats.org/presentationml/2006/main">
+  <p:cSld>
+    <p:spTree>
+      <p:nvGrpSpPr>
+        <p:cNvPr id="1" name=""/>
+        <p:cNvGrpSpPr/>
+        <p:nvPr/>
+      </p:nvGrpSpPr>
+      <p:grpSpPr>
+        <a:xfrm>
+          <a:off x="0" y="0"/>
+          <a:ext cx="0" cy="0"/>
+          <a:chOff x="0" y="0"/>
+          <a:chExt cx="0" cy="0"/>
+        </a:xfrm>
+      </p:grpSpPr>
+      <p:sp>
+        <p:nvSpPr>
+          <p:cNvPr id="2" name="Título 1">
+            <a:extLst>
+              <a:ext uri="{FF2B5EF4-FFF2-40B4-BE49-F238E27FC236}">
+                <a16:creationId xmlns:a16="http://schemas.microsoft.com/office/drawing/2014/main" id="{E1BF4364-A6CD-4460-A48D-6779B48ADDBE}"/>
+              </a:ext>
+            </a:extLst>
+          </p:cNvPr>
+          <p:cNvSpPr>
+            <a:spLocks noGrp="1"/>
+          </p:cNvSpPr>
+          <p:nvPr>
+            <p:ph type="title"/>
+          </p:nvPr>
+        </p:nvSpPr>
+        <p:spPr>
+          <a:xfrm>
+            <a:off x="338845" y="158493"/>
+            <a:ext cx="10954797" cy="1533440"/>
+          </a:xfrm>
+        </p:spPr>
+        <p:txBody>
+          <a:bodyPr>
+            <a:noAutofit/>
+          </a:bodyPr>
+          <a:lstStyle/>
+          <a:p>
+            <a:r>
+              <a:rPr lang="pt-BR" sz="3300" b="1" dirty="0">
+                <a:solidFill>
+                  <a:srgbClr val="00758F"/>
+                </a:solidFill>
+              </a:rPr>
+              <a:t>Consultas com Funções: </a:t>
+            </a:r>
+            <a:br>
+              <a:rPr lang="pt-BR" sz="3300" b="1" dirty="0">
+                <a:solidFill>
+                  <a:srgbClr val="00758F"/>
+                </a:solidFill>
+              </a:rPr>
+            </a:br>
+            <a:r>
+              <a:rPr lang="pt-BR" sz="3300" b="1" dirty="0">
+                <a:solidFill>
+                  <a:srgbClr val="F39211"/>
+                </a:solidFill>
+              </a:rPr>
+              <a:t>1.5 Funções de Cálculo e Operadores Aritméticos no MySQL (Exercícios)</a:t>
+            </a:r>
+            <a:endParaRPr lang="pt-BR" sz="3300" dirty="0">
+              <a:solidFill>
+                <a:srgbClr val="F39211"/>
+              </a:solidFill>
+            </a:endParaRPr>
+          </a:p>
+        </p:txBody>
+      </p:sp>
+      <p:pic>
+        <p:nvPicPr>
+          <p:cNvPr id="4" name="Picture 6" descr="https://www.mysql.com/common/logos/logo-mysql-170x115.png">
+            <a:extLst>
+              <a:ext uri="{FF2B5EF4-FFF2-40B4-BE49-F238E27FC236}">
+                <a16:creationId xmlns:a16="http://schemas.microsoft.com/office/drawing/2014/main" id="{441DFD02-E8A2-4690-9CD7-1CC407F2024E}"/>
+              </a:ext>
+            </a:extLst>
+          </p:cNvPr>
+          <p:cNvPicPr>
+            <a:picLocks noChangeAspect="1" noChangeArrowheads="1"/>
+          </p:cNvPicPr>
+          <p:nvPr/>
+        </p:nvPicPr>
+        <p:blipFill>
+          <a:blip r:embed="rId2">
+            <a:extLst>
+              <a:ext uri="{28A0092B-C50C-407E-A947-70E740481C1C}">
+                <a14:useLocalDpi xmlns:a14="http://schemas.microsoft.com/office/drawing/2010/main" val="0"/>
+              </a:ext>
+            </a:extLst>
+          </a:blip>
+          <a:srcRect/>
+          <a:stretch>
+            <a:fillRect/>
+          </a:stretch>
+        </p:blipFill>
+        <p:spPr bwMode="auto">
+          <a:xfrm>
+            <a:off x="9774793" y="5753675"/>
+            <a:ext cx="1385775" cy="936973"/>
+          </a:xfrm>
+          <a:prstGeom prst="rect">
+            <a:avLst/>
+          </a:prstGeom>
+          <a:noFill/>
+          <a:extLst>
+            <a:ext uri="{909E8E84-426E-40DD-AFC4-6F175D3DCCD1}">
+              <a14:hiddenFill xmlns:a14="http://schemas.microsoft.com/office/drawing/2010/main">
+                <a:solidFill>
+                  <a:srgbClr val="FFFFFF"/>
+                </a:solidFill>
+              </a14:hiddenFill>
+            </a:ext>
+          </a:extLst>
+        </p:spPr>
+      </p:pic>
+      <p:sp>
+        <p:nvSpPr>
+          <p:cNvPr id="6" name="CaixaDeTexto 5">
+            <a:extLst>
+              <a:ext uri="{FF2B5EF4-FFF2-40B4-BE49-F238E27FC236}">
+                <a16:creationId xmlns:a16="http://schemas.microsoft.com/office/drawing/2014/main" id="{AF06CEA4-1D6A-4FB2-B738-A9362ADA1CCA}"/>
+              </a:ext>
+            </a:extLst>
+          </p:cNvPr>
+          <p:cNvSpPr txBox="1"/>
+          <p:nvPr/>
+        </p:nvSpPr>
+        <p:spPr>
+          <a:xfrm>
+            <a:off x="338845" y="1873858"/>
+            <a:ext cx="10088523" cy="2800767"/>
+          </a:xfrm>
+          <a:prstGeom prst="rect">
+            <a:avLst/>
+          </a:prstGeom>
+          <a:noFill/>
+        </p:spPr>
+        <p:txBody>
+          <a:bodyPr wrap="square" rtlCol="0">
+            <a:spAutoFit/>
+          </a:bodyPr>
+          <a:lstStyle/>
+          <a:p>
+            <a:r>
+              <a:rPr lang="pt-BR" sz="2200" b="1" dirty="0"/>
+              <a:t>Exercício 1 (básico):</a:t>
+            </a:r>
+            <a:r>
+              <a:rPr lang="pt-BR" sz="2200" dirty="0"/>
+              <a:t> Mostre o total de valor por item vendido (preço x quantidade), da tabela </a:t>
+            </a:r>
+            <a:r>
+              <a:rPr lang="pt-BR" sz="2200" dirty="0" err="1"/>
+              <a:t>itens_venda</a:t>
+            </a:r>
+            <a:r>
+              <a:rPr lang="pt-BR" sz="2200" dirty="0"/>
+              <a:t>.</a:t>
+            </a:r>
+            <a:br>
+              <a:rPr lang="pt-BR" sz="2200" dirty="0"/>
+            </a:br>
+            <a:r>
+              <a:rPr lang="pt-BR" sz="2200" dirty="0"/>
+              <a:t> </a:t>
+            </a:r>
+          </a:p>
+          <a:p>
+            <a:r>
+              <a:rPr lang="pt-BR" sz="2200" b="1" dirty="0"/>
+              <a:t>Exercício 2 (intermediário):</a:t>
+            </a:r>
+            <a:r>
+              <a:rPr lang="pt-BR" sz="2200" dirty="0"/>
+              <a:t> Liste o nome e o valor estimado em estoque dos produtos, arredondado com 2 casas decimais.</a:t>
+            </a:r>
+          </a:p>
+          <a:p>
+            <a:br>
+              <a:rPr lang="pt-BR" sz="2200" dirty="0"/>
+            </a:br>
+            <a:r>
+              <a:rPr lang="pt-BR" sz="2200" b="1" dirty="0"/>
+              <a:t>Exercício 3 (desafio):</a:t>
+            </a:r>
+            <a:r>
+              <a:rPr lang="pt-BR" sz="2200" dirty="0"/>
+              <a:t> Calcule o valor médio de vendas </a:t>
+            </a:r>
+            <a:r>
+              <a:rPr lang="pt-BR" sz="2200" b="1" dirty="0"/>
+              <a:t>com 2 casas decimais</a:t>
+            </a:r>
+            <a:r>
+              <a:rPr lang="pt-BR" sz="2200" dirty="0"/>
+              <a:t>, e também mostre o valor </a:t>
+            </a:r>
+            <a:r>
+              <a:rPr lang="pt-BR" sz="2200" b="1" dirty="0"/>
+              <a:t>arredondado para cima</a:t>
+            </a:r>
+            <a:r>
+              <a:rPr lang="pt-BR" sz="2200" dirty="0"/>
+              <a:t>.</a:t>
+            </a:r>
+          </a:p>
+        </p:txBody>
+      </p:sp>
+    </p:spTree>
+    <p:extLst>
+      <p:ext uri="{BB962C8B-B14F-4D97-AF65-F5344CB8AC3E}">
+        <p14:creationId xmlns:p14="http://schemas.microsoft.com/office/powerpoint/2010/main" val="2066818423"/>
       </p:ext>
     </p:extLst>
   </p:cSld>
@@ -5042,6 +10777,998 @@
     <p:extLst>
       <p:ext uri="{BB962C8B-B14F-4D97-AF65-F5344CB8AC3E}">
         <p14:creationId xmlns:p14="http://schemas.microsoft.com/office/powerpoint/2010/main" val="2345492319"/>
+      </p:ext>
+    </p:extLst>
+  </p:cSld>
+  <p:clrMapOvr>
+    <a:masterClrMapping/>
+  </p:clrMapOvr>
+</p:sld>
+</file>
+
+<file path=ppt/slides/slide20.xml><?xml version="1.0" encoding="utf-8"?>
+<p:sld xmlns:a="http://schemas.openxmlformats.org/drawingml/2006/main" xmlns:r="http://schemas.openxmlformats.org/officeDocument/2006/relationships" xmlns:p="http://schemas.openxmlformats.org/presentationml/2006/main">
+  <p:cSld>
+    <p:spTree>
+      <p:nvGrpSpPr>
+        <p:cNvPr id="1" name=""/>
+        <p:cNvGrpSpPr/>
+        <p:nvPr/>
+      </p:nvGrpSpPr>
+      <p:grpSpPr>
+        <a:xfrm>
+          <a:off x="0" y="0"/>
+          <a:ext cx="0" cy="0"/>
+          <a:chOff x="0" y="0"/>
+          <a:chExt cx="0" cy="0"/>
+        </a:xfrm>
+      </p:grpSpPr>
+      <p:sp>
+        <p:nvSpPr>
+          <p:cNvPr id="2" name="Título 1">
+            <a:extLst>
+              <a:ext uri="{FF2B5EF4-FFF2-40B4-BE49-F238E27FC236}">
+                <a16:creationId xmlns:a16="http://schemas.microsoft.com/office/drawing/2014/main" id="{E1BF4364-A6CD-4460-A48D-6779B48ADDBE}"/>
+              </a:ext>
+            </a:extLst>
+          </p:cNvPr>
+          <p:cNvSpPr>
+            <a:spLocks noGrp="1"/>
+          </p:cNvSpPr>
+          <p:nvPr>
+            <p:ph type="title"/>
+          </p:nvPr>
+        </p:nvSpPr>
+        <p:spPr>
+          <a:xfrm>
+            <a:off x="338845" y="158493"/>
+            <a:ext cx="10954797" cy="1533440"/>
+          </a:xfrm>
+        </p:spPr>
+        <p:txBody>
+          <a:bodyPr>
+            <a:noAutofit/>
+          </a:bodyPr>
+          <a:lstStyle/>
+          <a:p>
+            <a:r>
+              <a:rPr lang="pt-BR" sz="3300" b="1" dirty="0">
+                <a:solidFill>
+                  <a:srgbClr val="00758F"/>
+                </a:solidFill>
+              </a:rPr>
+              <a:t>Consultas com Funções: </a:t>
+            </a:r>
+            <a:br>
+              <a:rPr lang="pt-BR" sz="3300" b="1" dirty="0">
+                <a:solidFill>
+                  <a:srgbClr val="00758F"/>
+                </a:solidFill>
+              </a:rPr>
+            </a:br>
+            <a:r>
+              <a:rPr lang="pt-BR" sz="3300" b="1" dirty="0">
+                <a:solidFill>
+                  <a:srgbClr val="F39211"/>
+                </a:solidFill>
+              </a:rPr>
+              <a:t>1.6 Funções de Cálculo e Operadores Aritméticos no MySQL (Exercícios)</a:t>
+            </a:r>
+            <a:endParaRPr lang="pt-BR" sz="3300" dirty="0">
+              <a:solidFill>
+                <a:srgbClr val="F39211"/>
+              </a:solidFill>
+            </a:endParaRPr>
+          </a:p>
+        </p:txBody>
+      </p:sp>
+      <p:pic>
+        <p:nvPicPr>
+          <p:cNvPr id="4" name="Picture 6" descr="https://www.mysql.com/common/logos/logo-mysql-170x115.png">
+            <a:extLst>
+              <a:ext uri="{FF2B5EF4-FFF2-40B4-BE49-F238E27FC236}">
+                <a16:creationId xmlns:a16="http://schemas.microsoft.com/office/drawing/2014/main" id="{441DFD02-E8A2-4690-9CD7-1CC407F2024E}"/>
+              </a:ext>
+            </a:extLst>
+          </p:cNvPr>
+          <p:cNvPicPr>
+            <a:picLocks noChangeAspect="1" noChangeArrowheads="1"/>
+          </p:cNvPicPr>
+          <p:nvPr/>
+        </p:nvPicPr>
+        <p:blipFill>
+          <a:blip r:embed="rId2">
+            <a:extLst>
+              <a:ext uri="{28A0092B-C50C-407E-A947-70E740481C1C}">
+                <a14:useLocalDpi xmlns:a14="http://schemas.microsoft.com/office/drawing/2010/main" val="0"/>
+              </a:ext>
+            </a:extLst>
+          </a:blip>
+          <a:srcRect/>
+          <a:stretch>
+            <a:fillRect/>
+          </a:stretch>
+        </p:blipFill>
+        <p:spPr bwMode="auto">
+          <a:xfrm>
+            <a:off x="9774793" y="5753675"/>
+            <a:ext cx="1385775" cy="936973"/>
+          </a:xfrm>
+          <a:prstGeom prst="rect">
+            <a:avLst/>
+          </a:prstGeom>
+          <a:noFill/>
+          <a:extLst>
+            <a:ext uri="{909E8E84-426E-40DD-AFC4-6F175D3DCCD1}">
+              <a14:hiddenFill xmlns:a14="http://schemas.microsoft.com/office/drawing/2010/main">
+                <a:solidFill>
+                  <a:srgbClr val="FFFFFF"/>
+                </a:solidFill>
+              </a14:hiddenFill>
+            </a:ext>
+          </a:extLst>
+        </p:spPr>
+      </p:pic>
+      <p:sp>
+        <p:nvSpPr>
+          <p:cNvPr id="6" name="CaixaDeTexto 5">
+            <a:extLst>
+              <a:ext uri="{FF2B5EF4-FFF2-40B4-BE49-F238E27FC236}">
+                <a16:creationId xmlns:a16="http://schemas.microsoft.com/office/drawing/2014/main" id="{AF06CEA4-1D6A-4FB2-B738-A9362ADA1CCA}"/>
+              </a:ext>
+            </a:extLst>
+          </p:cNvPr>
+          <p:cNvSpPr txBox="1"/>
+          <p:nvPr/>
+        </p:nvSpPr>
+        <p:spPr>
+          <a:xfrm>
+            <a:off x="338845" y="1873858"/>
+            <a:ext cx="10088523" cy="4801314"/>
+          </a:xfrm>
+          <a:prstGeom prst="rect">
+            <a:avLst/>
+          </a:prstGeom>
+          <a:noFill/>
+        </p:spPr>
+        <p:txBody>
+          <a:bodyPr wrap="square" rtlCol="0">
+            <a:spAutoFit/>
+          </a:bodyPr>
+          <a:lstStyle/>
+          <a:p>
+            <a:r>
+              <a:rPr lang="pt-BR" b="1" dirty="0"/>
+              <a:t>Exercício 1 (básico):</a:t>
+            </a:r>
+            <a:r>
+              <a:rPr lang="pt-BR" dirty="0"/>
+              <a:t> Mostre o total de valor por item vendido (preço x quantidade), da tabela </a:t>
+            </a:r>
+            <a:r>
+              <a:rPr lang="pt-BR" dirty="0" err="1"/>
+              <a:t>itens_venda</a:t>
+            </a:r>
+            <a:r>
+              <a:rPr lang="pt-BR" dirty="0"/>
+              <a:t>.</a:t>
+            </a:r>
+            <a:br>
+              <a:rPr lang="pt-BR" dirty="0"/>
+            </a:br>
+            <a:r>
+              <a:rPr lang="pt-BR" b="1" dirty="0">
+                <a:solidFill>
+                  <a:srgbClr val="0000FF"/>
+                </a:solidFill>
+              </a:rPr>
+              <a:t>SELECT</a:t>
+            </a:r>
+            <a:r>
+              <a:rPr lang="pt-BR" dirty="0"/>
+              <a:t> </a:t>
+            </a:r>
+            <a:r>
+              <a:rPr lang="pt-BR" dirty="0" err="1">
+                <a:solidFill>
+                  <a:schemeClr val="bg1">
+                    <a:lumMod val="50000"/>
+                  </a:schemeClr>
+                </a:solidFill>
+              </a:rPr>
+              <a:t>id_item</a:t>
+            </a:r>
+            <a:r>
+              <a:rPr lang="pt-BR" b="1" dirty="0">
+                <a:solidFill>
+                  <a:schemeClr val="bg1">
+                    <a:lumMod val="50000"/>
+                  </a:schemeClr>
+                </a:solidFill>
+              </a:rPr>
+              <a:t>,</a:t>
+            </a:r>
+            <a:r>
+              <a:rPr lang="pt-BR" dirty="0">
+                <a:solidFill>
+                  <a:schemeClr val="bg1">
+                    <a:lumMod val="50000"/>
+                  </a:schemeClr>
+                </a:solidFill>
+              </a:rPr>
+              <a:t> </a:t>
+            </a:r>
+            <a:r>
+              <a:rPr lang="pt-BR" dirty="0" err="1">
+                <a:solidFill>
+                  <a:schemeClr val="bg1">
+                    <a:lumMod val="50000"/>
+                  </a:schemeClr>
+                </a:solidFill>
+              </a:rPr>
+              <a:t>preco_unitario</a:t>
+            </a:r>
+            <a:r>
+              <a:rPr lang="pt-BR" dirty="0">
+                <a:solidFill>
+                  <a:schemeClr val="bg1">
+                    <a:lumMod val="50000"/>
+                  </a:schemeClr>
+                </a:solidFill>
+              </a:rPr>
+              <a:t> </a:t>
+            </a:r>
+            <a:r>
+              <a:rPr lang="pt-BR" b="1" dirty="0">
+                <a:solidFill>
+                  <a:schemeClr val="bg1">
+                    <a:lumMod val="50000"/>
+                  </a:schemeClr>
+                </a:solidFill>
+              </a:rPr>
+              <a:t>*</a:t>
+            </a:r>
+            <a:r>
+              <a:rPr lang="pt-BR" dirty="0">
+                <a:solidFill>
+                  <a:schemeClr val="bg1">
+                    <a:lumMod val="50000"/>
+                  </a:schemeClr>
+                </a:solidFill>
+              </a:rPr>
+              <a:t> quantidade</a:t>
+            </a:r>
+            <a:r>
+              <a:rPr lang="pt-BR" dirty="0"/>
+              <a:t> </a:t>
+            </a:r>
+            <a:r>
+              <a:rPr lang="pt-BR" b="1" dirty="0">
+                <a:solidFill>
+                  <a:srgbClr val="0000FF"/>
+                </a:solidFill>
+              </a:rPr>
+              <a:t>AS</a:t>
+            </a:r>
+            <a:r>
+              <a:rPr lang="pt-BR" dirty="0"/>
+              <a:t> </a:t>
+            </a:r>
+            <a:r>
+              <a:rPr lang="pt-BR" dirty="0" err="1">
+                <a:solidFill>
+                  <a:schemeClr val="bg1">
+                    <a:lumMod val="50000"/>
+                  </a:schemeClr>
+                </a:solidFill>
+              </a:rPr>
+              <a:t>total_item</a:t>
+            </a:r>
+            <a:endParaRPr lang="pt-BR" dirty="0">
+              <a:solidFill>
+                <a:schemeClr val="bg1">
+                  <a:lumMod val="50000"/>
+                </a:schemeClr>
+              </a:solidFill>
+            </a:endParaRPr>
+          </a:p>
+          <a:p>
+            <a:r>
+              <a:rPr lang="pt-BR" b="1" dirty="0">
+                <a:solidFill>
+                  <a:srgbClr val="0000FF"/>
+                </a:solidFill>
+              </a:rPr>
+              <a:t>FROM</a:t>
+            </a:r>
+            <a:r>
+              <a:rPr lang="pt-BR" dirty="0"/>
+              <a:t> </a:t>
+            </a:r>
+            <a:r>
+              <a:rPr lang="pt-BR" dirty="0" err="1">
+                <a:solidFill>
+                  <a:schemeClr val="bg1">
+                    <a:lumMod val="50000"/>
+                  </a:schemeClr>
+                </a:solidFill>
+              </a:rPr>
+              <a:t>itens_venda</a:t>
+            </a:r>
+            <a:r>
+              <a:rPr lang="pt-BR" b="1" dirty="0"/>
+              <a:t>;</a:t>
+            </a:r>
+            <a:endParaRPr lang="pt-BR" dirty="0"/>
+          </a:p>
+          <a:p>
+            <a:r>
+              <a:rPr lang="pt-BR" dirty="0"/>
+              <a:t> </a:t>
+            </a:r>
+          </a:p>
+          <a:p>
+            <a:r>
+              <a:rPr lang="pt-BR" b="1" dirty="0"/>
+              <a:t>Exercício 2 (intermediário):</a:t>
+            </a:r>
+            <a:r>
+              <a:rPr lang="pt-BR" dirty="0"/>
+              <a:t> Liste o nome e o valor estimado em estoque dos produtos, arredondado com 2 casas decimais.</a:t>
+            </a:r>
+            <a:br>
+              <a:rPr lang="pt-BR" dirty="0"/>
+            </a:br>
+            <a:r>
+              <a:rPr lang="pt-BR" b="1" dirty="0">
+                <a:solidFill>
+                  <a:srgbClr val="0000FF"/>
+                </a:solidFill>
+              </a:rPr>
+              <a:t>SELECT</a:t>
+            </a:r>
+            <a:r>
+              <a:rPr lang="pt-BR" dirty="0"/>
+              <a:t> </a:t>
+            </a:r>
+            <a:r>
+              <a:rPr lang="pt-BR" dirty="0" err="1">
+                <a:solidFill>
+                  <a:schemeClr val="bg1">
+                    <a:lumMod val="50000"/>
+                  </a:schemeClr>
+                </a:solidFill>
+              </a:rPr>
+              <a:t>nome_produto</a:t>
+            </a:r>
+            <a:r>
+              <a:rPr lang="pt-BR" b="1" dirty="0"/>
+              <a:t>,</a:t>
+            </a:r>
+            <a:r>
+              <a:rPr lang="pt-BR" dirty="0"/>
+              <a:t> </a:t>
+            </a:r>
+          </a:p>
+          <a:p>
+            <a:r>
+              <a:rPr lang="pt-BR" dirty="0"/>
+              <a:t>       </a:t>
+            </a:r>
+            <a:r>
+              <a:rPr lang="pt-BR" b="1" dirty="0">
+                <a:solidFill>
+                  <a:srgbClr val="0000FF"/>
+                </a:solidFill>
+              </a:rPr>
+              <a:t>ROUND</a:t>
+            </a:r>
+            <a:r>
+              <a:rPr lang="pt-BR" b="1" dirty="0"/>
+              <a:t>(</a:t>
+            </a:r>
+            <a:r>
+              <a:rPr lang="pt-BR" dirty="0" err="1">
+                <a:solidFill>
+                  <a:schemeClr val="bg1">
+                    <a:lumMod val="50000"/>
+                  </a:schemeClr>
+                </a:solidFill>
+              </a:rPr>
+              <a:t>preco_unitario</a:t>
+            </a:r>
+            <a:r>
+              <a:rPr lang="pt-BR" dirty="0">
+                <a:solidFill>
+                  <a:schemeClr val="bg1">
+                    <a:lumMod val="50000"/>
+                  </a:schemeClr>
+                </a:solidFill>
+              </a:rPr>
+              <a:t> </a:t>
+            </a:r>
+            <a:r>
+              <a:rPr lang="pt-BR" b="1" dirty="0">
+                <a:solidFill>
+                  <a:schemeClr val="bg1">
+                    <a:lumMod val="50000"/>
+                  </a:schemeClr>
+                </a:solidFill>
+              </a:rPr>
+              <a:t>*</a:t>
+            </a:r>
+            <a:r>
+              <a:rPr lang="pt-BR" dirty="0">
+                <a:solidFill>
+                  <a:schemeClr val="bg1">
+                    <a:lumMod val="50000"/>
+                  </a:schemeClr>
+                </a:solidFill>
+              </a:rPr>
+              <a:t> estoque</a:t>
+            </a:r>
+            <a:r>
+              <a:rPr lang="pt-BR" b="1" dirty="0"/>
+              <a:t>,</a:t>
+            </a:r>
+            <a:r>
+              <a:rPr lang="pt-BR" dirty="0"/>
+              <a:t> </a:t>
+            </a:r>
+            <a:r>
+              <a:rPr lang="pt-BR" dirty="0">
+                <a:solidFill>
+                  <a:srgbClr val="F39211"/>
+                </a:solidFill>
+              </a:rPr>
+              <a:t>2</a:t>
+            </a:r>
+            <a:r>
+              <a:rPr lang="pt-BR" b="1" dirty="0"/>
+              <a:t>)</a:t>
+            </a:r>
+            <a:r>
+              <a:rPr lang="pt-BR" dirty="0"/>
+              <a:t> </a:t>
+            </a:r>
+            <a:r>
+              <a:rPr lang="pt-BR" b="1" dirty="0">
+                <a:solidFill>
+                  <a:srgbClr val="0000FF"/>
+                </a:solidFill>
+              </a:rPr>
+              <a:t>AS</a:t>
+            </a:r>
+            <a:r>
+              <a:rPr lang="pt-BR" dirty="0"/>
+              <a:t> </a:t>
+            </a:r>
+            <a:r>
+              <a:rPr lang="pt-BR" dirty="0" err="1">
+                <a:solidFill>
+                  <a:schemeClr val="bg1">
+                    <a:lumMod val="50000"/>
+                  </a:schemeClr>
+                </a:solidFill>
+              </a:rPr>
+              <a:t>estoque_valor</a:t>
+            </a:r>
+            <a:endParaRPr lang="pt-BR" dirty="0">
+              <a:solidFill>
+                <a:schemeClr val="bg1">
+                  <a:lumMod val="50000"/>
+                </a:schemeClr>
+              </a:solidFill>
+            </a:endParaRPr>
+          </a:p>
+          <a:p>
+            <a:r>
+              <a:rPr lang="pt-BR" b="1" dirty="0">
+                <a:solidFill>
+                  <a:srgbClr val="0000FF"/>
+                </a:solidFill>
+              </a:rPr>
+              <a:t>FROM</a:t>
+            </a:r>
+            <a:r>
+              <a:rPr lang="pt-BR" dirty="0"/>
+              <a:t> </a:t>
+            </a:r>
+            <a:r>
+              <a:rPr lang="pt-BR" dirty="0">
+                <a:solidFill>
+                  <a:schemeClr val="bg1">
+                    <a:lumMod val="50000"/>
+                  </a:schemeClr>
+                </a:solidFill>
+              </a:rPr>
+              <a:t>produtos</a:t>
+            </a:r>
+            <a:r>
+              <a:rPr lang="pt-BR" b="1" dirty="0"/>
+              <a:t>;</a:t>
+            </a:r>
+            <a:endParaRPr lang="pt-BR" dirty="0"/>
+          </a:p>
+          <a:p>
+            <a:r>
+              <a:rPr lang="pt-BR" dirty="0"/>
+              <a:t> </a:t>
+            </a:r>
+          </a:p>
+          <a:p>
+            <a:r>
+              <a:rPr lang="pt-BR" b="1" dirty="0"/>
+              <a:t>Exercício 3 (desafio):</a:t>
+            </a:r>
+            <a:r>
+              <a:rPr lang="pt-BR" dirty="0"/>
+              <a:t> Calcule o valor médio de vendas </a:t>
+            </a:r>
+            <a:r>
+              <a:rPr lang="pt-BR" b="1" dirty="0"/>
+              <a:t>com 2 casas decimais</a:t>
+            </a:r>
+            <a:r>
+              <a:rPr lang="pt-BR" dirty="0"/>
+              <a:t>, e também mostre o valor </a:t>
+            </a:r>
+            <a:r>
+              <a:rPr lang="pt-BR" b="1" dirty="0"/>
+              <a:t>arredondado para cima</a:t>
+            </a:r>
+            <a:r>
+              <a:rPr lang="pt-BR" dirty="0"/>
+              <a:t>.</a:t>
+            </a:r>
+            <a:br>
+              <a:rPr lang="pt-BR" dirty="0"/>
+            </a:br>
+            <a:r>
+              <a:rPr lang="pt-BR" b="1" dirty="0">
+                <a:solidFill>
+                  <a:srgbClr val="0000FF"/>
+                </a:solidFill>
+              </a:rPr>
+              <a:t>SELECT</a:t>
+            </a:r>
+            <a:r>
+              <a:rPr lang="pt-BR" dirty="0"/>
+              <a:t> </a:t>
+            </a:r>
+          </a:p>
+          <a:p>
+            <a:r>
+              <a:rPr lang="pt-BR" dirty="0"/>
+              <a:t>  </a:t>
+            </a:r>
+            <a:r>
+              <a:rPr lang="pt-BR" b="1" dirty="0">
+                <a:solidFill>
+                  <a:srgbClr val="0000FF"/>
+                </a:solidFill>
+              </a:rPr>
+              <a:t>ROUND</a:t>
+            </a:r>
+            <a:r>
+              <a:rPr lang="pt-BR" b="1" dirty="0"/>
+              <a:t>(</a:t>
+            </a:r>
+            <a:r>
+              <a:rPr lang="pt-BR" b="1" dirty="0">
+                <a:solidFill>
+                  <a:srgbClr val="0000FF"/>
+                </a:solidFill>
+              </a:rPr>
+              <a:t>AVG</a:t>
+            </a:r>
+            <a:r>
+              <a:rPr lang="pt-BR" b="1" dirty="0"/>
+              <a:t>(</a:t>
+            </a:r>
+            <a:r>
+              <a:rPr lang="pt-BR" dirty="0" err="1">
+                <a:solidFill>
+                  <a:schemeClr val="bg1">
+                    <a:lumMod val="50000"/>
+                  </a:schemeClr>
+                </a:solidFill>
+              </a:rPr>
+              <a:t>valor_total</a:t>
+            </a:r>
+            <a:r>
+              <a:rPr lang="pt-BR" b="1" dirty="0"/>
+              <a:t>),</a:t>
+            </a:r>
+            <a:r>
+              <a:rPr lang="pt-BR" dirty="0"/>
+              <a:t> </a:t>
+            </a:r>
+            <a:r>
+              <a:rPr lang="pt-BR" dirty="0">
+                <a:solidFill>
+                  <a:srgbClr val="F39211"/>
+                </a:solidFill>
+              </a:rPr>
+              <a:t>2</a:t>
+            </a:r>
+            <a:r>
+              <a:rPr lang="pt-BR" b="1" dirty="0"/>
+              <a:t>)</a:t>
+            </a:r>
+            <a:r>
+              <a:rPr lang="pt-BR" dirty="0"/>
+              <a:t> </a:t>
+            </a:r>
+            <a:r>
+              <a:rPr lang="pt-BR" b="1" dirty="0">
+                <a:solidFill>
+                  <a:srgbClr val="0000FF"/>
+                </a:solidFill>
+              </a:rPr>
+              <a:t>AS</a:t>
+            </a:r>
+            <a:r>
+              <a:rPr lang="pt-BR" dirty="0"/>
+              <a:t> </a:t>
+            </a:r>
+            <a:r>
+              <a:rPr lang="pt-BR" dirty="0" err="1">
+                <a:solidFill>
+                  <a:schemeClr val="bg1">
+                    <a:lumMod val="50000"/>
+                  </a:schemeClr>
+                </a:solidFill>
+              </a:rPr>
+              <a:t>media_arredondada</a:t>
+            </a:r>
+            <a:r>
+              <a:rPr lang="pt-BR" b="1" dirty="0"/>
+              <a:t>,</a:t>
+            </a:r>
+            <a:endParaRPr lang="pt-BR" dirty="0"/>
+          </a:p>
+          <a:p>
+            <a:r>
+              <a:rPr lang="pt-BR" dirty="0"/>
+              <a:t>  </a:t>
+            </a:r>
+            <a:r>
+              <a:rPr lang="pt-BR" b="1" dirty="0">
+                <a:solidFill>
+                  <a:srgbClr val="0000FF"/>
+                </a:solidFill>
+              </a:rPr>
+              <a:t>CEIL</a:t>
+            </a:r>
+            <a:r>
+              <a:rPr lang="pt-BR" b="1" dirty="0"/>
+              <a:t>(</a:t>
+            </a:r>
+            <a:r>
+              <a:rPr lang="pt-BR" b="1" dirty="0">
+                <a:solidFill>
+                  <a:srgbClr val="0000FF"/>
+                </a:solidFill>
+              </a:rPr>
+              <a:t>AVG</a:t>
+            </a:r>
+            <a:r>
+              <a:rPr lang="pt-BR" b="1" dirty="0"/>
+              <a:t>(</a:t>
+            </a:r>
+            <a:r>
+              <a:rPr lang="pt-BR" dirty="0" err="1">
+                <a:solidFill>
+                  <a:schemeClr val="bg1">
+                    <a:lumMod val="50000"/>
+                  </a:schemeClr>
+                </a:solidFill>
+              </a:rPr>
+              <a:t>valor_total</a:t>
+            </a:r>
+            <a:r>
+              <a:rPr lang="pt-BR" b="1" dirty="0"/>
+              <a:t>))</a:t>
+            </a:r>
+            <a:r>
+              <a:rPr lang="pt-BR" dirty="0"/>
+              <a:t> </a:t>
+            </a:r>
+            <a:r>
+              <a:rPr lang="pt-BR" b="1" dirty="0">
+                <a:solidFill>
+                  <a:srgbClr val="0000FF"/>
+                </a:solidFill>
+              </a:rPr>
+              <a:t>AS</a:t>
+            </a:r>
+            <a:r>
+              <a:rPr lang="pt-BR" dirty="0"/>
+              <a:t> </a:t>
+            </a:r>
+            <a:r>
+              <a:rPr lang="pt-BR" dirty="0" err="1">
+                <a:solidFill>
+                  <a:schemeClr val="bg1">
+                    <a:lumMod val="50000"/>
+                  </a:schemeClr>
+                </a:solidFill>
+              </a:rPr>
+              <a:t>media_ceil</a:t>
+            </a:r>
+            <a:endParaRPr lang="pt-BR" dirty="0">
+              <a:solidFill>
+                <a:schemeClr val="bg1">
+                  <a:lumMod val="50000"/>
+                </a:schemeClr>
+              </a:solidFill>
+            </a:endParaRPr>
+          </a:p>
+          <a:p>
+            <a:r>
+              <a:rPr lang="pt-BR" b="1" dirty="0">
+                <a:solidFill>
+                  <a:srgbClr val="0000FF"/>
+                </a:solidFill>
+              </a:rPr>
+              <a:t>FROM</a:t>
+            </a:r>
+            <a:r>
+              <a:rPr lang="pt-BR" dirty="0"/>
+              <a:t> </a:t>
+            </a:r>
+            <a:r>
+              <a:rPr lang="pt-BR" dirty="0">
+                <a:solidFill>
+                  <a:schemeClr val="bg1">
+                    <a:lumMod val="50000"/>
+                  </a:schemeClr>
+                </a:solidFill>
+              </a:rPr>
+              <a:t>vendas</a:t>
+            </a:r>
+            <a:r>
+              <a:rPr lang="pt-BR" b="1" dirty="0"/>
+              <a:t>;</a:t>
+            </a:r>
+            <a:endParaRPr lang="pt-BR" dirty="0"/>
+          </a:p>
+        </p:txBody>
+      </p:sp>
+    </p:spTree>
+    <p:extLst>
+      <p:ext uri="{BB962C8B-B14F-4D97-AF65-F5344CB8AC3E}">
+        <p14:creationId xmlns:p14="http://schemas.microsoft.com/office/powerpoint/2010/main" val="3613866968"/>
+      </p:ext>
+    </p:extLst>
+  </p:cSld>
+  <p:clrMapOvr>
+    <a:masterClrMapping/>
+  </p:clrMapOvr>
+</p:sld>
+</file>
+
+<file path=ppt/slides/slide21.xml><?xml version="1.0" encoding="utf-8"?>
+<p:sld xmlns:a="http://schemas.openxmlformats.org/drawingml/2006/main" xmlns:r="http://schemas.openxmlformats.org/officeDocument/2006/relationships" xmlns:p="http://schemas.openxmlformats.org/presentationml/2006/main">
+  <p:cSld>
+    <p:spTree>
+      <p:nvGrpSpPr>
+        <p:cNvPr id="1" name=""/>
+        <p:cNvGrpSpPr/>
+        <p:nvPr/>
+      </p:nvGrpSpPr>
+      <p:grpSpPr>
+        <a:xfrm>
+          <a:off x="0" y="0"/>
+          <a:ext cx="0" cy="0"/>
+          <a:chOff x="0" y="0"/>
+          <a:chExt cx="0" cy="0"/>
+        </a:xfrm>
+      </p:grpSpPr>
+      <p:sp>
+        <p:nvSpPr>
+          <p:cNvPr id="2" name="Título 1">
+            <a:extLst>
+              <a:ext uri="{FF2B5EF4-FFF2-40B4-BE49-F238E27FC236}">
+                <a16:creationId xmlns:a16="http://schemas.microsoft.com/office/drawing/2014/main" id="{E1BF4364-A6CD-4460-A48D-6779B48ADDBE}"/>
+              </a:ext>
+            </a:extLst>
+          </p:cNvPr>
+          <p:cNvSpPr>
+            <a:spLocks noGrp="1"/>
+          </p:cNvSpPr>
+          <p:nvPr>
+            <p:ph type="title"/>
+          </p:nvPr>
+        </p:nvSpPr>
+        <p:spPr>
+          <a:xfrm>
+            <a:off x="338845" y="158493"/>
+            <a:ext cx="10954797" cy="1533440"/>
+          </a:xfrm>
+        </p:spPr>
+        <p:txBody>
+          <a:bodyPr>
+            <a:noAutofit/>
+          </a:bodyPr>
+          <a:lstStyle/>
+          <a:p>
+            <a:r>
+              <a:rPr lang="pt-BR" sz="3300" b="1" dirty="0">
+                <a:solidFill>
+                  <a:srgbClr val="00758F"/>
+                </a:solidFill>
+              </a:rPr>
+              <a:t>Consultas com Funções: </a:t>
+            </a:r>
+            <a:br>
+              <a:rPr lang="pt-BR" sz="3300" b="1" dirty="0">
+                <a:solidFill>
+                  <a:srgbClr val="00758F"/>
+                </a:solidFill>
+              </a:rPr>
+            </a:br>
+            <a:r>
+              <a:rPr lang="pt-BR" sz="3300" b="1" dirty="0">
+                <a:solidFill>
+                  <a:srgbClr val="F39211"/>
+                </a:solidFill>
+              </a:rPr>
+              <a:t>1.5 Funções de Cálculo e Operadores Aritméticos no MySQL (Exercícios)</a:t>
+            </a:r>
+            <a:endParaRPr lang="pt-BR" sz="3300" dirty="0">
+              <a:solidFill>
+                <a:srgbClr val="F39211"/>
+              </a:solidFill>
+            </a:endParaRPr>
+          </a:p>
+        </p:txBody>
+      </p:sp>
+      <p:pic>
+        <p:nvPicPr>
+          <p:cNvPr id="4" name="Picture 6" descr="https://www.mysql.com/common/logos/logo-mysql-170x115.png">
+            <a:extLst>
+              <a:ext uri="{FF2B5EF4-FFF2-40B4-BE49-F238E27FC236}">
+                <a16:creationId xmlns:a16="http://schemas.microsoft.com/office/drawing/2014/main" id="{441DFD02-E8A2-4690-9CD7-1CC407F2024E}"/>
+              </a:ext>
+            </a:extLst>
+          </p:cNvPr>
+          <p:cNvPicPr>
+            <a:picLocks noChangeAspect="1" noChangeArrowheads="1"/>
+          </p:cNvPicPr>
+          <p:nvPr/>
+        </p:nvPicPr>
+        <p:blipFill>
+          <a:blip r:embed="rId2">
+            <a:extLst>
+              <a:ext uri="{28A0092B-C50C-407E-A947-70E740481C1C}">
+                <a14:useLocalDpi xmlns:a14="http://schemas.microsoft.com/office/drawing/2010/main" val="0"/>
+              </a:ext>
+            </a:extLst>
+          </a:blip>
+          <a:srcRect/>
+          <a:stretch>
+            <a:fillRect/>
+          </a:stretch>
+        </p:blipFill>
+        <p:spPr bwMode="auto">
+          <a:xfrm>
+            <a:off x="9774793" y="5753675"/>
+            <a:ext cx="1385775" cy="936973"/>
+          </a:xfrm>
+          <a:prstGeom prst="rect">
+            <a:avLst/>
+          </a:prstGeom>
+          <a:noFill/>
+          <a:extLst>
+            <a:ext uri="{909E8E84-426E-40DD-AFC4-6F175D3DCCD1}">
+              <a14:hiddenFill xmlns:a14="http://schemas.microsoft.com/office/drawing/2010/main">
+                <a:solidFill>
+                  <a:srgbClr val="FFFFFF"/>
+                </a:solidFill>
+              </a14:hiddenFill>
+            </a:ext>
+          </a:extLst>
+        </p:spPr>
+      </p:pic>
+      <p:sp>
+        <p:nvSpPr>
+          <p:cNvPr id="6" name="CaixaDeTexto 5">
+            <a:extLst>
+              <a:ext uri="{FF2B5EF4-FFF2-40B4-BE49-F238E27FC236}">
+                <a16:creationId xmlns:a16="http://schemas.microsoft.com/office/drawing/2014/main" id="{AF06CEA4-1D6A-4FB2-B738-A9362ADA1CCA}"/>
+              </a:ext>
+            </a:extLst>
+          </p:cNvPr>
+          <p:cNvSpPr txBox="1"/>
+          <p:nvPr/>
+        </p:nvSpPr>
+        <p:spPr>
+          <a:xfrm>
+            <a:off x="338845" y="1873858"/>
+            <a:ext cx="10088523" cy="2800767"/>
+          </a:xfrm>
+          <a:prstGeom prst="rect">
+            <a:avLst/>
+          </a:prstGeom>
+          <a:noFill/>
+        </p:spPr>
+        <p:txBody>
+          <a:bodyPr wrap="square" rtlCol="0">
+            <a:spAutoFit/>
+          </a:bodyPr>
+          <a:lstStyle/>
+          <a:p>
+            <a:r>
+              <a:rPr lang="pt-BR" sz="2200" b="1" dirty="0"/>
+              <a:t>Exercício 1 (básico):</a:t>
+            </a:r>
+            <a:r>
+              <a:rPr lang="pt-BR" sz="2200" dirty="0"/>
+              <a:t> Mostre o total de valor por item vendido (preço x quantidade), da tabela </a:t>
+            </a:r>
+            <a:r>
+              <a:rPr lang="pt-BR" sz="2200" dirty="0" err="1"/>
+              <a:t>itens_venda</a:t>
+            </a:r>
+            <a:r>
+              <a:rPr lang="pt-BR" sz="2200" dirty="0"/>
+              <a:t>.</a:t>
+            </a:r>
+            <a:br>
+              <a:rPr lang="pt-BR" sz="2200" dirty="0"/>
+            </a:br>
+            <a:r>
+              <a:rPr lang="pt-BR" sz="2200" dirty="0"/>
+              <a:t> </a:t>
+            </a:r>
+          </a:p>
+          <a:p>
+            <a:r>
+              <a:rPr lang="pt-BR" sz="2200" b="1" dirty="0"/>
+              <a:t>Exercício 2 (intermediário):</a:t>
+            </a:r>
+            <a:r>
+              <a:rPr lang="pt-BR" sz="2200" dirty="0"/>
+              <a:t> Liste o nome e o valor estimado em estoque dos produtos, arredondado com 2 casas decimais.</a:t>
+            </a:r>
+          </a:p>
+          <a:p>
+            <a:br>
+              <a:rPr lang="pt-BR" sz="2200" dirty="0"/>
+            </a:br>
+            <a:r>
+              <a:rPr lang="pt-BR" sz="2200" b="1" dirty="0"/>
+              <a:t>Exercício 3 (desafio):</a:t>
+            </a:r>
+            <a:r>
+              <a:rPr lang="pt-BR" sz="2200" dirty="0"/>
+              <a:t> Calcule o valor médio de vendas </a:t>
+            </a:r>
+            <a:r>
+              <a:rPr lang="pt-BR" sz="2200" b="1" dirty="0"/>
+              <a:t>com 2 casas decimais</a:t>
+            </a:r>
+            <a:r>
+              <a:rPr lang="pt-BR" sz="2200" dirty="0"/>
+              <a:t>, e também mostre o valor </a:t>
+            </a:r>
+            <a:r>
+              <a:rPr lang="pt-BR" sz="2200" b="1" dirty="0"/>
+              <a:t>arredondado para cima</a:t>
+            </a:r>
+            <a:r>
+              <a:rPr lang="pt-BR" sz="2200" dirty="0"/>
+              <a:t>.</a:t>
+            </a:r>
+          </a:p>
+        </p:txBody>
+      </p:sp>
+    </p:spTree>
+    <p:extLst>
+      <p:ext uri="{BB962C8B-B14F-4D97-AF65-F5344CB8AC3E}">
+        <p14:creationId xmlns:p14="http://schemas.microsoft.com/office/powerpoint/2010/main" val="3812936589"/>
       </p:ext>
     </p:extLst>
   </p:cSld>
